--- a/docs/sueo42-layout.pptx
+++ b/docs/sueo42-layout.pptx
@@ -14,9 +14,10 @@
     <p:sldId id="262" r:id="rId8"/>
     <p:sldId id="263" r:id="rId9"/>
     <p:sldId id="264" r:id="rId10"/>
+    <p:sldId id="265" r:id="rId11"/>
   </p:sldIdLst>
   <p:notesMasterIdLst>
-    <p:notesMasterId r:id="rId11"/>
+    <p:notesMasterId r:id="rId12"/>
   </p:notesMasterIdLst>
   <p:sldSz cx="9144000" cy="5143500"/>
   <p:notesSz cx="5143500" cy="9144000"/>
@@ -552,6 +553,94 @@
 </p:notes>
 </file>
 
+<file path=ppt/notesSlides/notesSlide10.xml><?xml version="1.0" encoding="utf-8"?>
+<p:notes xmlns:a="http://schemas.openxmlformats.org/drawingml/2006/main" xmlns:r="http://schemas.openxmlformats.org/officeDocument/2006/relationships" xmlns:p="http://schemas.openxmlformats.org/presentationml/2006/main">
+  <p:cSld>
+    <p:spTree>
+      <p:nvGrpSpPr>
+        <p:cNvPr id="1" name=""/>
+        <p:cNvGrpSpPr/>
+        <p:nvPr/>
+      </p:nvGrpSpPr>
+      <p:grpSpPr>
+        <a:xfrm>
+          <a:off x="0" y="0"/>
+          <a:ext cx="0" cy="0"/>
+          <a:chOff x="0" y="0"/>
+          <a:chExt cx="0" cy="0"/>
+        </a:xfrm>
+      </p:grpSpPr>
+      <p:sp>
+        <p:nvSpPr>
+          <p:cNvPr id="2" name="Slide Image Placeholder 1"/>
+          <p:cNvSpPr>
+            <a:spLocks noGrp="1" noRot="1" noChangeAspect="1"/>
+          </p:cNvSpPr>
+          <p:nvPr>
+            <p:ph type="sldImg"/>
+          </p:nvPr>
+        </p:nvSpPr>
+        <p:spPr/>
+      </p:sp>
+      <p:sp>
+        <p:nvSpPr>
+          <p:cNvPr id="3" name="Notes Placeholder 2"/>
+          <p:cNvSpPr>
+            <a:spLocks noGrp="1"/>
+          </p:cNvSpPr>
+          <p:nvPr>
+            <p:ph type="body" idx="1"/>
+          </p:nvPr>
+        </p:nvSpPr>
+        <p:spPr/>
+        <p:txBody>
+          <a:bodyPr/>
+          <a:lstStyle/>
+          <a:p>
+            <a:r>
+              <a:rPr lang="en-US" dirty="0"/>
+              <a:t>2026-10-31 기준</a:t>
+            </a:r>
+            <a:endParaRPr lang="en-US" dirty="0"/>
+          </a:p>
+        </p:txBody>
+      </p:sp>
+      <p:sp>
+        <p:nvSpPr>
+          <p:cNvPr id="4" name="Slide Number Placeholder 3"/>
+          <p:cNvSpPr>
+            <a:spLocks noGrp="1"/>
+          </p:cNvSpPr>
+          <p:nvPr>
+            <p:ph type="sldNum" sz="quarter" idx="10"/>
+          </p:nvPr>
+        </p:nvSpPr>
+        <p:spPr/>
+        <p:txBody>
+          <a:bodyPr/>
+          <a:lstStyle/>
+          <a:p>
+            <a:fld id="{F7021451-1387-4CA6-816F-3879F97B5CBC}" type="slidenum">
+              <a:rPr lang="en-US"/>
+              <a:t>10</a:t>
+            </a:fld>
+            <a:endParaRPr lang="en-US"/>
+          </a:p>
+        </p:txBody>
+      </p:sp>
+    </p:spTree>
+    <p:extLst>
+      <p:ext uri="{BB962C8B-B14F-4D97-AF65-F5344CB8AC3E}">
+        <p14:creationId xmlns:p14="http://schemas.microsoft.com/office/powerpoint/2010/main" val="1024086991"/>
+      </p:ext>
+    </p:extLst>
+  </p:cSld>
+  <p:clrMapOvr>
+    <a:masterClrMapping/>
+  </p:clrMapOvr>
+</p:notes>
+</file>
+
 <file path=ppt/notesSlides/notesSlide2.xml><?xml version="1.0" encoding="utf-8"?>
 <p:notes xmlns:a="http://schemas.openxmlformats.org/drawingml/2006/main" xmlns:r="http://schemas.openxmlformats.org/officeDocument/2006/relationships" xmlns:p="http://schemas.openxmlformats.org/presentationml/2006/main">
   <p:cSld>
@@ -950,7 +1039,7 @@
           <a:p>
             <a:r>
               <a:rPr lang="en-US" dirty="0"/>
-              <a:t>하단 탭: 검색 / 학습하기 / 직접 해보기</a:t>
+              <a:t>AI-Hub 「수어 영상」은 학습에만 쓰고 원본은 공개하지 않음. 학습은 국내 PC에서 (국외 반출 주의)</a:t>
             </a:r>
             <a:endParaRPr lang="en-US" dirty="0"/>
           </a:p>
@@ -1038,7 +1127,7 @@
           <a:p>
             <a:r>
               <a:rPr lang="en-US" dirty="0"/>
-              <a:t>결선 시연 흐름: 단어 고르기 → 따라 하기 → 결과에서 사용자가 선택</a:t>
+              <a:t>하단 탭: 검색 / 학습하기 / 직접 해보기</a:t>
             </a:r>
             <a:endParaRPr lang="en-US" dirty="0"/>
           </a:p>
@@ -1126,7 +1215,7 @@
           <a:p>
             <a:r>
               <a:rPr lang="en-US" dirty="0"/>
-              <a:t>점수·정답/오답 표시를 둘지는 팀 결정 필요 (강의 원칙과 충돌 여부)</a:t>
+              <a:t>결선 시연 흐름: 단어 고르기 → 따라 하기 → 결과에서 사용자가 선택</a:t>
             </a:r>
             <a:endParaRPr lang="en-US" dirty="0"/>
           </a:p>
@@ -1214,7 +1303,7 @@
           <a:p>
             <a:r>
               <a:rPr lang="en-US" dirty="0"/>
-              <a:t>2026-10-31 기준</a:t>
+              <a:t>점수·정답/오답 표시를 둘지는 팀 결정 필요 (강의 원칙과 충돌 여부)</a:t>
             </a:r>
             <a:endParaRPr lang="en-US" dirty="0"/>
           </a:p>
@@ -2046,6 +2135,612 @@
 </p:sld>
 </file>
 
+<file path=ppt/slides/slide10.xml><?xml version="1.0" encoding="utf-8"?>
+<p:sld xmlns:a="http://schemas.openxmlformats.org/drawingml/2006/main" xmlns:r="http://schemas.openxmlformats.org/officeDocument/2006/relationships" xmlns:p="http://schemas.openxmlformats.org/presentationml/2006/main">
+  <p:cSld name="Slide 10">
+    <p:spTree>
+      <p:nvGrpSpPr>
+        <p:cNvPr id="1" name=""/>
+        <p:cNvGrpSpPr/>
+        <p:nvPr/>
+      </p:nvGrpSpPr>
+      <p:grpSpPr>
+        <a:xfrm>
+          <a:off x="0" y="0"/>
+          <a:ext cx="0" cy="0"/>
+          <a:chOff x="0" y="0"/>
+          <a:chExt cx="0" cy="0"/>
+        </a:xfrm>
+      </p:grpSpPr>
+      <p:sp>
+        <p:nvSpPr>
+          <p:cNvPr id="2" name="Text 0"/>
+          <p:cNvSpPr/>
+          <p:nvPr>
+            <p:ph idx="100" type="title" hasCustomPrompt="1"/>
+          </p:nvPr>
+        </p:nvSpPr>
+        <p:spPr>
+          <a:xfrm>
+            <a:off x="457200" y="274320"/>
+            <a:ext cx="8229600" cy="548640"/>
+          </a:xfrm>
+          <a:prstGeom prst="rect">
+            <a:avLst/>
+          </a:prstGeom>
+          <a:noFill/>
+          <a:ln/>
+        </p:spPr>
+        <p:txBody>
+          <a:bodyPr wrap="square" lIns="0" tIns="0" rIns="0" bIns="0" rtlCol="0" anchor="ctr"/>
+          <a:lstStyle/>
+          <a:p>
+            <a:pPr indent="0" marL="0">
+              <a:buNone/>
+            </a:pPr>
+            <a:r>
+              <a:rPr lang="en-US" sz="2600" b="1" dirty="0">
+                <a:solidFill>
+                  <a:schemeClr val="tx1"/>
+                </a:solidFill>
+                <a:latin typeface="Malgun Gothic" pitchFamily="34" charset="0"/>
+                <a:ea typeface="Malgun Gothic" pitchFamily="34" charset="-122"/>
+                <a:cs typeface="Malgun Gothic" pitchFamily="34" charset="-120"/>
+              </a:rPr>
+              <a:t>지금 어디까지 왔나요</a:t>
+            </a:r>
+            <a:endParaRPr lang="en-US" sz="2600" dirty="0"/>
+          </a:p>
+        </p:txBody>
+      </p:sp>
+      <p:sp>
+        <p:nvSpPr>
+          <p:cNvPr id="4" name="Shape 1"/>
+          <p:cNvSpPr/>
+          <p:nvPr/>
+        </p:nvSpPr>
+        <p:spPr>
+          <a:xfrm>
+            <a:off x="457200" y="1097280"/>
+            <a:ext cx="2615184" cy="3474720"/>
+          </a:xfrm>
+          <a:prstGeom prst="roundRect">
+            <a:avLst>
+              <a:gd name="adj" fmla="val 2797"/>
+            </a:avLst>
+          </a:prstGeom>
+          <a:solidFill>
+            <a:schemeClr val="bg2"/>
+          </a:solidFill>
+          <a:ln w="9525">
+            <a:solidFill>
+              <a:schemeClr val="accent3"/>
+            </a:solidFill>
+            <a:prstDash val="solid"/>
+          </a:ln>
+        </p:spPr>
+      </p:sp>
+      <p:sp>
+        <p:nvSpPr>
+          <p:cNvPr id="5" name="Text 2"/>
+          <p:cNvSpPr txBox="1"/>
+          <p:nvPr/>
+        </p:nvSpPr>
+        <p:spPr>
+          <a:xfrm>
+            <a:off x="685800" y="1280160"/>
+            <a:ext cx="2194560" cy="365760"/>
+          </a:xfrm>
+          <a:prstGeom prst="rect">
+            <a:avLst/>
+          </a:prstGeom>
+          <a:noFill/>
+          <a:ln/>
+        </p:spPr>
+        <p:txBody>
+          <a:bodyPr wrap="square" lIns="0" tIns="0" rIns="0" bIns="0" rtlCol="0" anchor="t"/>
+          <a:lstStyle/>
+          <a:p>
+            <a:pPr indent="0" marL="0">
+              <a:buNone/>
+            </a:pPr>
+            <a:r>
+              <a:rPr lang="en-US" sz="1800" b="1" dirty="0">
+                <a:solidFill>
+                  <a:schemeClr val="tx1"/>
+                </a:solidFill>
+                <a:latin typeface="Malgun Gothic" pitchFamily="34" charset="0"/>
+                <a:ea typeface="Malgun Gothic" pitchFamily="34" charset="-122"/>
+                <a:cs typeface="Malgun Gothic" pitchFamily="34" charset="-120"/>
+              </a:rPr>
+              <a:t>완료</a:t>
+            </a:r>
+            <a:endParaRPr lang="en-US" sz="1800" dirty="0"/>
+          </a:p>
+        </p:txBody>
+      </p:sp>
+      <p:sp>
+        <p:nvSpPr>
+          <p:cNvPr id="6" name="Text 3"/>
+          <p:cNvSpPr txBox="1"/>
+          <p:nvPr/>
+        </p:nvSpPr>
+        <p:spPr>
+          <a:xfrm>
+            <a:off x="685800" y="1783080"/>
+            <a:ext cx="2194560" cy="2651760"/>
+          </a:xfrm>
+          <a:prstGeom prst="rect">
+            <a:avLst/>
+          </a:prstGeom>
+          <a:noFill/>
+          <a:ln/>
+        </p:spPr>
+        <p:txBody>
+          <a:bodyPr wrap="square" lIns="0" tIns="0" rIns="0" bIns="0" rtlCol="0" anchor="t"/>
+          <a:lstStyle/>
+          <a:p>
+            <a:pPr marL="342900" indent="-342900">
+              <a:spcAft>
+                <a:spcPts val="800"/>
+              </a:spcAft>
+              <a:buSzPct val="100000"/>
+              <a:buChar char="•"/>
+            </a:pPr>
+            <a:r>
+              <a:rPr lang="en-US" sz="1400" dirty="0">
+                <a:solidFill>
+                  <a:schemeClr val="tx1"/>
+                </a:solidFill>
+                <a:latin typeface="Malgun Gothic" pitchFamily="34" charset="0"/>
+                <a:ea typeface="Malgun Gothic" pitchFamily="34" charset="-122"/>
+                <a:cs typeface="Malgun Gothic" pitchFamily="34" charset="-120"/>
+              </a:rPr>
+              <a:t>42개 단어 (AI-Hub 수어 영상 단어)</a:t>
+            </a:r>
+            <a:endParaRPr lang="en-US" sz="1400" dirty="0"/>
+          </a:p>
+          <a:p>
+            <a:pPr marL="342900" indent="-342900">
+              <a:spcAft>
+                <a:spcPts val="800"/>
+              </a:spcAft>
+              <a:buSzPct val="100000"/>
+              <a:buChar char="•"/>
+            </a:pPr>
+            <a:r>
+              <a:rPr lang="en-US" sz="1400" dirty="0">
+                <a:solidFill>
+                  <a:schemeClr val="tx1"/>
+                </a:solidFill>
+                <a:latin typeface="Malgun Gothic" pitchFamily="34" charset="0"/>
+                <a:ea typeface="Malgun Gothic" pitchFamily="34" charset="-122"/>
+                <a:cs typeface="Malgun Gothic" pitchFamily="34" charset="-120"/>
+              </a:rPr>
+              <a:t>통합 멘토링 강의 반영</a:t>
+            </a:r>
+            <a:endParaRPr lang="en-US" sz="1400" dirty="0"/>
+          </a:p>
+          <a:p>
+            <a:pPr marL="342900" indent="-342900">
+              <a:spcAft>
+                <a:spcPts val="800"/>
+              </a:spcAft>
+              <a:buSzPct val="100000"/>
+              <a:buChar char="•"/>
+            </a:pPr>
+            <a:r>
+              <a:rPr lang="en-US" sz="1400" dirty="0">
+                <a:solidFill>
+                  <a:schemeClr val="tx1"/>
+                </a:solidFill>
+                <a:latin typeface="Malgun Gothic" pitchFamily="34" charset="0"/>
+                <a:ea typeface="Malgun Gothic" pitchFamily="34" charset="-122"/>
+                <a:cs typeface="Malgun Gothic" pitchFamily="34" charset="-120"/>
+              </a:rPr>
+              <a:t>직접 해보기 시제품 (카메라 · 손 좌표)</a:t>
+            </a:r>
+            <a:endParaRPr lang="en-US" sz="1400" dirty="0"/>
+          </a:p>
+          <a:p>
+            <a:pPr marL="342900" indent="-342900">
+              <a:spcAft>
+                <a:spcPts val="800"/>
+              </a:spcAft>
+              <a:buSzPct val="100000"/>
+              <a:buChar char="•"/>
+            </a:pPr>
+            <a:r>
+              <a:rPr lang="en-US" sz="1400" dirty="0">
+                <a:solidFill>
+                  <a:schemeClr val="tx1"/>
+                </a:solidFill>
+                <a:latin typeface="Malgun Gothic" pitchFamily="34" charset="0"/>
+                <a:ea typeface="Malgun Gothic" pitchFamily="34" charset="-122"/>
+                <a:cs typeface="Malgun Gothic" pitchFamily="34" charset="-120"/>
+              </a:rPr>
+              <a:t>멘토링 질문 8개 정리</a:t>
+            </a:r>
+            <a:endParaRPr lang="en-US" sz="1400" dirty="0"/>
+          </a:p>
+        </p:txBody>
+      </p:sp>
+      <p:sp>
+        <p:nvSpPr>
+          <p:cNvPr id="7" name="Shape 4"/>
+          <p:cNvSpPr/>
+          <p:nvPr/>
+        </p:nvSpPr>
+        <p:spPr>
+          <a:xfrm>
+            <a:off x="3273552" y="1097280"/>
+            <a:ext cx="2615184" cy="3474720"/>
+          </a:xfrm>
+          <a:prstGeom prst="roundRect">
+            <a:avLst>
+              <a:gd name="adj" fmla="val 2797"/>
+            </a:avLst>
+          </a:prstGeom>
+          <a:solidFill>
+            <a:schemeClr val="accent4"/>
+          </a:solidFill>
+          <a:ln w="9525">
+            <a:solidFill>
+              <a:schemeClr val="accent3"/>
+            </a:solidFill>
+            <a:prstDash val="solid"/>
+          </a:ln>
+        </p:spPr>
+      </p:sp>
+      <p:sp>
+        <p:nvSpPr>
+          <p:cNvPr id="8" name="Text 5"/>
+          <p:cNvSpPr txBox="1"/>
+          <p:nvPr/>
+        </p:nvSpPr>
+        <p:spPr>
+          <a:xfrm>
+            <a:off x="3502152" y="1280160"/>
+            <a:ext cx="2194560" cy="365760"/>
+          </a:xfrm>
+          <a:prstGeom prst="rect">
+            <a:avLst/>
+          </a:prstGeom>
+          <a:noFill/>
+          <a:ln/>
+        </p:spPr>
+        <p:txBody>
+          <a:bodyPr wrap="square" lIns="0" tIns="0" rIns="0" bIns="0" rtlCol="0" anchor="t"/>
+          <a:lstStyle/>
+          <a:p>
+            <a:pPr indent="0" marL="0">
+              <a:buNone/>
+            </a:pPr>
+            <a:r>
+              <a:rPr lang="en-US" sz="1800" b="1" dirty="0">
+                <a:solidFill>
+                  <a:schemeClr val="accent1"/>
+                </a:solidFill>
+                <a:latin typeface="Malgun Gothic" pitchFamily="34" charset="0"/>
+                <a:ea typeface="Malgun Gothic" pitchFamily="34" charset="-122"/>
+                <a:cs typeface="Malgun Gothic" pitchFamily="34" charset="-120"/>
+              </a:rPr>
+              <a:t>진행 중</a:t>
+            </a:r>
+            <a:endParaRPr lang="en-US" sz="1800" dirty="0"/>
+          </a:p>
+        </p:txBody>
+      </p:sp>
+      <p:sp>
+        <p:nvSpPr>
+          <p:cNvPr id="9" name="Text 6"/>
+          <p:cNvSpPr txBox="1"/>
+          <p:nvPr/>
+        </p:nvSpPr>
+        <p:spPr>
+          <a:xfrm>
+            <a:off x="3502152" y="1783080"/>
+            <a:ext cx="2194560" cy="2651760"/>
+          </a:xfrm>
+          <a:prstGeom prst="rect">
+            <a:avLst/>
+          </a:prstGeom>
+          <a:noFill/>
+          <a:ln/>
+        </p:spPr>
+        <p:txBody>
+          <a:bodyPr wrap="square" lIns="0" tIns="0" rIns="0" bIns="0" rtlCol="0" anchor="t"/>
+          <a:lstStyle/>
+          <a:p>
+            <a:pPr marL="342900" indent="-342900">
+              <a:spcAft>
+                <a:spcPts val="800"/>
+              </a:spcAft>
+              <a:buSzPct val="100000"/>
+              <a:buChar char="•"/>
+            </a:pPr>
+            <a:r>
+              <a:rPr lang="en-US" sz="1400" dirty="0">
+                <a:solidFill>
+                  <a:schemeClr val="tx1"/>
+                </a:solidFill>
+                <a:latin typeface="Malgun Gothic" pitchFamily="34" charset="0"/>
+                <a:ea typeface="Malgun Gothic" pitchFamily="34" charset="-122"/>
+                <a:cs typeface="Malgun Gothic" pitchFamily="34" charset="-120"/>
+              </a:rPr>
+              <a:t>직접 해보기 단어 5~10개 고르기</a:t>
+            </a:r>
+            <a:endParaRPr lang="en-US" sz="1400" dirty="0"/>
+          </a:p>
+          <a:p>
+            <a:pPr marL="342900" indent="-342900">
+              <a:spcAft>
+                <a:spcPts val="800"/>
+              </a:spcAft>
+              <a:buSzPct val="100000"/>
+              <a:buChar char="•"/>
+            </a:pPr>
+            <a:r>
+              <a:rPr lang="en-US" sz="1400" dirty="0">
+                <a:solidFill>
+                  <a:schemeClr val="tx1"/>
+                </a:solidFill>
+                <a:latin typeface="Malgun Gothic" pitchFamily="34" charset="0"/>
+                <a:ea typeface="Malgun Gothic" pitchFamily="34" charset="-122"/>
+                <a:cs typeface="Malgun Gothic" pitchFamily="34" charset="-120"/>
+              </a:rPr>
+              <a:t>AI-Hub 영상 받기 · 학습</a:t>
+            </a:r>
+            <a:endParaRPr lang="en-US" sz="1400" dirty="0"/>
+          </a:p>
+          <a:p>
+            <a:pPr marL="342900" indent="-342900">
+              <a:spcAft>
+                <a:spcPts val="800"/>
+              </a:spcAft>
+              <a:buSzPct val="100000"/>
+              <a:buChar char="•"/>
+            </a:pPr>
+            <a:r>
+              <a:rPr lang="en-US" sz="1400" dirty="0">
+                <a:solidFill>
+                  <a:schemeClr val="tx1"/>
+                </a:solidFill>
+                <a:latin typeface="Malgun Gothic" pitchFamily="34" charset="0"/>
+                <a:ea typeface="Malgun Gothic" pitchFamily="34" charset="-122"/>
+                <a:cs typeface="Malgun Gothic" pitchFamily="34" charset="-120"/>
+              </a:rPr>
+              <a:t>지역 수어 영상 촬영 · 협회 문의</a:t>
+            </a:r>
+            <a:endParaRPr lang="en-US" sz="1400" dirty="0"/>
+          </a:p>
+          <a:p>
+            <a:pPr marL="342900" indent="-342900">
+              <a:spcAft>
+                <a:spcPts val="800"/>
+              </a:spcAft>
+              <a:buSzPct val="100000"/>
+              <a:buChar char="•"/>
+            </a:pPr>
+            <a:r>
+              <a:rPr lang="en-US" sz="1400" dirty="0">
+                <a:solidFill>
+                  <a:schemeClr val="tx1"/>
+                </a:solidFill>
+                <a:latin typeface="Malgun Gothic" pitchFamily="34" charset="0"/>
+                <a:ea typeface="Malgun Gothic" pitchFamily="34" charset="-122"/>
+                <a:cs typeface="Malgun Gothic" pitchFamily="34" charset="-120"/>
+              </a:rPr>
+              <a:t>11월 코디네이터 멘토링</a:t>
+            </a:r>
+            <a:endParaRPr lang="en-US" sz="1400" dirty="0"/>
+          </a:p>
+        </p:txBody>
+      </p:sp>
+      <p:sp>
+        <p:nvSpPr>
+          <p:cNvPr id="10" name="Shape 7"/>
+          <p:cNvSpPr/>
+          <p:nvPr/>
+        </p:nvSpPr>
+        <p:spPr>
+          <a:xfrm>
+            <a:off x="6089904" y="1097280"/>
+            <a:ext cx="2615184" cy="3474720"/>
+          </a:xfrm>
+          <a:prstGeom prst="roundRect">
+            <a:avLst>
+              <a:gd name="adj" fmla="val 2797"/>
+            </a:avLst>
+          </a:prstGeom>
+          <a:solidFill>
+            <a:schemeClr val="bg2"/>
+          </a:solidFill>
+          <a:ln w="9525">
+            <a:solidFill>
+              <a:schemeClr val="accent3"/>
+            </a:solidFill>
+            <a:prstDash val="solid"/>
+          </a:ln>
+        </p:spPr>
+      </p:sp>
+      <p:sp>
+        <p:nvSpPr>
+          <p:cNvPr id="11" name="Text 8"/>
+          <p:cNvSpPr txBox="1"/>
+          <p:nvPr/>
+        </p:nvSpPr>
+        <p:spPr>
+          <a:xfrm>
+            <a:off x="6318504" y="1280160"/>
+            <a:ext cx="2194560" cy="365760"/>
+          </a:xfrm>
+          <a:prstGeom prst="rect">
+            <a:avLst/>
+          </a:prstGeom>
+          <a:noFill/>
+          <a:ln/>
+        </p:spPr>
+        <p:txBody>
+          <a:bodyPr wrap="square" lIns="0" tIns="0" rIns="0" bIns="0" rtlCol="0" anchor="t"/>
+          <a:lstStyle/>
+          <a:p>
+            <a:pPr indent="0" marL="0">
+              <a:buNone/>
+            </a:pPr>
+            <a:r>
+              <a:rPr lang="en-US" sz="1800" b="1" dirty="0">
+                <a:solidFill>
+                  <a:schemeClr val="accent2"/>
+                </a:solidFill>
+                <a:latin typeface="Malgun Gothic" pitchFamily="34" charset="0"/>
+                <a:ea typeface="Malgun Gothic" pitchFamily="34" charset="-122"/>
+                <a:cs typeface="Malgun Gothic" pitchFamily="34" charset="-120"/>
+              </a:rPr>
+              <a:t>결선 12.13</a:t>
+            </a:r>
+            <a:endParaRPr lang="en-US" sz="1800" dirty="0"/>
+          </a:p>
+        </p:txBody>
+      </p:sp>
+      <p:sp>
+        <p:nvSpPr>
+          <p:cNvPr id="12" name="Text 9"/>
+          <p:cNvSpPr txBox="1"/>
+          <p:nvPr/>
+        </p:nvSpPr>
+        <p:spPr>
+          <a:xfrm>
+            <a:off x="6318504" y="1783080"/>
+            <a:ext cx="2194560" cy="2651760"/>
+          </a:xfrm>
+          <a:prstGeom prst="rect">
+            <a:avLst/>
+          </a:prstGeom>
+          <a:noFill/>
+          <a:ln/>
+        </p:spPr>
+        <p:txBody>
+          <a:bodyPr wrap="square" lIns="0" tIns="0" rIns="0" bIns="0" rtlCol="0" anchor="t"/>
+          <a:lstStyle/>
+          <a:p>
+            <a:pPr marL="342900" indent="-342900">
+              <a:spcAft>
+                <a:spcPts val="800"/>
+              </a:spcAft>
+              <a:buSzPct val="100000"/>
+              <a:buChar char="•"/>
+            </a:pPr>
+            <a:r>
+              <a:rPr lang="en-US" sz="1400" dirty="0">
+                <a:solidFill>
+                  <a:schemeClr val="tx1"/>
+                </a:solidFill>
+                <a:latin typeface="Malgun Gothic" pitchFamily="34" charset="0"/>
+                <a:ea typeface="Malgun Gothic" pitchFamily="34" charset="-122"/>
+                <a:cs typeface="Malgun Gothic" pitchFamily="34" charset="-120"/>
+              </a:rPr>
+              <a:t>실제 작동하는 웹앱으로 시연</a:t>
+            </a:r>
+            <a:endParaRPr lang="en-US" sz="1400" dirty="0"/>
+          </a:p>
+          <a:p>
+            <a:pPr marL="342900" indent="-342900">
+              <a:spcAft>
+                <a:spcPts val="800"/>
+              </a:spcAft>
+              <a:buSzPct val="100000"/>
+              <a:buChar char="•"/>
+            </a:pPr>
+            <a:r>
+              <a:rPr lang="en-US" sz="1400" dirty="0">
+                <a:solidFill>
+                  <a:schemeClr val="tx1"/>
+                </a:solidFill>
+                <a:latin typeface="Malgun Gothic" pitchFamily="34" charset="0"/>
+                <a:ea typeface="Malgun Gothic" pitchFamily="34" charset="-122"/>
+                <a:cs typeface="Malgun Gothic" pitchFamily="34" charset="-120"/>
+              </a:rPr>
+              <a:t>준비한 예시 2~3건</a:t>
+            </a:r>
+            <a:endParaRPr lang="en-US" sz="1400" dirty="0"/>
+          </a:p>
+          <a:p>
+            <a:pPr marL="342900" indent="-342900">
+              <a:spcAft>
+                <a:spcPts val="800"/>
+              </a:spcAft>
+              <a:buSzPct val="100000"/>
+              <a:buChar char="•"/>
+            </a:pPr>
+            <a:r>
+              <a:rPr lang="en-US" sz="1400" dirty="0">
+                <a:solidFill>
+                  <a:schemeClr val="tx1"/>
+                </a:solidFill>
+                <a:latin typeface="Malgun Gothic" pitchFamily="34" charset="0"/>
+                <a:ea typeface="Malgun Gothic" pitchFamily="34" charset="-122"/>
+                <a:cs typeface="Malgun Gothic" pitchFamily="34" charset="-120"/>
+              </a:rPr>
+              <a:t>백업 영상 3분 사전 제출</a:t>
+            </a:r>
+            <a:endParaRPr lang="en-US" sz="1400" dirty="0"/>
+          </a:p>
+        </p:txBody>
+      </p:sp>
+      <p:sp>
+        <p:nvSpPr>
+          <p:cNvPr id="25" name="Slide Number Placeholder 0"/>
+          <p:cNvSpPr>
+            <a:spLocks noGrp="1"/>
+          </p:cNvSpPr>
+          <p:nvPr>
+            <p:ph type="sldNum" sz="quarter" idx="4294967295"/>
+          </p:nvPr>
+        </p:nvSpPr>
+        <p:spPr>
+          <a:xfrm>
+            <a:off x="8412480" y="4754880"/>
+            <a:ext cx="457200" cy="274320"/>
+          </a:xfrm>
+          <a:prstGeom prst="rect">
+            <a:avLst/>
+          </a:prstGeom>
+          <a:extLst>
+            <a:ext uri="{C572A759-6A51-4108-AA02-DFA0A04FC94B}">
+              <ma14:wrappingTextBoxFlag xmlns:ma14="http://schemas.microsoft.com/office/mac/drawingml/2011/main" val="0"/>
+            </a:ext>
+          </a:extLst>
+        </p:spPr>
+        <p:txBody>
+          <a:bodyPr/>
+          <a:lstStyle>
+            <a:lvl1pPr>
+              <a:defRPr sz="1000">
+                <a:solidFill>
+                  <a:schemeClr val="tx2"/>
+                </a:solidFill>
+              </a:defRPr>
+            </a:lvl1pPr>
+          </a:lstStyle>
+          <a:p>
+            <a:pPr algn="l"/>
+            <a:fld id="{F7021451-1387-4CA6-816F-3879F97B5CBC}" type="slidenum">
+              <a:rPr b="0" lang="en-US"/>
+              <a:t>10</a:t>
+            </a:fld>
+            <a:endParaRPr lang="en-US"/>
+          </a:p>
+        </p:txBody>
+      </p:sp>
+    </p:spTree>
+  </p:cSld>
+  <p:clrMapOvr>
+    <a:masterClrMapping/>
+  </p:clrMapOvr>
+</p:sld>
+</file>
+
 <file path=ppt/slides/slide2.xml><?xml version="1.0" encoding="utf-8"?>
 <p:sld xmlns:a="http://schemas.openxmlformats.org/drawingml/2006/main" xmlns:r="http://schemas.openxmlformats.org/officeDocument/2006/relationships" xmlns:p="http://schemas.openxmlformats.org/presentationml/2006/main">
   <p:cSld name="Slide 2">
@@ -2835,7 +3530,7 @@
                 <a:ea typeface="Malgun Gothic" pitchFamily="34" charset="-122"/>
                 <a:cs typeface="Malgun Gothic" pitchFamily="34" charset="-120"/>
               </a:rPr>
-              <a:t>42개 단어 · 5개 지역</a:t>
+              <a:t>42개 단어 (AI-Hub 수어 영상에 있는 단어)</a:t>
             </a:r>
             <a:endParaRPr lang="en-US" sz="1400" dirty="0"/>
           </a:p>
@@ -2852,7 +3547,7 @@
                 <a:ea typeface="Malgun Gothic" pitchFamily="34" charset="-122"/>
                 <a:cs typeface="Malgun Gothic" pitchFamily="34" charset="-120"/>
               </a:rPr>
-              <a:t>서울·경기 / 경상 / 전라 / 충청 / 제주</a:t>
+              <a:t>지역 비교: 서울·경기 / 경상 / 전라 / 충청 / 제주</a:t>
             </a:r>
             <a:endParaRPr lang="en-US" sz="1400" dirty="0"/>
           </a:p>
@@ -4714,7 +5409,7 @@
                 <a:ea typeface="Malgun Gothic" pitchFamily="34" charset="-122"/>
                 <a:cs typeface="Malgun Gothic" pitchFamily="34" charset="-120"/>
               </a:rPr>
-              <a:t>앱 레이아웃 ① 검색</a:t>
+              <a:t>AI는 이렇게 배워요</a:t>
             </a:r>
             <a:endParaRPr lang="en-US" sz="2600" dirty="0"/>
           </a:p>
@@ -4728,492 +5423,12 @@
         </p:nvSpPr>
         <p:spPr>
           <a:xfrm>
-            <a:off x="822960" y="914400"/>
-            <a:ext cx="2240280" cy="3886200"/>
+            <a:off x="457200" y="1188720"/>
+            <a:ext cx="1417320" cy="1828800"/>
           </a:xfrm>
           <a:prstGeom prst="roundRect">
             <a:avLst>
-              <a:gd name="adj" fmla="val 8163"/>
-            </a:avLst>
-          </a:prstGeom>
-          <a:solidFill>
-            <a:schemeClr val="bg1"/>
-          </a:solidFill>
-          <a:ln w="19050">
-            <a:solidFill>
-              <a:schemeClr val="tx1"/>
-            </a:solidFill>
-            <a:prstDash val="solid"/>
-          </a:ln>
-        </p:spPr>
-      </p:sp>
-      <p:sp>
-        <p:nvSpPr>
-          <p:cNvPr id="5" name="Text 2"/>
-          <p:cNvSpPr txBox="1"/>
-          <p:nvPr/>
-        </p:nvSpPr>
-        <p:spPr>
-          <a:xfrm>
-            <a:off x="822960" y="4846320"/>
-            <a:ext cx="2240280" cy="228600"/>
-          </a:xfrm>
-          <a:prstGeom prst="rect">
-            <a:avLst/>
-          </a:prstGeom>
-          <a:noFill/>
-          <a:ln/>
-        </p:spPr>
-        <p:txBody>
-          <a:bodyPr wrap="square" lIns="0" tIns="0" rIns="0" bIns="0" rtlCol="0" anchor="t"/>
-          <a:lstStyle/>
-          <a:p>
-            <a:pPr algn="ctr" indent="0" marL="0">
-              <a:buNone/>
-            </a:pPr>
-            <a:r>
-              <a:rPr lang="en-US" sz="1100" b="1" dirty="0">
-                <a:solidFill>
-                  <a:schemeClr val="tx2"/>
-                </a:solidFill>
-                <a:latin typeface="Malgun Gothic" pitchFamily="34" charset="0"/>
-                <a:ea typeface="Malgun Gothic" pitchFamily="34" charset="-122"/>
-                <a:cs typeface="Malgun Gothic" pitchFamily="34" charset="-120"/>
-              </a:rPr>
-              <a:t>단어 목록</a:t>
-            </a:r>
-            <a:endParaRPr lang="en-US" sz="1100" dirty="0"/>
-          </a:p>
-        </p:txBody>
-      </p:sp>
-      <p:sp>
-        <p:nvSpPr>
-          <p:cNvPr id="6" name="Shape 3"/>
-          <p:cNvSpPr/>
-          <p:nvPr/>
-        </p:nvSpPr>
-        <p:spPr>
-          <a:xfrm>
-            <a:off x="822960" y="4389120"/>
-            <a:ext cx="2240280" cy="0"/>
-          </a:xfrm>
-          <a:prstGeom prst="line">
-            <a:avLst/>
-          </a:prstGeom>
-          <a:noFill/>
-          <a:ln w="9525">
-            <a:solidFill>
-              <a:schemeClr val="accent3"/>
-            </a:solidFill>
-            <a:prstDash val="solid"/>
-          </a:ln>
-        </p:spPr>
-      </p:sp>
-      <p:sp>
-        <p:nvSpPr>
-          <p:cNvPr id="7" name="Text 4"/>
-          <p:cNvSpPr txBox="1"/>
-          <p:nvPr/>
-        </p:nvSpPr>
-        <p:spPr>
-          <a:xfrm>
-            <a:off x="868680" y="4462272"/>
-            <a:ext cx="716280" cy="228600"/>
-          </a:xfrm>
-          <a:prstGeom prst="rect">
-            <a:avLst/>
-          </a:prstGeom>
-          <a:noFill/>
-          <a:ln/>
-        </p:spPr>
-        <p:txBody>
-          <a:bodyPr wrap="square" lIns="0" tIns="0" rIns="0" bIns="0" rtlCol="0" anchor="ctr"/>
-          <a:lstStyle/>
-          <a:p>
-            <a:pPr algn="ctr" indent="0" marL="0">
-              <a:buNone/>
-            </a:pPr>
-            <a:r>
-              <a:rPr lang="en-US" sz="1000" b="1" dirty="0">
-                <a:solidFill>
-                  <a:schemeClr val="accent1"/>
-                </a:solidFill>
-                <a:latin typeface="Malgun Gothic" pitchFamily="34" charset="0"/>
-                <a:ea typeface="Malgun Gothic" pitchFamily="34" charset="-122"/>
-                <a:cs typeface="Malgun Gothic" pitchFamily="34" charset="-120"/>
-              </a:rPr>
-              <a:t>검색</a:t>
-            </a:r>
-            <a:endParaRPr lang="en-US" sz="1000" dirty="0"/>
-          </a:p>
-        </p:txBody>
-      </p:sp>
-      <p:sp>
-        <p:nvSpPr>
-          <p:cNvPr id="8" name="Text 5"/>
-          <p:cNvSpPr txBox="1"/>
-          <p:nvPr/>
-        </p:nvSpPr>
-        <p:spPr>
-          <a:xfrm>
-            <a:off x="1584960" y="4462272"/>
-            <a:ext cx="716280" cy="228600"/>
-          </a:xfrm>
-          <a:prstGeom prst="rect">
-            <a:avLst/>
-          </a:prstGeom>
-          <a:noFill/>
-          <a:ln/>
-        </p:spPr>
-        <p:txBody>
-          <a:bodyPr wrap="square" lIns="0" tIns="0" rIns="0" bIns="0" rtlCol="0" anchor="ctr"/>
-          <a:lstStyle/>
-          <a:p>
-            <a:pPr algn="ctr" indent="0" marL="0">
-              <a:buNone/>
-            </a:pPr>
-            <a:r>
-              <a:rPr lang="en-US" sz="1000" dirty="0">
-                <a:solidFill>
-                  <a:schemeClr val="tx2"/>
-                </a:solidFill>
-                <a:latin typeface="Malgun Gothic" pitchFamily="34" charset="0"/>
-                <a:ea typeface="Malgun Gothic" pitchFamily="34" charset="-122"/>
-                <a:cs typeface="Malgun Gothic" pitchFamily="34" charset="-120"/>
-              </a:rPr>
-              <a:t>학습하기</a:t>
-            </a:r>
-            <a:endParaRPr lang="en-US" sz="1000" dirty="0"/>
-          </a:p>
-        </p:txBody>
-      </p:sp>
-      <p:sp>
-        <p:nvSpPr>
-          <p:cNvPr id="9" name="Text 6"/>
-          <p:cNvSpPr txBox="1"/>
-          <p:nvPr/>
-        </p:nvSpPr>
-        <p:spPr>
-          <a:xfrm>
-            <a:off x="2301240" y="4462272"/>
-            <a:ext cx="716280" cy="228600"/>
-          </a:xfrm>
-          <a:prstGeom prst="rect">
-            <a:avLst/>
-          </a:prstGeom>
-          <a:noFill/>
-          <a:ln/>
-        </p:spPr>
-        <p:txBody>
-          <a:bodyPr wrap="square" lIns="0" tIns="0" rIns="0" bIns="0" rtlCol="0" anchor="ctr"/>
-          <a:lstStyle/>
-          <a:p>
-            <a:pPr algn="ctr" indent="0" marL="0">
-              <a:buNone/>
-            </a:pPr>
-            <a:r>
-              <a:rPr lang="en-US" sz="1000" dirty="0">
-                <a:solidFill>
-                  <a:schemeClr val="tx2"/>
-                </a:solidFill>
-                <a:latin typeface="Malgun Gothic" pitchFamily="34" charset="0"/>
-                <a:ea typeface="Malgun Gothic" pitchFamily="34" charset="-122"/>
-                <a:cs typeface="Malgun Gothic" pitchFamily="34" charset="-120"/>
-              </a:rPr>
-              <a:t>직접 해보기</a:t>
-            </a:r>
-            <a:endParaRPr lang="en-US" sz="1000" dirty="0"/>
-          </a:p>
-        </p:txBody>
-      </p:sp>
-      <p:sp>
-        <p:nvSpPr>
-          <p:cNvPr id="10" name="Text 7"/>
-          <p:cNvSpPr txBox="1"/>
-          <p:nvPr/>
-        </p:nvSpPr>
-        <p:spPr>
-          <a:xfrm>
-            <a:off x="960120" y="1078992"/>
-            <a:ext cx="1965960" cy="274320"/>
-          </a:xfrm>
-          <a:prstGeom prst="rect">
-            <a:avLst/>
-          </a:prstGeom>
-          <a:noFill/>
-          <a:ln/>
-        </p:spPr>
-        <p:txBody>
-          <a:bodyPr wrap="square" lIns="0" tIns="0" rIns="0" bIns="0" rtlCol="0" anchor="ctr"/>
-          <a:lstStyle/>
-          <a:p>
-            <a:pPr indent="0" marL="0">
-              <a:buNone/>
-            </a:pPr>
-            <a:r>
-              <a:rPr lang="en-US" sz="1400" b="1" dirty="0">
-                <a:solidFill>
-                  <a:schemeClr val="tx1"/>
-                </a:solidFill>
-                <a:latin typeface="Malgun Gothic" pitchFamily="34" charset="0"/>
-                <a:ea typeface="Malgun Gothic" pitchFamily="34" charset="-122"/>
-                <a:cs typeface="Malgun Gothic" pitchFamily="34" charset="-120"/>
-              </a:rPr>
-              <a:t>수어42</a:t>
-            </a:r>
-            <a:endParaRPr lang="en-US" sz="1400" dirty="0"/>
-          </a:p>
-        </p:txBody>
-      </p:sp>
-      <p:sp>
-        <p:nvSpPr>
-          <p:cNvPr id="11" name="Text 8"/>
-          <p:cNvSpPr/>
-          <p:nvPr/>
-        </p:nvSpPr>
-        <p:spPr>
-          <a:xfrm>
-            <a:off x="960120" y="1444752"/>
-            <a:ext cx="1965960" cy="292608"/>
-          </a:xfrm>
-          <a:prstGeom prst="roundRect">
-            <a:avLst>
-              <a:gd name="adj" fmla="val 18750"/>
-            </a:avLst>
-          </a:prstGeom>
-          <a:solidFill>
-            <a:schemeClr val="bg1"/>
-          </a:solidFill>
-          <a:ln w="9525">
-            <a:solidFill>
-              <a:schemeClr val="accent3"/>
-            </a:solidFill>
-          </a:ln>
-        </p:spPr>
-        <p:txBody>
-          <a:bodyPr wrap="square" lIns="762" tIns="762" rIns="762" bIns="762" rtlCol="0" anchor="ctr"/>
-          <a:lstStyle/>
-          <a:p>
-            <a:pPr indent="0" marL="0">
-              <a:buNone/>
-            </a:pPr>
-            <a:r>
-              <a:rPr lang="en-US" sz="1000" dirty="0">
-                <a:solidFill>
-                  <a:schemeClr val="tx2"/>
-                </a:solidFill>
-                <a:latin typeface="Malgun Gothic" pitchFamily="34" charset="0"/>
-                <a:ea typeface="Malgun Gothic" pitchFamily="34" charset="-122"/>
-                <a:cs typeface="Malgun Gothic" pitchFamily="34" charset="-120"/>
-              </a:rPr>
-              <a:t>🔍  단어 검색</a:t>
-            </a:r>
-            <a:endParaRPr lang="en-US" sz="1000" dirty="0"/>
-          </a:p>
-        </p:txBody>
-      </p:sp>
-      <p:sp>
-        <p:nvSpPr>
-          <p:cNvPr id="12" name="Text 9"/>
-          <p:cNvSpPr/>
-          <p:nvPr/>
-        </p:nvSpPr>
-        <p:spPr>
-          <a:xfrm>
-            <a:off x="960120" y="1856232"/>
-            <a:ext cx="438912" cy="219456"/>
-          </a:xfrm>
-          <a:prstGeom prst="roundRect">
-            <a:avLst>
-              <a:gd name="adj" fmla="val 50000"/>
-            </a:avLst>
-          </a:prstGeom>
-          <a:solidFill>
-            <a:schemeClr val="accent1"/>
-          </a:solidFill>
-          <a:ln w="9525">
-            <a:solidFill>
-              <a:schemeClr val="accent1"/>
-            </a:solidFill>
-          </a:ln>
-        </p:spPr>
-        <p:txBody>
-          <a:bodyPr wrap="square" lIns="0" tIns="0" rIns="0" bIns="0" rtlCol="0" anchor="ctr"/>
-          <a:lstStyle/>
-          <a:p>
-            <a:pPr algn="ctr" indent="0" marL="0">
-              <a:buNone/>
-            </a:pPr>
-            <a:r>
-              <a:rPr lang="en-US" sz="1000" dirty="0">
-                <a:solidFill>
-                  <a:schemeClr val="bg1"/>
-                </a:solidFill>
-                <a:latin typeface="Malgun Gothic" pitchFamily="34" charset="0"/>
-                <a:ea typeface="Malgun Gothic" pitchFamily="34" charset="-122"/>
-                <a:cs typeface="Malgun Gothic" pitchFamily="34" charset="-120"/>
-              </a:rPr>
-              <a:t>전체</a:t>
-            </a:r>
-            <a:endParaRPr lang="en-US" sz="1000" dirty="0"/>
-          </a:p>
-        </p:txBody>
-      </p:sp>
-      <p:sp>
-        <p:nvSpPr>
-          <p:cNvPr id="13" name="Text 10"/>
-          <p:cNvSpPr/>
-          <p:nvPr/>
-        </p:nvSpPr>
-        <p:spPr>
-          <a:xfrm>
-            <a:off x="1444752" y="1856232"/>
-            <a:ext cx="438912" cy="219456"/>
-          </a:xfrm>
-          <a:prstGeom prst="roundRect">
-            <a:avLst>
-              <a:gd name="adj" fmla="val 50000"/>
-            </a:avLst>
-          </a:prstGeom>
-          <a:solidFill>
-            <a:schemeClr val="bg1"/>
-          </a:solidFill>
-          <a:ln w="9525">
-            <a:solidFill>
-              <a:schemeClr val="accent3"/>
-            </a:solidFill>
-          </a:ln>
-        </p:spPr>
-        <p:txBody>
-          <a:bodyPr wrap="square" lIns="0" tIns="0" rIns="0" bIns="0" rtlCol="0" anchor="ctr"/>
-          <a:lstStyle/>
-          <a:p>
-            <a:pPr algn="ctr" indent="0" marL="0">
-              <a:buNone/>
-            </a:pPr>
-            <a:r>
-              <a:rPr lang="en-US" sz="1000" dirty="0">
-                <a:solidFill>
-                  <a:schemeClr val="tx1"/>
-                </a:solidFill>
-                <a:latin typeface="Malgun Gothic" pitchFamily="34" charset="0"/>
-                <a:ea typeface="Malgun Gothic" pitchFamily="34" charset="-122"/>
-                <a:cs typeface="Malgun Gothic" pitchFamily="34" charset="-120"/>
-              </a:rPr>
-              <a:t>음식</a:t>
-            </a:r>
-            <a:endParaRPr lang="en-US" sz="1000" dirty="0"/>
-          </a:p>
-        </p:txBody>
-      </p:sp>
-      <p:sp>
-        <p:nvSpPr>
-          <p:cNvPr id="14" name="Text 11"/>
-          <p:cNvSpPr/>
-          <p:nvPr/>
-        </p:nvSpPr>
-        <p:spPr>
-          <a:xfrm>
-            <a:off x="1929384" y="1856232"/>
-            <a:ext cx="438912" cy="219456"/>
-          </a:xfrm>
-          <a:prstGeom prst="roundRect">
-            <a:avLst>
-              <a:gd name="adj" fmla="val 50000"/>
-            </a:avLst>
-          </a:prstGeom>
-          <a:solidFill>
-            <a:schemeClr val="bg1"/>
-          </a:solidFill>
-          <a:ln w="9525">
-            <a:solidFill>
-              <a:schemeClr val="accent3"/>
-            </a:solidFill>
-          </a:ln>
-        </p:spPr>
-        <p:txBody>
-          <a:bodyPr wrap="square" lIns="0" tIns="0" rIns="0" bIns="0" rtlCol="0" anchor="ctr"/>
-          <a:lstStyle/>
-          <a:p>
-            <a:pPr algn="ctr" indent="0" marL="0">
-              <a:buNone/>
-            </a:pPr>
-            <a:r>
-              <a:rPr lang="en-US" sz="1000" dirty="0">
-                <a:solidFill>
-                  <a:schemeClr val="tx1"/>
-                </a:solidFill>
-                <a:latin typeface="Malgun Gothic" pitchFamily="34" charset="0"/>
-                <a:ea typeface="Malgun Gothic" pitchFamily="34" charset="-122"/>
-                <a:cs typeface="Malgun Gothic" pitchFamily="34" charset="-120"/>
-              </a:rPr>
-              <a:t>가족</a:t>
-            </a:r>
-            <a:endParaRPr lang="en-US" sz="1000" dirty="0"/>
-          </a:p>
-        </p:txBody>
-      </p:sp>
-      <p:sp>
-        <p:nvSpPr>
-          <p:cNvPr id="15" name="Text 12"/>
-          <p:cNvSpPr/>
-          <p:nvPr/>
-        </p:nvSpPr>
-        <p:spPr>
-          <a:xfrm>
-            <a:off x="2414016" y="1856232"/>
-            <a:ext cx="438912" cy="219456"/>
-          </a:xfrm>
-          <a:prstGeom prst="roundRect">
-            <a:avLst>
-              <a:gd name="adj" fmla="val 50000"/>
-            </a:avLst>
-          </a:prstGeom>
-          <a:solidFill>
-            <a:schemeClr val="bg1"/>
-          </a:solidFill>
-          <a:ln w="9525">
-            <a:solidFill>
-              <a:schemeClr val="accent3"/>
-            </a:solidFill>
-          </a:ln>
-        </p:spPr>
-        <p:txBody>
-          <a:bodyPr wrap="square" lIns="0" tIns="0" rIns="0" bIns="0" rtlCol="0" anchor="ctr"/>
-          <a:lstStyle/>
-          <a:p>
-            <a:pPr algn="ctr" indent="0" marL="0">
-              <a:buNone/>
-            </a:pPr>
-            <a:r>
-              <a:rPr lang="en-US" sz="1000" dirty="0">
-                <a:solidFill>
-                  <a:schemeClr val="tx1"/>
-                </a:solidFill>
-                <a:latin typeface="Malgun Gothic" pitchFamily="34" charset="0"/>
-                <a:ea typeface="Malgun Gothic" pitchFamily="34" charset="-122"/>
-                <a:cs typeface="Malgun Gothic" pitchFamily="34" charset="-120"/>
-              </a:rPr>
-              <a:t>색</a:t>
-            </a:r>
-            <a:endParaRPr lang="en-US" sz="1000" dirty="0"/>
-          </a:p>
-        </p:txBody>
-      </p:sp>
-      <p:sp>
-        <p:nvSpPr>
-          <p:cNvPr id="16" name="Text 13"/>
-          <p:cNvSpPr/>
-          <p:nvPr/>
-        </p:nvSpPr>
-        <p:spPr>
-          <a:xfrm>
-            <a:off x="960120" y="2221992"/>
-            <a:ext cx="955548" cy="475488"/>
-          </a:xfrm>
-          <a:prstGeom prst="roundRect">
-            <a:avLst>
-              <a:gd name="adj" fmla="val 11538"/>
+              <a:gd name="adj" fmla="val 5161"/>
             </a:avLst>
           </a:prstGeom>
           <a:solidFill>
@@ -5223,81 +5438,81 @@
             <a:solidFill>
               <a:schemeClr val="accent3"/>
             </a:solidFill>
+            <a:prstDash val="solid"/>
           </a:ln>
         </p:spPr>
-        <p:txBody>
-          <a:bodyPr wrap="square" lIns="762" tIns="762" rIns="762" bIns="762" rtlCol="0" anchor="ctr"/>
-          <a:lstStyle/>
-          <a:p>
-            <a:pPr indent="0" marL="0">
-              <a:buNone/>
-            </a:pPr>
-            <a:r>
-              <a:rPr lang="en-US" sz="1000" b="1" dirty="0">
-                <a:solidFill>
-                  <a:schemeClr val="tx1"/>
-                </a:solidFill>
-                <a:latin typeface="Malgun Gothic" pitchFamily="34" charset="0"/>
-                <a:ea typeface="Malgun Gothic" pitchFamily="34" charset="-122"/>
-                <a:cs typeface="Malgun Gothic" pitchFamily="34" charset="-120"/>
-              </a:rPr>
-              <a:t>라면</a:t>
-            </a:r>
-            <a:endParaRPr lang="en-US" sz="1000" dirty="0"/>
-          </a:p>
-          <a:p>
-            <a:pPr indent="0" marL="0">
-              <a:buNone/>
-            </a:pPr>
-            <a:r>
-              <a:rPr lang="en-US" sz="1000" dirty="0">
-                <a:solidFill>
-                  <a:schemeClr val="accent2"/>
-                </a:solidFill>
-                <a:latin typeface="Malgun Gothic" pitchFamily="34" charset="0"/>
-                <a:ea typeface="Malgun Gothic" pitchFamily="34" charset="-122"/>
-                <a:cs typeface="Malgun Gothic" pitchFamily="34" charset="-120"/>
-              </a:rPr>
-              <a:t>● ● ●</a:t>
-            </a:r>
-            <a:endParaRPr lang="en-US" sz="1000" dirty="0"/>
-          </a:p>
-        </p:txBody>
-      </p:sp>
-      <p:sp>
-        <p:nvSpPr>
-          <p:cNvPr id="17" name="Text 14"/>
-          <p:cNvSpPr/>
-          <p:nvPr/>
-        </p:nvSpPr>
-        <p:spPr>
-          <a:xfrm>
-            <a:off x="1970532" y="2221992"/>
-            <a:ext cx="955548" cy="475488"/>
-          </a:xfrm>
-          <a:prstGeom prst="roundRect">
-            <a:avLst>
-              <a:gd name="adj" fmla="val 11538"/>
-            </a:avLst>
+      </p:sp>
+      <p:sp>
+        <p:nvSpPr>
+          <p:cNvPr id="5" name="Text 2"/>
+          <p:cNvSpPr/>
+          <p:nvPr/>
+        </p:nvSpPr>
+        <p:spPr>
+          <a:xfrm>
+            <a:off x="594360" y="1325880"/>
+            <a:ext cx="365760" cy="365760"/>
+          </a:xfrm>
+          <a:prstGeom prst="ellipse">
+            <a:avLst/>
           </a:prstGeom>
           <a:solidFill>
-            <a:schemeClr val="bg2"/>
+            <a:schemeClr val="tx1"/>
           </a:solidFill>
-          <a:ln w="9525">
+          <a:ln>
             <a:solidFill>
-              <a:schemeClr val="accent3"/>
+              <a:schemeClr val="tx1"/>
             </a:solidFill>
           </a:ln>
         </p:spPr>
         <p:txBody>
-          <a:bodyPr wrap="square" lIns="762" tIns="762" rIns="762" bIns="762" rtlCol="0" anchor="ctr"/>
+          <a:bodyPr wrap="square" lIns="0" tIns="0" rIns="0" bIns="0" rtlCol="0" anchor="ctr"/>
+          <a:lstStyle/>
+          <a:p>
+            <a:pPr algn="ctr" indent="0" marL="0">
+              <a:buNone/>
+            </a:pPr>
+            <a:r>
+              <a:rPr lang="en-US" sz="1400" b="1" dirty="0">
+                <a:solidFill>
+                  <a:schemeClr val="bg1"/>
+                </a:solidFill>
+                <a:latin typeface="Malgun Gothic" pitchFamily="34" charset="0"/>
+                <a:ea typeface="Malgun Gothic" pitchFamily="34" charset="-122"/>
+                <a:cs typeface="Malgun Gothic" pitchFamily="34" charset="-120"/>
+              </a:rPr>
+              <a:t>1</a:t>
+            </a:r>
+            <a:endParaRPr lang="en-US" sz="1400" dirty="0"/>
+          </a:p>
+        </p:txBody>
+      </p:sp>
+      <p:sp>
+        <p:nvSpPr>
+          <p:cNvPr id="6" name="Text 3"/>
+          <p:cNvSpPr txBox="1"/>
+          <p:nvPr/>
+        </p:nvSpPr>
+        <p:spPr>
+          <a:xfrm>
+            <a:off x="594360" y="1828800"/>
+            <a:ext cx="1188720" cy="365760"/>
+          </a:xfrm>
+          <a:prstGeom prst="rect">
+            <a:avLst/>
+          </a:prstGeom>
+          <a:noFill/>
+          <a:ln/>
+        </p:spPr>
+        <p:txBody>
+          <a:bodyPr wrap="square" lIns="0" tIns="0" rIns="0" bIns="0" rtlCol="0" anchor="t"/>
           <a:lstStyle/>
           <a:p>
             <a:pPr indent="0" marL="0">
               <a:buNone/>
             </a:pPr>
             <a:r>
-              <a:rPr lang="en-US" sz="1000" b="1" dirty="0">
+              <a:rPr lang="en-US" sz="1400" b="1" dirty="0">
                 <a:solidFill>
                   <a:schemeClr val="tx1"/>
                 </a:solidFill>
@@ -5305,294 +5520,77 @@
                 <a:ea typeface="Malgun Gothic" pitchFamily="34" charset="-122"/>
                 <a:cs typeface="Malgun Gothic" pitchFamily="34" charset="-120"/>
               </a:rPr>
-              <a:t>짜장면</a:t>
-            </a:r>
-            <a:endParaRPr lang="en-US" sz="1000" dirty="0"/>
-          </a:p>
+              <a:t>AI-Hub</a:t>
+            </a:r>
+            <a:endParaRPr lang="en-US" sz="1400" dirty="0"/>
+          </a:p>
+        </p:txBody>
+      </p:sp>
+      <p:sp>
+        <p:nvSpPr>
+          <p:cNvPr id="7" name="Text 4"/>
+          <p:cNvSpPr txBox="1"/>
+          <p:nvPr/>
+        </p:nvSpPr>
+        <p:spPr>
+          <a:xfrm>
+            <a:off x="594360" y="2240280"/>
+            <a:ext cx="1188720" cy="685800"/>
+          </a:xfrm>
+          <a:prstGeom prst="rect">
+            <a:avLst/>
+          </a:prstGeom>
+          <a:noFill/>
+          <a:ln/>
+        </p:spPr>
+        <p:txBody>
+          <a:bodyPr wrap="square" lIns="0" tIns="0" rIns="0" bIns="0" rtlCol="0" anchor="t"/>
+          <a:lstStyle/>
           <a:p>
             <a:pPr indent="0" marL="0">
               <a:buNone/>
             </a:pPr>
             <a:r>
-              <a:rPr lang="en-US" sz="1000" dirty="0">
-                <a:solidFill>
-                  <a:schemeClr val="accent2"/>
-                </a:solidFill>
-                <a:latin typeface="Malgun Gothic" pitchFamily="34" charset="0"/>
-                <a:ea typeface="Malgun Gothic" pitchFamily="34" charset="-122"/>
-                <a:cs typeface="Malgun Gothic" pitchFamily="34" charset="-120"/>
-              </a:rPr>
-              <a:t>● ● ●</a:t>
-            </a:r>
-            <a:endParaRPr lang="en-US" sz="1000" dirty="0"/>
-          </a:p>
-        </p:txBody>
-      </p:sp>
-      <p:sp>
-        <p:nvSpPr>
-          <p:cNvPr id="18" name="Text 15"/>
-          <p:cNvSpPr/>
-          <p:nvPr/>
-        </p:nvSpPr>
-        <p:spPr>
-          <a:xfrm>
-            <a:off x="960120" y="2788920"/>
-            <a:ext cx="955548" cy="475488"/>
-          </a:xfrm>
-          <a:prstGeom prst="roundRect">
-            <a:avLst>
-              <a:gd name="adj" fmla="val 11538"/>
-            </a:avLst>
-          </a:prstGeom>
-          <a:solidFill>
-            <a:schemeClr val="bg2"/>
-          </a:solidFill>
-          <a:ln w="9525">
-            <a:solidFill>
-              <a:schemeClr val="accent3"/>
-            </a:solidFill>
-          </a:ln>
-        </p:spPr>
-        <p:txBody>
-          <a:bodyPr wrap="square" lIns="762" tIns="762" rIns="762" bIns="762" rtlCol="0" anchor="ctr"/>
-          <a:lstStyle/>
+              <a:rPr lang="en-US" sz="1200" dirty="0">
+                <a:solidFill>
+                  <a:schemeClr val="tx2"/>
+                </a:solidFill>
+                <a:latin typeface="Malgun Gothic" pitchFamily="34" charset="0"/>
+                <a:ea typeface="Malgun Gothic" pitchFamily="34" charset="-122"/>
+                <a:cs typeface="Malgun Gothic" pitchFamily="34" charset="-120"/>
+              </a:rPr>
+              <a:t>수어 영상 +</a:t>
+            </a:r>
+            <a:endParaRPr lang="en-US" sz="1200" dirty="0"/>
+          </a:p>
           <a:p>
             <a:pPr indent="0" marL="0">
               <a:buNone/>
             </a:pPr>
             <a:r>
-              <a:rPr lang="en-US" sz="1000" b="1" dirty="0">
-                <a:solidFill>
-                  <a:schemeClr val="tx1"/>
-                </a:solidFill>
-                <a:latin typeface="Malgun Gothic" pitchFamily="34" charset="0"/>
-                <a:ea typeface="Malgun Gothic" pitchFamily="34" charset="-122"/>
-                <a:cs typeface="Malgun Gothic" pitchFamily="34" charset="-120"/>
-              </a:rPr>
-              <a:t>우유</a:t>
-            </a:r>
-            <a:endParaRPr lang="en-US" sz="1000" dirty="0"/>
-          </a:p>
-          <a:p>
-            <a:pPr indent="0" marL="0">
-              <a:buNone/>
-            </a:pPr>
-            <a:r>
-              <a:rPr lang="en-US" sz="1000" dirty="0">
-                <a:solidFill>
-                  <a:schemeClr val="accent2"/>
-                </a:solidFill>
-                <a:latin typeface="Malgun Gothic" pitchFamily="34" charset="0"/>
-                <a:ea typeface="Malgun Gothic" pitchFamily="34" charset="-122"/>
-                <a:cs typeface="Malgun Gothic" pitchFamily="34" charset="-120"/>
-              </a:rPr>
-              <a:t>● ● ●</a:t>
-            </a:r>
-            <a:endParaRPr lang="en-US" sz="1000" dirty="0"/>
-          </a:p>
-        </p:txBody>
-      </p:sp>
-      <p:sp>
-        <p:nvSpPr>
-          <p:cNvPr id="19" name="Text 16"/>
-          <p:cNvSpPr/>
-          <p:nvPr/>
-        </p:nvSpPr>
-        <p:spPr>
-          <a:xfrm>
-            <a:off x="1970532" y="2788920"/>
-            <a:ext cx="955548" cy="475488"/>
-          </a:xfrm>
-          <a:prstGeom prst="roundRect">
-            <a:avLst>
-              <a:gd name="adj" fmla="val 11538"/>
-            </a:avLst>
-          </a:prstGeom>
-          <a:solidFill>
-            <a:schemeClr val="bg2"/>
-          </a:solidFill>
-          <a:ln w="9525">
-            <a:solidFill>
-              <a:schemeClr val="accent3"/>
-            </a:solidFill>
-          </a:ln>
-        </p:spPr>
-        <p:txBody>
-          <a:bodyPr wrap="square" lIns="762" tIns="762" rIns="762" bIns="762" rtlCol="0" anchor="ctr"/>
-          <a:lstStyle/>
-          <a:p>
-            <a:pPr indent="0" marL="0">
-              <a:buNone/>
-            </a:pPr>
-            <a:r>
-              <a:rPr lang="en-US" sz="1000" b="1" dirty="0">
-                <a:solidFill>
-                  <a:schemeClr val="tx1"/>
-                </a:solidFill>
-                <a:latin typeface="Malgun Gothic" pitchFamily="34" charset="0"/>
-                <a:ea typeface="Malgun Gothic" pitchFamily="34" charset="-122"/>
-                <a:cs typeface="Malgun Gothic" pitchFamily="34" charset="-120"/>
-              </a:rPr>
-              <a:t>택시</a:t>
-            </a:r>
-            <a:endParaRPr lang="en-US" sz="1000" dirty="0"/>
-          </a:p>
-          <a:p>
-            <a:pPr indent="0" marL="0">
-              <a:buNone/>
-            </a:pPr>
-            <a:r>
-              <a:rPr lang="en-US" sz="1000" dirty="0">
-                <a:solidFill>
-                  <a:schemeClr val="accent2"/>
-                </a:solidFill>
-                <a:latin typeface="Malgun Gothic" pitchFamily="34" charset="0"/>
-                <a:ea typeface="Malgun Gothic" pitchFamily="34" charset="-122"/>
-                <a:cs typeface="Malgun Gothic" pitchFamily="34" charset="-120"/>
-              </a:rPr>
-              <a:t>● ● ●</a:t>
-            </a:r>
-            <a:endParaRPr lang="en-US" sz="1000" dirty="0"/>
-          </a:p>
-        </p:txBody>
-      </p:sp>
-      <p:sp>
-        <p:nvSpPr>
-          <p:cNvPr id="20" name="Text 17"/>
-          <p:cNvSpPr/>
-          <p:nvPr/>
-        </p:nvSpPr>
-        <p:spPr>
-          <a:xfrm>
-            <a:off x="960120" y="3355848"/>
-            <a:ext cx="955548" cy="475488"/>
-          </a:xfrm>
-          <a:prstGeom prst="roundRect">
-            <a:avLst>
-              <a:gd name="adj" fmla="val 11538"/>
-            </a:avLst>
-          </a:prstGeom>
-          <a:solidFill>
-            <a:schemeClr val="bg2"/>
-          </a:solidFill>
-          <a:ln w="9525">
-            <a:solidFill>
-              <a:schemeClr val="accent3"/>
-            </a:solidFill>
-          </a:ln>
-        </p:spPr>
-        <p:txBody>
-          <a:bodyPr wrap="square" lIns="762" tIns="762" rIns="762" bIns="762" rtlCol="0" anchor="ctr"/>
-          <a:lstStyle/>
-          <a:p>
-            <a:pPr indent="0" marL="0">
-              <a:buNone/>
-            </a:pPr>
-            <a:r>
-              <a:rPr lang="en-US" sz="1000" b="1" dirty="0">
-                <a:solidFill>
-                  <a:schemeClr val="tx1"/>
-                </a:solidFill>
-                <a:latin typeface="Malgun Gothic" pitchFamily="34" charset="0"/>
-                <a:ea typeface="Malgun Gothic" pitchFamily="34" charset="-122"/>
-                <a:cs typeface="Malgun Gothic" pitchFamily="34" charset="-120"/>
-              </a:rPr>
-              <a:t>김치</a:t>
-            </a:r>
-            <a:endParaRPr lang="en-US" sz="1000" dirty="0"/>
-          </a:p>
-          <a:p>
-            <a:pPr indent="0" marL="0">
-              <a:buNone/>
-            </a:pPr>
-            <a:r>
-              <a:rPr lang="en-US" sz="1000" dirty="0">
-                <a:solidFill>
-                  <a:schemeClr val="accent2"/>
-                </a:solidFill>
-                <a:latin typeface="Malgun Gothic" pitchFamily="34" charset="0"/>
-                <a:ea typeface="Malgun Gothic" pitchFamily="34" charset="-122"/>
-                <a:cs typeface="Malgun Gothic" pitchFamily="34" charset="-120"/>
-              </a:rPr>
-              <a:t>● ● ●</a:t>
-            </a:r>
-            <a:endParaRPr lang="en-US" sz="1000" dirty="0"/>
-          </a:p>
-        </p:txBody>
-      </p:sp>
-      <p:sp>
-        <p:nvSpPr>
-          <p:cNvPr id="21" name="Text 18"/>
-          <p:cNvSpPr/>
-          <p:nvPr/>
-        </p:nvSpPr>
-        <p:spPr>
-          <a:xfrm>
-            <a:off x="1970532" y="3355848"/>
-            <a:ext cx="955548" cy="475488"/>
-          </a:xfrm>
-          <a:prstGeom prst="roundRect">
-            <a:avLst>
-              <a:gd name="adj" fmla="val 11538"/>
-            </a:avLst>
-          </a:prstGeom>
-          <a:solidFill>
-            <a:schemeClr val="bg2"/>
-          </a:solidFill>
-          <a:ln w="9525">
-            <a:solidFill>
-              <a:schemeClr val="accent3"/>
-            </a:solidFill>
-          </a:ln>
-        </p:spPr>
-        <p:txBody>
-          <a:bodyPr wrap="square" lIns="762" tIns="762" rIns="762" bIns="762" rtlCol="0" anchor="ctr"/>
-          <a:lstStyle/>
-          <a:p>
-            <a:pPr indent="0" marL="0">
-              <a:buNone/>
-            </a:pPr>
-            <a:r>
-              <a:rPr lang="en-US" sz="1000" b="1" dirty="0">
-                <a:solidFill>
-                  <a:schemeClr val="tx1"/>
-                </a:solidFill>
-                <a:latin typeface="Malgun Gothic" pitchFamily="34" charset="0"/>
-                <a:ea typeface="Malgun Gothic" pitchFamily="34" charset="-122"/>
-                <a:cs typeface="Malgun Gothic" pitchFamily="34" charset="-120"/>
-              </a:rPr>
-              <a:t>콩나물</a:t>
-            </a:r>
-            <a:endParaRPr lang="en-US" sz="1000" dirty="0"/>
-          </a:p>
-          <a:p>
-            <a:pPr indent="0" marL="0">
-              <a:buNone/>
-            </a:pPr>
-            <a:r>
-              <a:rPr lang="en-US" sz="1000" dirty="0">
-                <a:solidFill>
-                  <a:schemeClr val="accent2"/>
-                </a:solidFill>
-                <a:latin typeface="Malgun Gothic" pitchFamily="34" charset="0"/>
-                <a:ea typeface="Malgun Gothic" pitchFamily="34" charset="-122"/>
-                <a:cs typeface="Malgun Gothic" pitchFamily="34" charset="-120"/>
-              </a:rPr>
-              <a:t>● ● ●</a:t>
-            </a:r>
-            <a:endParaRPr lang="en-US" sz="1000" dirty="0"/>
-          </a:p>
-        </p:txBody>
-      </p:sp>
-      <p:sp>
-        <p:nvSpPr>
-          <p:cNvPr id="22" name="Shape 19"/>
-          <p:cNvSpPr/>
-          <p:nvPr/>
-        </p:nvSpPr>
-        <p:spPr>
-          <a:xfrm>
-            <a:off x="3227832" y="2651760"/>
+              <a:rPr lang="en-US" sz="1200" dirty="0">
+                <a:solidFill>
+                  <a:schemeClr val="tx2"/>
+                </a:solidFill>
+                <a:latin typeface="Malgun Gothic" pitchFamily="34" charset="0"/>
+                <a:ea typeface="Malgun Gothic" pitchFamily="34" charset="-122"/>
+                <a:cs typeface="Malgun Gothic" pitchFamily="34" charset="-120"/>
+              </a:rPr>
+              <a:t>단어 구간 라벨</a:t>
+            </a:r>
+            <a:endParaRPr lang="en-US" sz="1200" dirty="0"/>
+          </a:p>
+        </p:txBody>
+      </p:sp>
+      <p:sp>
+        <p:nvSpPr>
+          <p:cNvPr id="8" name="Shape 5"/>
+          <p:cNvSpPr/>
+          <p:nvPr/>
+        </p:nvSpPr>
+        <p:spPr>
+          <a:xfrm>
+            <a:off x="1906524" y="1965960"/>
             <a:ext cx="274320" cy="274320"/>
           </a:xfrm>
           <a:prstGeom prst="rightArrow">
@@ -5611,85 +5609,23 @@
       </p:sp>
       <p:sp>
         <p:nvSpPr>
-          <p:cNvPr id="23" name="Shape 20"/>
-          <p:cNvSpPr/>
-          <p:nvPr/>
-        </p:nvSpPr>
-        <p:spPr>
-          <a:xfrm>
-            <a:off x="3657600" y="914400"/>
-            <a:ext cx="2240280" cy="3886200"/>
+          <p:cNvPr id="9" name="Shape 6"/>
+          <p:cNvSpPr/>
+          <p:nvPr/>
+        </p:nvSpPr>
+        <p:spPr>
+          <a:xfrm>
+            <a:off x="2157984" y="1188720"/>
+            <a:ext cx="1417320" cy="1828800"/>
           </a:xfrm>
           <a:prstGeom prst="roundRect">
             <a:avLst>
-              <a:gd name="adj" fmla="val 8163"/>
+              <a:gd name="adj" fmla="val 5161"/>
             </a:avLst>
           </a:prstGeom>
           <a:solidFill>
-            <a:schemeClr val="bg1"/>
+            <a:schemeClr val="bg2"/>
           </a:solidFill>
-          <a:ln w="19050">
-            <a:solidFill>
-              <a:schemeClr val="tx1"/>
-            </a:solidFill>
-            <a:prstDash val="solid"/>
-          </a:ln>
-        </p:spPr>
-      </p:sp>
-      <p:sp>
-        <p:nvSpPr>
-          <p:cNvPr id="24" name="Text 21"/>
-          <p:cNvSpPr txBox="1"/>
-          <p:nvPr/>
-        </p:nvSpPr>
-        <p:spPr>
-          <a:xfrm>
-            <a:off x="3657600" y="4846320"/>
-            <a:ext cx="2240280" cy="228600"/>
-          </a:xfrm>
-          <a:prstGeom prst="rect">
-            <a:avLst/>
-          </a:prstGeom>
-          <a:noFill/>
-          <a:ln/>
-        </p:spPr>
-        <p:txBody>
-          <a:bodyPr wrap="square" lIns="0" tIns="0" rIns="0" bIns="0" rtlCol="0" anchor="t"/>
-          <a:lstStyle/>
-          <a:p>
-            <a:pPr algn="ctr" indent="0" marL="0">
-              <a:buNone/>
-            </a:pPr>
-            <a:r>
-              <a:rPr lang="en-US" sz="1100" b="1" dirty="0">
-                <a:solidFill>
-                  <a:schemeClr val="tx2"/>
-                </a:solidFill>
-                <a:latin typeface="Malgun Gothic" pitchFamily="34" charset="0"/>
-                <a:ea typeface="Malgun Gothic" pitchFamily="34" charset="-122"/>
-                <a:cs typeface="Malgun Gothic" pitchFamily="34" charset="-120"/>
-              </a:rPr>
-              <a:t>단어 상세</a:t>
-            </a:r>
-            <a:endParaRPr lang="en-US" sz="1100" dirty="0"/>
-          </a:p>
-        </p:txBody>
-      </p:sp>
-      <p:sp>
-        <p:nvSpPr>
-          <p:cNvPr id="25" name="Shape 22"/>
-          <p:cNvSpPr/>
-          <p:nvPr/>
-        </p:nvSpPr>
-        <p:spPr>
-          <a:xfrm>
-            <a:off x="3657600" y="4389120"/>
-            <a:ext cx="2240280" cy="0"/>
-          </a:xfrm>
-          <a:prstGeom prst="line">
-            <a:avLst/>
-          </a:prstGeom>
-          <a:noFill/>
           <a:ln w="9525">
             <a:solidFill>
               <a:schemeClr val="accent3"/>
@@ -5700,14 +5636,59 @@
       </p:sp>
       <p:sp>
         <p:nvSpPr>
-          <p:cNvPr id="26" name="Text 23"/>
+          <p:cNvPr id="10" name="Text 7"/>
+          <p:cNvSpPr/>
+          <p:nvPr/>
+        </p:nvSpPr>
+        <p:spPr>
+          <a:xfrm>
+            <a:off x="2295144" y="1325880"/>
+            <a:ext cx="365760" cy="365760"/>
+          </a:xfrm>
+          <a:prstGeom prst="ellipse">
+            <a:avLst/>
+          </a:prstGeom>
+          <a:solidFill>
+            <a:schemeClr val="tx1"/>
+          </a:solidFill>
+          <a:ln>
+            <a:solidFill>
+              <a:schemeClr val="tx1"/>
+            </a:solidFill>
+          </a:ln>
+        </p:spPr>
+        <p:txBody>
+          <a:bodyPr wrap="square" lIns="0" tIns="0" rIns="0" bIns="0" rtlCol="0" anchor="ctr"/>
+          <a:lstStyle/>
+          <a:p>
+            <a:pPr algn="ctr" indent="0" marL="0">
+              <a:buNone/>
+            </a:pPr>
+            <a:r>
+              <a:rPr lang="en-US" sz="1400" b="1" dirty="0">
+                <a:solidFill>
+                  <a:schemeClr val="bg1"/>
+                </a:solidFill>
+                <a:latin typeface="Malgun Gothic" pitchFamily="34" charset="0"/>
+                <a:ea typeface="Malgun Gothic" pitchFamily="34" charset="-122"/>
+                <a:cs typeface="Malgun Gothic" pitchFamily="34" charset="-120"/>
+              </a:rPr>
+              <a:t>2</a:t>
+            </a:r>
+            <a:endParaRPr lang="en-US" sz="1400" dirty="0"/>
+          </a:p>
+        </p:txBody>
+      </p:sp>
+      <p:sp>
+        <p:nvSpPr>
+          <p:cNvPr id="11" name="Text 8"/>
           <p:cNvSpPr txBox="1"/>
           <p:nvPr/>
         </p:nvSpPr>
         <p:spPr>
           <a:xfrm>
-            <a:off x="3703320" y="4462272"/>
-            <a:ext cx="716280" cy="228600"/>
+            <a:off x="2295144" y="1828800"/>
+            <a:ext cx="1188720" cy="365760"/>
           </a:xfrm>
           <a:prstGeom prst="rect">
             <a:avLst/>
@@ -5716,37 +5697,37 @@
           <a:ln/>
         </p:spPr>
         <p:txBody>
-          <a:bodyPr wrap="square" lIns="0" tIns="0" rIns="0" bIns="0" rtlCol="0" anchor="ctr"/>
-          <a:lstStyle/>
-          <a:p>
-            <a:pPr algn="ctr" indent="0" marL="0">
-              <a:buNone/>
-            </a:pPr>
-            <a:r>
-              <a:rPr lang="en-US" sz="1000" b="1" dirty="0">
-                <a:solidFill>
-                  <a:schemeClr val="accent1"/>
-                </a:solidFill>
-                <a:latin typeface="Malgun Gothic" pitchFamily="34" charset="0"/>
-                <a:ea typeface="Malgun Gothic" pitchFamily="34" charset="-122"/>
-                <a:cs typeface="Malgun Gothic" pitchFamily="34" charset="-120"/>
-              </a:rPr>
-              <a:t>검색</a:t>
-            </a:r>
-            <a:endParaRPr lang="en-US" sz="1000" dirty="0"/>
-          </a:p>
-        </p:txBody>
-      </p:sp>
-      <p:sp>
-        <p:nvSpPr>
-          <p:cNvPr id="27" name="Text 24"/>
+          <a:bodyPr wrap="square" lIns="0" tIns="0" rIns="0" bIns="0" rtlCol="0" anchor="t"/>
+          <a:lstStyle/>
+          <a:p>
+            <a:pPr indent="0" marL="0">
+              <a:buNone/>
+            </a:pPr>
+            <a:r>
+              <a:rPr lang="en-US" sz="1400" b="1" dirty="0">
+                <a:solidFill>
+                  <a:schemeClr val="tx1"/>
+                </a:solidFill>
+                <a:latin typeface="Malgun Gothic" pitchFamily="34" charset="0"/>
+                <a:ea typeface="Malgun Gothic" pitchFamily="34" charset="-122"/>
+                <a:cs typeface="Malgun Gothic" pitchFamily="34" charset="-120"/>
+              </a:rPr>
+              <a:t>구간 자르기</a:t>
+            </a:r>
+            <a:endParaRPr lang="en-US" sz="1400" dirty="0"/>
+          </a:p>
+        </p:txBody>
+      </p:sp>
+      <p:sp>
+        <p:nvSpPr>
+          <p:cNvPr id="12" name="Text 9"/>
           <p:cNvSpPr txBox="1"/>
           <p:nvPr/>
         </p:nvSpPr>
         <p:spPr>
           <a:xfrm>
-            <a:off x="4419600" y="4462272"/>
-            <a:ext cx="716280" cy="228600"/>
+            <a:off x="2295144" y="2240280"/>
+            <a:ext cx="1188720" cy="685800"/>
           </a:xfrm>
           <a:prstGeom prst="rect">
             <a:avLst/>
@@ -5755,14 +5736,14 @@
           <a:ln/>
         </p:spPr>
         <p:txBody>
-          <a:bodyPr wrap="square" lIns="0" tIns="0" rIns="0" bIns="0" rtlCol="0" anchor="ctr"/>
-          <a:lstStyle/>
-          <a:p>
-            <a:pPr algn="ctr" indent="0" marL="0">
-              <a:buNone/>
-            </a:pPr>
-            <a:r>
-              <a:rPr lang="en-US" sz="1000" dirty="0">
+          <a:bodyPr wrap="square" lIns="0" tIns="0" rIns="0" bIns="0" rtlCol="0" anchor="t"/>
+          <a:lstStyle/>
+          <a:p>
+            <a:pPr indent="0" marL="0">
+              <a:buNone/>
+            </a:pPr>
+            <a:r>
+              <a:rPr lang="en-US" sz="1200" dirty="0">
                 <a:solidFill>
                   <a:schemeClr val="tx2"/>
                 </a:solidFill>
@@ -5770,38 +5751,16 @@
                 <a:ea typeface="Malgun Gothic" pitchFamily="34" charset="-122"/>
                 <a:cs typeface="Malgun Gothic" pitchFamily="34" charset="-120"/>
               </a:rPr>
-              <a:t>학습하기</a:t>
-            </a:r>
-            <a:endParaRPr lang="en-US" sz="1000" dirty="0"/>
-          </a:p>
-        </p:txBody>
-      </p:sp>
-      <p:sp>
-        <p:nvSpPr>
-          <p:cNvPr id="28" name="Text 25"/>
-          <p:cNvSpPr txBox="1"/>
-          <p:nvPr/>
-        </p:nvSpPr>
-        <p:spPr>
-          <a:xfrm>
-            <a:off x="5135880" y="4462272"/>
-            <a:ext cx="716280" cy="228600"/>
-          </a:xfrm>
-          <a:prstGeom prst="rect">
-            <a:avLst/>
-          </a:prstGeom>
-          <a:noFill/>
-          <a:ln/>
-        </p:spPr>
-        <p:txBody>
-          <a:bodyPr wrap="square" lIns="0" tIns="0" rIns="0" bIns="0" rtlCol="0" anchor="ctr"/>
-          <a:lstStyle/>
-          <a:p>
-            <a:pPr algn="ctr" indent="0" marL="0">
-              <a:buNone/>
-            </a:pPr>
-            <a:r>
-              <a:rPr lang="en-US" sz="1000" dirty="0">
+              <a:t>라벨의</a:t>
+            </a:r>
+            <a:endParaRPr lang="en-US" sz="1200" dirty="0"/>
+          </a:p>
+          <a:p>
+            <a:pPr indent="0" marL="0">
+              <a:buNone/>
+            </a:pPr>
+            <a:r>
+              <a:rPr lang="en-US" sz="1200" dirty="0">
                 <a:solidFill>
                   <a:schemeClr val="tx2"/>
                 </a:solidFill>
@@ -5809,115 +5768,87 @@
                 <a:ea typeface="Malgun Gothic" pitchFamily="34" charset="-122"/>
                 <a:cs typeface="Malgun Gothic" pitchFamily="34" charset="-120"/>
               </a:rPr>
-              <a:t>직접 해보기</a:t>
-            </a:r>
-            <a:endParaRPr lang="en-US" sz="1000" dirty="0"/>
-          </a:p>
-        </p:txBody>
-      </p:sp>
-      <p:sp>
-        <p:nvSpPr>
-          <p:cNvPr id="29" name="Text 26"/>
-          <p:cNvSpPr txBox="1"/>
-          <p:nvPr/>
-        </p:nvSpPr>
-        <p:spPr>
-          <a:xfrm>
-            <a:off x="3794760" y="1078992"/>
-            <a:ext cx="1965960" cy="219456"/>
-          </a:xfrm>
-          <a:prstGeom prst="rect">
-            <a:avLst/>
-          </a:prstGeom>
-          <a:noFill/>
-          <a:ln/>
-        </p:spPr>
-        <p:txBody>
-          <a:bodyPr wrap="square" lIns="0" tIns="0" rIns="0" bIns="0" rtlCol="0" anchor="ctr"/>
-          <a:lstStyle/>
-          <a:p>
-            <a:pPr indent="0" marL="0">
-              <a:buNone/>
-            </a:pPr>
-            <a:r>
-              <a:rPr lang="en-US" sz="1000" dirty="0">
-                <a:solidFill>
-                  <a:schemeClr val="tx2"/>
-                </a:solidFill>
-                <a:latin typeface="Malgun Gothic" pitchFamily="34" charset="0"/>
-                <a:ea typeface="Malgun Gothic" pitchFamily="34" charset="-122"/>
-                <a:cs typeface="Malgun Gothic" pitchFamily="34" charset="-120"/>
-              </a:rPr>
-              <a:t>← 뒤로</a:t>
-            </a:r>
-            <a:endParaRPr lang="en-US" sz="1000" dirty="0"/>
-          </a:p>
-        </p:txBody>
-      </p:sp>
-      <p:sp>
-        <p:nvSpPr>
-          <p:cNvPr id="30" name="Text 27"/>
-          <p:cNvSpPr txBox="1"/>
-          <p:nvPr/>
-        </p:nvSpPr>
-        <p:spPr>
-          <a:xfrm>
-            <a:off x="3794760" y="1325880"/>
-            <a:ext cx="1965960" cy="274320"/>
-          </a:xfrm>
-          <a:prstGeom prst="rect">
-            <a:avLst/>
-          </a:prstGeom>
-          <a:noFill/>
-          <a:ln/>
-        </p:spPr>
-        <p:txBody>
-          <a:bodyPr wrap="square" lIns="0" tIns="0" rIns="0" bIns="0" rtlCol="0" anchor="ctr"/>
-          <a:lstStyle/>
-          <a:p>
-            <a:pPr indent="0" marL="0">
-              <a:buNone/>
-            </a:pPr>
-            <a:r>
-              <a:rPr lang="en-US" sz="1400" b="1" dirty="0">
-                <a:solidFill>
-                  <a:schemeClr val="tx1"/>
-                </a:solidFill>
-                <a:latin typeface="Malgun Gothic" pitchFamily="34" charset="0"/>
-                <a:ea typeface="Malgun Gothic" pitchFamily="34" charset="-122"/>
-                <a:cs typeface="Malgun Gothic" pitchFamily="34" charset="-120"/>
-              </a:rPr>
-              <a:t>라면</a:t>
-            </a:r>
-            <a:endParaRPr lang="en-US" sz="1400" dirty="0"/>
-          </a:p>
-        </p:txBody>
-      </p:sp>
-      <p:sp>
-        <p:nvSpPr>
-          <p:cNvPr id="31" name="Text 28"/>
-          <p:cNvSpPr/>
-          <p:nvPr/>
-        </p:nvSpPr>
-        <p:spPr>
-          <a:xfrm>
-            <a:off x="3794760" y="1673352"/>
-            <a:ext cx="786384" cy="219456"/>
+              <a:t>시작·끝 시각으로</a:t>
+            </a:r>
+            <a:endParaRPr lang="en-US" sz="1200" dirty="0"/>
+          </a:p>
+        </p:txBody>
+      </p:sp>
+      <p:sp>
+        <p:nvSpPr>
+          <p:cNvPr id="13" name="Shape 10"/>
+          <p:cNvSpPr/>
+          <p:nvPr/>
+        </p:nvSpPr>
+        <p:spPr>
+          <a:xfrm>
+            <a:off x="3607308" y="1965960"/>
+            <a:ext cx="274320" cy="274320"/>
+          </a:xfrm>
+          <a:prstGeom prst="rightArrow">
+            <a:avLst/>
+          </a:prstGeom>
+          <a:solidFill>
+            <a:schemeClr val="accent2"/>
+          </a:solidFill>
+          <a:ln w="12700">
+            <a:solidFill>
+              <a:schemeClr val="accent2"/>
+            </a:solidFill>
+            <a:prstDash val="solid"/>
+          </a:ln>
+        </p:spPr>
+      </p:sp>
+      <p:sp>
+        <p:nvSpPr>
+          <p:cNvPr id="14" name="Shape 11"/>
+          <p:cNvSpPr/>
+          <p:nvPr/>
+        </p:nvSpPr>
+        <p:spPr>
+          <a:xfrm>
+            <a:off x="3858768" y="1188720"/>
+            <a:ext cx="1417320" cy="1828800"/>
           </a:xfrm>
           <a:prstGeom prst="roundRect">
             <a:avLst>
-              <a:gd name="adj" fmla="val 50000"/>
+              <a:gd name="adj" fmla="val 5161"/>
             </a:avLst>
           </a:prstGeom>
           <a:solidFill>
-            <a:schemeClr val="bg1"/>
+            <a:schemeClr val="bg2"/>
           </a:solidFill>
           <a:ln w="9525">
             <a:solidFill>
               <a:schemeClr val="accent3"/>
             </a:solidFill>
+            <a:prstDash val="solid"/>
           </a:ln>
         </p:spPr>
+      </p:sp>
+      <p:sp>
+        <p:nvSpPr>
+          <p:cNvPr id="15" name="Text 12"/>
+          <p:cNvSpPr/>
+          <p:nvPr/>
+        </p:nvSpPr>
+        <p:spPr>
+          <a:xfrm>
+            <a:off x="3995928" y="1325880"/>
+            <a:ext cx="365760" cy="365760"/>
+          </a:xfrm>
+          <a:prstGeom prst="ellipse">
+            <a:avLst/>
+          </a:prstGeom>
+          <a:solidFill>
+            <a:schemeClr val="tx1"/>
+          </a:solidFill>
+          <a:ln>
+            <a:solidFill>
+              <a:schemeClr val="tx1"/>
+            </a:solidFill>
+          </a:ln>
+        </p:spPr>
         <p:txBody>
           <a:bodyPr wrap="square" lIns="0" tIns="0" rIns="0" bIns="0" rtlCol="0" anchor="ctr"/>
           <a:lstStyle/>
@@ -5926,7 +5857,46 @@
               <a:buNone/>
             </a:pPr>
             <a:r>
-              <a:rPr lang="en-US" sz="1000" dirty="0">
+              <a:rPr lang="en-US" sz="1400" b="1" dirty="0">
+                <a:solidFill>
+                  <a:schemeClr val="bg1"/>
+                </a:solidFill>
+                <a:latin typeface="Malgun Gothic" pitchFamily="34" charset="0"/>
+                <a:ea typeface="Malgun Gothic" pitchFamily="34" charset="-122"/>
+                <a:cs typeface="Malgun Gothic" pitchFamily="34" charset="-120"/>
+              </a:rPr>
+              <a:t>3</a:t>
+            </a:r>
+            <a:endParaRPr lang="en-US" sz="1400" dirty="0"/>
+          </a:p>
+        </p:txBody>
+      </p:sp>
+      <p:sp>
+        <p:nvSpPr>
+          <p:cNvPr id="16" name="Text 13"/>
+          <p:cNvSpPr txBox="1"/>
+          <p:nvPr/>
+        </p:nvSpPr>
+        <p:spPr>
+          <a:xfrm>
+            <a:off x="3995928" y="1828800"/>
+            <a:ext cx="1188720" cy="365760"/>
+          </a:xfrm>
+          <a:prstGeom prst="rect">
+            <a:avLst/>
+          </a:prstGeom>
+          <a:noFill/>
+          <a:ln/>
+        </p:spPr>
+        <p:txBody>
+          <a:bodyPr wrap="square" lIns="0" tIns="0" rIns="0" bIns="0" rtlCol="0" anchor="t"/>
+          <a:lstStyle/>
+          <a:p>
+            <a:pPr indent="0" marL="0">
+              <a:buNone/>
+            </a:pPr>
+            <a:r>
+              <a:rPr lang="en-US" sz="1400" b="1" dirty="0">
                 <a:solidFill>
                   <a:schemeClr val="tx1"/>
                 </a:solidFill>
@@ -5934,84 +5904,143 @@
                 <a:ea typeface="Malgun Gothic" pitchFamily="34" charset="-122"/>
                 <a:cs typeface="Malgun Gothic" pitchFamily="34" charset="-120"/>
               </a:rPr>
-              <a:t>서울·경기</a:t>
-            </a:r>
-            <a:endParaRPr lang="en-US" sz="1000" dirty="0"/>
-          </a:p>
-        </p:txBody>
-      </p:sp>
-      <p:sp>
-        <p:nvSpPr>
-          <p:cNvPr id="32" name="Text 29"/>
-          <p:cNvSpPr/>
-          <p:nvPr/>
-        </p:nvSpPr>
-        <p:spPr>
-          <a:xfrm>
-            <a:off x="4636008" y="1673352"/>
-            <a:ext cx="475488" cy="219456"/>
+              <a:t>손 좌표</a:t>
+            </a:r>
+            <a:endParaRPr lang="en-US" sz="1400" dirty="0"/>
+          </a:p>
+        </p:txBody>
+      </p:sp>
+      <p:sp>
+        <p:nvSpPr>
+          <p:cNvPr id="17" name="Text 14"/>
+          <p:cNvSpPr txBox="1"/>
+          <p:nvPr/>
+        </p:nvSpPr>
+        <p:spPr>
+          <a:xfrm>
+            <a:off x="3995928" y="2240280"/>
+            <a:ext cx="1188720" cy="685800"/>
+          </a:xfrm>
+          <a:prstGeom prst="rect">
+            <a:avLst/>
+          </a:prstGeom>
+          <a:noFill/>
+          <a:ln/>
+        </p:spPr>
+        <p:txBody>
+          <a:bodyPr wrap="square" lIns="0" tIns="0" rIns="0" bIns="0" rtlCol="0" anchor="t"/>
+          <a:lstStyle/>
+          <a:p>
+            <a:pPr indent="0" marL="0">
+              <a:buNone/>
+            </a:pPr>
+            <a:r>
+              <a:rPr lang="en-US" sz="1200" dirty="0">
+                <a:solidFill>
+                  <a:schemeClr val="tx2"/>
+                </a:solidFill>
+                <a:latin typeface="Malgun Gothic" pitchFamily="34" charset="0"/>
+                <a:ea typeface="Malgun Gothic" pitchFamily="34" charset="-122"/>
+                <a:cs typeface="Malgun Gothic" pitchFamily="34" charset="-120"/>
+              </a:rPr>
+              <a:t>MediaPipe</a:t>
+            </a:r>
+            <a:endParaRPr lang="en-US" sz="1200" dirty="0"/>
+          </a:p>
+          <a:p>
+            <a:pPr indent="0" marL="0">
+              <a:buNone/>
+            </a:pPr>
+            <a:r>
+              <a:rPr lang="en-US" sz="1200" dirty="0">
+                <a:solidFill>
+                  <a:schemeClr val="tx2"/>
+                </a:solidFill>
+                <a:latin typeface="Malgun Gothic" pitchFamily="34" charset="0"/>
+                <a:ea typeface="Malgun Gothic" pitchFamily="34" charset="-122"/>
+                <a:cs typeface="Malgun Gothic" pitchFamily="34" charset="-120"/>
+              </a:rPr>
+              <a:t>손 점 21개</a:t>
+            </a:r>
+            <a:endParaRPr lang="en-US" sz="1200" dirty="0"/>
+          </a:p>
+        </p:txBody>
+      </p:sp>
+      <p:sp>
+        <p:nvSpPr>
+          <p:cNvPr id="18" name="Shape 15"/>
+          <p:cNvSpPr/>
+          <p:nvPr/>
+        </p:nvSpPr>
+        <p:spPr>
+          <a:xfrm>
+            <a:off x="5308092" y="1965960"/>
+            <a:ext cx="274320" cy="274320"/>
+          </a:xfrm>
+          <a:prstGeom prst="rightArrow">
+            <a:avLst/>
+          </a:prstGeom>
+          <a:solidFill>
+            <a:schemeClr val="accent2"/>
+          </a:solidFill>
+          <a:ln w="12700">
+            <a:solidFill>
+              <a:schemeClr val="accent2"/>
+            </a:solidFill>
+            <a:prstDash val="solid"/>
+          </a:ln>
+        </p:spPr>
+      </p:sp>
+      <p:sp>
+        <p:nvSpPr>
+          <p:cNvPr id="19" name="Shape 16"/>
+          <p:cNvSpPr/>
+          <p:nvPr/>
+        </p:nvSpPr>
+        <p:spPr>
+          <a:xfrm>
+            <a:off x="5559552" y="1188720"/>
+            <a:ext cx="1417320" cy="1828800"/>
           </a:xfrm>
           <a:prstGeom prst="roundRect">
             <a:avLst>
-              <a:gd name="adj" fmla="val 50000"/>
+              <a:gd name="adj" fmla="val 5161"/>
             </a:avLst>
           </a:prstGeom>
           <a:solidFill>
-            <a:schemeClr val="accent1"/>
-          </a:solidFill>
-          <a:ln w="9525">
-            <a:solidFill>
-              <a:schemeClr val="accent1"/>
-            </a:solidFill>
-          </a:ln>
-        </p:spPr>
-        <p:txBody>
-          <a:bodyPr wrap="square" lIns="0" tIns="0" rIns="0" bIns="0" rtlCol="0" anchor="ctr"/>
-          <a:lstStyle/>
-          <a:p>
-            <a:pPr algn="ctr" indent="0" marL="0">
-              <a:buNone/>
-            </a:pPr>
-            <a:r>
-              <a:rPr lang="en-US" sz="1000" dirty="0">
-                <a:solidFill>
-                  <a:schemeClr val="bg1"/>
-                </a:solidFill>
-                <a:latin typeface="Malgun Gothic" pitchFamily="34" charset="0"/>
-                <a:ea typeface="Malgun Gothic" pitchFamily="34" charset="-122"/>
-                <a:cs typeface="Malgun Gothic" pitchFamily="34" charset="-120"/>
-              </a:rPr>
-              <a:t>경상</a:t>
-            </a:r>
-            <a:endParaRPr lang="en-US" sz="1000" dirty="0"/>
-          </a:p>
-        </p:txBody>
-      </p:sp>
-      <p:sp>
-        <p:nvSpPr>
-          <p:cNvPr id="33" name="Text 30"/>
-          <p:cNvSpPr/>
-          <p:nvPr/>
-        </p:nvSpPr>
-        <p:spPr>
-          <a:xfrm>
-            <a:off x="5166360" y="1673352"/>
-            <a:ext cx="475488" cy="219456"/>
-          </a:xfrm>
-          <a:prstGeom prst="roundRect">
-            <a:avLst>
-              <a:gd name="adj" fmla="val 50000"/>
-            </a:avLst>
-          </a:prstGeom>
-          <a:solidFill>
-            <a:schemeClr val="bg1"/>
+            <a:schemeClr val="bg2"/>
           </a:solidFill>
           <a:ln w="9525">
             <a:solidFill>
               <a:schemeClr val="accent3"/>
             </a:solidFill>
+            <a:prstDash val="solid"/>
           </a:ln>
         </p:spPr>
+      </p:sp>
+      <p:sp>
+        <p:nvSpPr>
+          <p:cNvPr id="20" name="Text 17"/>
+          <p:cNvSpPr/>
+          <p:nvPr/>
+        </p:nvSpPr>
+        <p:spPr>
+          <a:xfrm>
+            <a:off x="5696712" y="1325880"/>
+            <a:ext cx="365760" cy="365760"/>
+          </a:xfrm>
+          <a:prstGeom prst="ellipse">
+            <a:avLst/>
+          </a:prstGeom>
+          <a:solidFill>
+            <a:schemeClr val="tx1"/>
+          </a:solidFill>
+          <a:ln>
+            <a:solidFill>
+              <a:schemeClr val="tx1"/>
+            </a:solidFill>
+          </a:ln>
+        </p:spPr>
         <p:txBody>
           <a:bodyPr wrap="square" lIns="0" tIns="0" rIns="0" bIns="0" rtlCol="0" anchor="ctr"/>
           <a:lstStyle/>
@@ -6020,7 +6049,46 @@
               <a:buNone/>
             </a:pPr>
             <a:r>
-              <a:rPr lang="en-US" sz="1000" dirty="0">
+              <a:rPr lang="en-US" sz="1400" b="1" dirty="0">
+                <a:solidFill>
+                  <a:schemeClr val="bg1"/>
+                </a:solidFill>
+                <a:latin typeface="Malgun Gothic" pitchFamily="34" charset="0"/>
+                <a:ea typeface="Malgun Gothic" pitchFamily="34" charset="-122"/>
+                <a:cs typeface="Malgun Gothic" pitchFamily="34" charset="-120"/>
+              </a:rPr>
+              <a:t>4</a:t>
+            </a:r>
+            <a:endParaRPr lang="en-US" sz="1400" dirty="0"/>
+          </a:p>
+        </p:txBody>
+      </p:sp>
+      <p:sp>
+        <p:nvSpPr>
+          <p:cNvPr id="21" name="Text 18"/>
+          <p:cNvSpPr txBox="1"/>
+          <p:nvPr/>
+        </p:nvSpPr>
+        <p:spPr>
+          <a:xfrm>
+            <a:off x="5696712" y="1828800"/>
+            <a:ext cx="1188720" cy="365760"/>
+          </a:xfrm>
+          <a:prstGeom prst="rect">
+            <a:avLst/>
+          </a:prstGeom>
+          <a:noFill/>
+          <a:ln/>
+        </p:spPr>
+        <p:txBody>
+          <a:bodyPr wrap="square" lIns="0" tIns="0" rIns="0" bIns="0" rtlCol="0" anchor="t"/>
+          <a:lstStyle/>
+          <a:p>
+            <a:pPr indent="0" marL="0">
+              <a:buNone/>
+            </a:pPr>
+            <a:r>
+              <a:rPr lang="en-US" sz="1400" b="1" dirty="0">
                 <a:solidFill>
                   <a:schemeClr val="tx1"/>
                 </a:solidFill>
@@ -6028,119 +6096,108 @@
                 <a:ea typeface="Malgun Gothic" pitchFamily="34" charset="-122"/>
                 <a:cs typeface="Malgun Gothic" pitchFamily="34" charset="-120"/>
               </a:rPr>
-              <a:t>전라</a:t>
-            </a:r>
-            <a:endParaRPr lang="en-US" sz="1000" dirty="0"/>
-          </a:p>
-        </p:txBody>
-      </p:sp>
-      <p:sp>
-        <p:nvSpPr>
-          <p:cNvPr id="34" name="Text 31"/>
-          <p:cNvSpPr/>
-          <p:nvPr/>
-        </p:nvSpPr>
-        <p:spPr>
-          <a:xfrm>
-            <a:off x="3794760" y="1947672"/>
-            <a:ext cx="475488" cy="219456"/>
+              <a:t>모델 학습</a:t>
+            </a:r>
+            <a:endParaRPr lang="en-US" sz="1400" dirty="0"/>
+          </a:p>
+        </p:txBody>
+      </p:sp>
+      <p:sp>
+        <p:nvSpPr>
+          <p:cNvPr id="22" name="Text 19"/>
+          <p:cNvSpPr txBox="1"/>
+          <p:nvPr/>
+        </p:nvSpPr>
+        <p:spPr>
+          <a:xfrm>
+            <a:off x="5696712" y="2240280"/>
+            <a:ext cx="1188720" cy="685800"/>
+          </a:xfrm>
+          <a:prstGeom prst="rect">
+            <a:avLst/>
+          </a:prstGeom>
+          <a:noFill/>
+          <a:ln/>
+        </p:spPr>
+        <p:txBody>
+          <a:bodyPr wrap="square" lIns="0" tIns="0" rIns="0" bIns="0" rtlCol="0" anchor="t"/>
+          <a:lstStyle/>
+          <a:p>
+            <a:pPr indent="0" marL="0">
+              <a:buNone/>
+            </a:pPr>
+            <a:r>
+              <a:rPr lang="en-US" sz="1200" dirty="0">
+                <a:solidFill>
+                  <a:schemeClr val="tx2"/>
+                </a:solidFill>
+                <a:latin typeface="Malgun Gothic" pitchFamily="34" charset="0"/>
+                <a:ea typeface="Malgun Gothic" pitchFamily="34" charset="-122"/>
+                <a:cs typeface="Malgun Gothic" pitchFamily="34" charset="-120"/>
+              </a:rPr>
+              <a:t>작은 분류 모델</a:t>
+            </a:r>
+            <a:endParaRPr lang="en-US" sz="1200" dirty="0"/>
+          </a:p>
+          <a:p>
+            <a:pPr indent="0" marL="0">
+              <a:buNone/>
+            </a:pPr>
+            <a:r>
+              <a:rPr lang="en-US" sz="1200" dirty="0">
+                <a:solidFill>
+                  <a:schemeClr val="tx2"/>
+                </a:solidFill>
+                <a:latin typeface="Malgun Gothic" pitchFamily="34" charset="0"/>
+                <a:ea typeface="Malgun Gothic" pitchFamily="34" charset="-122"/>
+                <a:cs typeface="Malgun Gothic" pitchFamily="34" charset="-120"/>
+              </a:rPr>
+              <a:t>국내 PC에서</a:t>
+            </a:r>
+            <a:endParaRPr lang="en-US" sz="1200" dirty="0"/>
+          </a:p>
+        </p:txBody>
+      </p:sp>
+      <p:sp>
+        <p:nvSpPr>
+          <p:cNvPr id="23" name="Shape 20"/>
+          <p:cNvSpPr/>
+          <p:nvPr/>
+        </p:nvSpPr>
+        <p:spPr>
+          <a:xfrm>
+            <a:off x="7008876" y="1965960"/>
+            <a:ext cx="274320" cy="274320"/>
+          </a:xfrm>
+          <a:prstGeom prst="rightArrow">
+            <a:avLst/>
+          </a:prstGeom>
+          <a:solidFill>
+            <a:schemeClr val="accent2"/>
+          </a:solidFill>
+          <a:ln w="12700">
+            <a:solidFill>
+              <a:schemeClr val="accent2"/>
+            </a:solidFill>
+            <a:prstDash val="solid"/>
+          </a:ln>
+        </p:spPr>
+      </p:sp>
+      <p:sp>
+        <p:nvSpPr>
+          <p:cNvPr id="24" name="Shape 21"/>
+          <p:cNvSpPr/>
+          <p:nvPr/>
+        </p:nvSpPr>
+        <p:spPr>
+          <a:xfrm>
+            <a:off x="7260336" y="1188720"/>
+            <a:ext cx="1417320" cy="1828800"/>
           </a:xfrm>
           <a:prstGeom prst="roundRect">
             <a:avLst>
-              <a:gd name="adj" fmla="val 50000"/>
+              <a:gd name="adj" fmla="val 5161"/>
             </a:avLst>
-          </a:prstGeom>
-          <a:solidFill>
-            <a:schemeClr val="bg1"/>
-          </a:solidFill>
-          <a:ln w="9525">
-            <a:solidFill>
-              <a:schemeClr val="accent3"/>
-            </a:solidFill>
-          </a:ln>
-        </p:spPr>
-        <p:txBody>
-          <a:bodyPr wrap="square" lIns="0" tIns="0" rIns="0" bIns="0" rtlCol="0" anchor="ctr"/>
-          <a:lstStyle/>
-          <a:p>
-            <a:pPr algn="ctr" indent="0" marL="0">
-              <a:buNone/>
-            </a:pPr>
-            <a:r>
-              <a:rPr lang="en-US" sz="1000" dirty="0">
-                <a:solidFill>
-                  <a:schemeClr val="tx1"/>
-                </a:solidFill>
-                <a:latin typeface="Malgun Gothic" pitchFamily="34" charset="0"/>
-                <a:ea typeface="Malgun Gothic" pitchFamily="34" charset="-122"/>
-                <a:cs typeface="Malgun Gothic" pitchFamily="34" charset="-120"/>
-              </a:rPr>
-              <a:t>충청</a:t>
-            </a:r>
-            <a:endParaRPr lang="en-US" sz="1000" dirty="0"/>
-          </a:p>
-        </p:txBody>
-      </p:sp>
-      <p:sp>
-        <p:nvSpPr>
-          <p:cNvPr id="35" name="Text 32"/>
-          <p:cNvSpPr/>
-          <p:nvPr/>
-        </p:nvSpPr>
-        <p:spPr>
-          <a:xfrm>
-            <a:off x="4325112" y="1947672"/>
-            <a:ext cx="475488" cy="219456"/>
-          </a:xfrm>
-          <a:prstGeom prst="roundRect">
-            <a:avLst>
-              <a:gd name="adj" fmla="val 50000"/>
-            </a:avLst>
-          </a:prstGeom>
-          <a:solidFill>
-            <a:schemeClr val="bg1"/>
-          </a:solidFill>
-          <a:ln w="9525">
-            <a:solidFill>
-              <a:schemeClr val="accent3"/>
-            </a:solidFill>
-          </a:ln>
-        </p:spPr>
-        <p:txBody>
-          <a:bodyPr wrap="square" lIns="0" tIns="0" rIns="0" bIns="0" rtlCol="0" anchor="ctr"/>
-          <a:lstStyle/>
-          <a:p>
-            <a:pPr algn="ctr" indent="0" marL="0">
-              <a:buNone/>
-            </a:pPr>
-            <a:r>
-              <a:rPr lang="en-US" sz="1000" dirty="0">
-                <a:solidFill>
-                  <a:schemeClr val="tx1"/>
-                </a:solidFill>
-                <a:latin typeface="Malgun Gothic" pitchFamily="34" charset="0"/>
-                <a:ea typeface="Malgun Gothic" pitchFamily="34" charset="-122"/>
-                <a:cs typeface="Malgun Gothic" pitchFamily="34" charset="-120"/>
-              </a:rPr>
-              <a:t>제주</a:t>
-            </a:r>
-            <a:endParaRPr lang="en-US" sz="1000" dirty="0"/>
-          </a:p>
-        </p:txBody>
-      </p:sp>
-      <p:sp>
-        <p:nvSpPr>
-          <p:cNvPr id="36" name="Shape 33"/>
-          <p:cNvSpPr/>
-          <p:nvPr/>
-        </p:nvSpPr>
-        <p:spPr>
-          <a:xfrm>
-            <a:off x="3794760" y="2267712"/>
-            <a:ext cx="1965960" cy="685800"/>
-          </a:xfrm>
-          <a:prstGeom prst="rect">
-            <a:avLst/>
           </a:prstGeom>
           <a:solidFill>
             <a:schemeClr val="accent4"/>
@@ -6149,84 +6206,120 @@
             <a:solidFill>
               <a:schemeClr val="accent3"/>
             </a:solidFill>
-            <a:prstDash val="dash"/>
-          </a:ln>
-        </p:spPr>
-      </p:sp>
-      <p:sp>
-        <p:nvSpPr>
-          <p:cNvPr id="37" name="Shape 34"/>
-          <p:cNvSpPr/>
-          <p:nvPr/>
-        </p:nvSpPr>
-        <p:spPr>
-          <a:xfrm>
-            <a:off x="3794760" y="2267712"/>
-            <a:ext cx="1965960" cy="685800"/>
-          </a:xfrm>
-          <a:prstGeom prst="line">
-            <a:avLst/>
-          </a:prstGeom>
-          <a:noFill/>
-          <a:ln w="6350">
-            <a:solidFill>
-              <a:schemeClr val="accent3"/>
-            </a:solidFill>
             <a:prstDash val="solid"/>
           </a:ln>
         </p:spPr>
       </p:sp>
       <p:sp>
         <p:nvSpPr>
-          <p:cNvPr id="38" name="Shape 35"/>
-          <p:cNvSpPr/>
-          <p:nvPr/>
-        </p:nvSpPr>
-        <p:spPr>
-          <a:xfrm>
-            <a:off x="3794760" y="2953512"/>
-            <a:ext cx="1965960" cy="-685800"/>
-          </a:xfrm>
-          <a:prstGeom prst="line">
-            <a:avLst/>
-          </a:prstGeom>
-          <a:noFill/>
-          <a:ln w="6350">
+          <p:cNvPr id="25" name="Text 22"/>
+          <p:cNvSpPr/>
+          <p:nvPr/>
+        </p:nvSpPr>
+        <p:spPr>
+          <a:xfrm>
+            <a:off x="7397496" y="1325880"/>
+            <a:ext cx="365760" cy="365760"/>
+          </a:xfrm>
+          <a:prstGeom prst="ellipse">
+            <a:avLst/>
+          </a:prstGeom>
+          <a:solidFill>
+            <a:schemeClr val="accent1"/>
+          </a:solidFill>
+          <a:ln>
             <a:solidFill>
-              <a:schemeClr val="accent3"/>
+              <a:schemeClr val="accent1"/>
             </a:solidFill>
-            <a:prstDash val="solid"/>
           </a:ln>
         </p:spPr>
-      </p:sp>
-      <p:sp>
-        <p:nvSpPr>
-          <p:cNvPr id="39" name="Text 36"/>
+        <p:txBody>
+          <a:bodyPr wrap="square" lIns="0" tIns="0" rIns="0" bIns="0" rtlCol="0" anchor="ctr"/>
+          <a:lstStyle/>
+          <a:p>
+            <a:pPr algn="ctr" indent="0" marL="0">
+              <a:buNone/>
+            </a:pPr>
+            <a:r>
+              <a:rPr lang="en-US" sz="1400" b="1" dirty="0">
+                <a:solidFill>
+                  <a:schemeClr val="bg1"/>
+                </a:solidFill>
+                <a:latin typeface="Malgun Gothic" pitchFamily="34" charset="0"/>
+                <a:ea typeface="Malgun Gothic" pitchFamily="34" charset="-122"/>
+                <a:cs typeface="Malgun Gothic" pitchFamily="34" charset="-120"/>
+              </a:rPr>
+              <a:t>5</a:t>
+            </a:r>
+            <a:endParaRPr lang="en-US" sz="1400" dirty="0"/>
+          </a:p>
+        </p:txBody>
+      </p:sp>
+      <p:sp>
+        <p:nvSpPr>
+          <p:cNvPr id="26" name="Text 23"/>
           <p:cNvSpPr txBox="1"/>
           <p:nvPr/>
         </p:nvSpPr>
         <p:spPr>
           <a:xfrm>
-            <a:off x="3794760" y="2491740"/>
-            <a:ext cx="1965960" cy="237744"/>
-          </a:xfrm>
-          <a:prstGeom prst="rect">
-            <a:avLst/>
-          </a:prstGeom>
-          <a:solidFill>
-            <a:schemeClr val="accent4"/>
-          </a:solidFill>
+            <a:off x="7397496" y="1828800"/>
+            <a:ext cx="1188720" cy="365760"/>
+          </a:xfrm>
+          <a:prstGeom prst="rect">
+            <a:avLst/>
+          </a:prstGeom>
+          <a:noFill/>
           <a:ln/>
         </p:spPr>
         <p:txBody>
           <a:bodyPr wrap="square" lIns="0" tIns="0" rIns="0" bIns="0" rtlCol="0" anchor="t"/>
           <a:lstStyle/>
           <a:p>
-            <a:pPr algn="ctr" indent="0" marL="0">
-              <a:buNone/>
-            </a:pPr>
-            <a:r>
-              <a:rPr lang="en-US" sz="1000" dirty="0">
+            <a:pPr indent="0" marL="0">
+              <a:buNone/>
+            </a:pPr>
+            <a:r>
+              <a:rPr lang="en-US" sz="1400" b="1" dirty="0">
+                <a:solidFill>
+                  <a:schemeClr val="accent1"/>
+                </a:solidFill>
+                <a:latin typeface="Malgun Gothic" pitchFamily="34" charset="0"/>
+                <a:ea typeface="Malgun Gothic" pitchFamily="34" charset="-122"/>
+                <a:cs typeface="Malgun Gothic" pitchFamily="34" charset="-120"/>
+              </a:rPr>
+              <a:t>앱에서 쓰기</a:t>
+            </a:r>
+            <a:endParaRPr lang="en-US" sz="1400" dirty="0"/>
+          </a:p>
+        </p:txBody>
+      </p:sp>
+      <p:sp>
+        <p:nvSpPr>
+          <p:cNvPr id="27" name="Text 24"/>
+          <p:cNvSpPr txBox="1"/>
+          <p:nvPr/>
+        </p:nvSpPr>
+        <p:spPr>
+          <a:xfrm>
+            <a:off x="7397496" y="2240280"/>
+            <a:ext cx="1188720" cy="685800"/>
+          </a:xfrm>
+          <a:prstGeom prst="rect">
+            <a:avLst/>
+          </a:prstGeom>
+          <a:noFill/>
+          <a:ln/>
+        </p:spPr>
+        <p:txBody>
+          <a:bodyPr wrap="square" lIns="0" tIns="0" rIns="0" bIns="0" rtlCol="0" anchor="t"/>
+          <a:lstStyle/>
+          <a:p>
+            <a:pPr indent="0" marL="0">
+              <a:buNone/>
+            </a:pPr>
+            <a:r>
+              <a:rPr lang="en-US" sz="1200" dirty="0">
                 <a:solidFill>
                   <a:schemeClr val="tx2"/>
                 </a:solidFill>
@@ -6234,111 +6327,16 @@
                 <a:ea typeface="Malgun Gothic" pitchFamily="34" charset="-122"/>
                 <a:cs typeface="Malgun Gothic" pitchFamily="34" charset="-120"/>
               </a:rPr>
-              <a:t>표준 수어 영상</a:t>
-            </a:r>
-            <a:endParaRPr lang="en-US" sz="1000" dirty="0"/>
-          </a:p>
-        </p:txBody>
-      </p:sp>
-      <p:sp>
-        <p:nvSpPr>
-          <p:cNvPr id="40" name="Shape 37"/>
-          <p:cNvSpPr/>
-          <p:nvPr/>
-        </p:nvSpPr>
-        <p:spPr>
-          <a:xfrm>
-            <a:off x="3794760" y="3026664"/>
-            <a:ext cx="1965960" cy="685800"/>
-          </a:xfrm>
-          <a:prstGeom prst="rect">
-            <a:avLst/>
-          </a:prstGeom>
-          <a:solidFill>
-            <a:schemeClr val="accent4"/>
-          </a:solidFill>
-          <a:ln w="9525">
-            <a:solidFill>
-              <a:schemeClr val="accent3"/>
-            </a:solidFill>
-            <a:prstDash val="dash"/>
-          </a:ln>
-        </p:spPr>
-      </p:sp>
-      <p:sp>
-        <p:nvSpPr>
-          <p:cNvPr id="41" name="Shape 38"/>
-          <p:cNvSpPr/>
-          <p:nvPr/>
-        </p:nvSpPr>
-        <p:spPr>
-          <a:xfrm>
-            <a:off x="3794760" y="3026664"/>
-            <a:ext cx="1965960" cy="685800"/>
-          </a:xfrm>
-          <a:prstGeom prst="line">
-            <a:avLst/>
-          </a:prstGeom>
-          <a:noFill/>
-          <a:ln w="6350">
-            <a:solidFill>
-              <a:schemeClr val="accent3"/>
-            </a:solidFill>
-            <a:prstDash val="solid"/>
-          </a:ln>
-        </p:spPr>
-      </p:sp>
-      <p:sp>
-        <p:nvSpPr>
-          <p:cNvPr id="42" name="Shape 39"/>
-          <p:cNvSpPr/>
-          <p:nvPr/>
-        </p:nvSpPr>
-        <p:spPr>
-          <a:xfrm>
-            <a:off x="3794760" y="3712464"/>
-            <a:ext cx="1965960" cy="-685800"/>
-          </a:xfrm>
-          <a:prstGeom prst="line">
-            <a:avLst/>
-          </a:prstGeom>
-          <a:noFill/>
-          <a:ln w="6350">
-            <a:solidFill>
-              <a:schemeClr val="accent3"/>
-            </a:solidFill>
-            <a:prstDash val="solid"/>
-          </a:ln>
-        </p:spPr>
-      </p:sp>
-      <p:sp>
-        <p:nvSpPr>
-          <p:cNvPr id="43" name="Text 40"/>
-          <p:cNvSpPr txBox="1"/>
-          <p:nvPr/>
-        </p:nvSpPr>
-        <p:spPr>
-          <a:xfrm>
-            <a:off x="3794760" y="3250692"/>
-            <a:ext cx="1965960" cy="237744"/>
-          </a:xfrm>
-          <a:prstGeom prst="rect">
-            <a:avLst/>
-          </a:prstGeom>
-          <a:solidFill>
-            <a:schemeClr val="accent4"/>
-          </a:solidFill>
-          <a:ln/>
-        </p:spPr>
-        <p:txBody>
-          <a:bodyPr wrap="square" lIns="0" tIns="0" rIns="0" bIns="0" rtlCol="0" anchor="t"/>
-          <a:lstStyle/>
-          <a:p>
-            <a:pPr algn="ctr" indent="0" marL="0">
-              <a:buNone/>
-            </a:pPr>
-            <a:r>
-              <a:rPr lang="en-US" sz="1000" dirty="0">
+              <a:t>카메라 → 순위만</a:t>
+            </a:r>
+            <a:endParaRPr lang="en-US" sz="1200" dirty="0"/>
+          </a:p>
+          <a:p>
+            <a:pPr indent="0" marL="0">
+              <a:buNone/>
+            </a:pPr>
+            <a:r>
+              <a:rPr lang="en-US" sz="1200" dirty="0">
                 <a:solidFill>
                   <a:schemeClr val="tx2"/>
                 </a:solidFill>
@@ -6346,104 +6344,26 @@
                 <a:ea typeface="Malgun Gothic" pitchFamily="34" charset="-122"/>
                 <a:cs typeface="Malgun Gothic" pitchFamily="34" charset="-120"/>
               </a:rPr>
-              <a:t>경상 수어 영상</a:t>
-            </a:r>
-            <a:endParaRPr lang="en-US" sz="1000" dirty="0"/>
-          </a:p>
-        </p:txBody>
-      </p:sp>
-      <p:sp>
-        <p:nvSpPr>
-          <p:cNvPr id="44" name="Text 41"/>
-          <p:cNvSpPr txBox="1"/>
-          <p:nvPr/>
-        </p:nvSpPr>
-        <p:spPr>
-          <a:xfrm>
-            <a:off x="3794760" y="3758184"/>
-            <a:ext cx="1965960" cy="219456"/>
-          </a:xfrm>
-          <a:prstGeom prst="rect">
-            <a:avLst/>
-          </a:prstGeom>
-          <a:noFill/>
-          <a:ln/>
-        </p:spPr>
-        <p:txBody>
-          <a:bodyPr wrap="square" lIns="0" tIns="0" rIns="0" bIns="0" rtlCol="0" anchor="ctr"/>
-          <a:lstStyle/>
-          <a:p>
-            <a:pPr indent="0" marL="0">
-              <a:buNone/>
-            </a:pPr>
-            <a:r>
-              <a:rPr lang="en-US" sz="1000" dirty="0">
-                <a:solidFill>
-                  <a:schemeClr val="tx2"/>
-                </a:solidFill>
-                <a:latin typeface="Malgun Gothic" pitchFamily="34" charset="0"/>
-                <a:ea typeface="Malgun Gothic" pitchFamily="34" charset="-122"/>
-                <a:cs typeface="Malgun Gothic" pitchFamily="34" charset="-120"/>
-              </a:rPr>
-              <a:t>근거: 대구일보 2013.11.07</a:t>
-            </a:r>
-            <a:endParaRPr lang="en-US" sz="1000" dirty="0"/>
-          </a:p>
-        </p:txBody>
-      </p:sp>
-      <p:sp>
-        <p:nvSpPr>
-          <p:cNvPr id="45" name="Text 42"/>
-          <p:cNvSpPr txBox="1"/>
-          <p:nvPr/>
-        </p:nvSpPr>
-        <p:spPr>
-          <a:xfrm>
-            <a:off x="3794760" y="3959352"/>
-            <a:ext cx="1965960" cy="219456"/>
-          </a:xfrm>
-          <a:prstGeom prst="rect">
-            <a:avLst/>
-          </a:prstGeom>
-          <a:noFill/>
-          <a:ln/>
-        </p:spPr>
-        <p:txBody>
-          <a:bodyPr wrap="square" lIns="0" tIns="0" rIns="0" bIns="0" rtlCol="0" anchor="ctr"/>
-          <a:lstStyle/>
-          <a:p>
-            <a:pPr indent="0" marL="0">
-              <a:buNone/>
-            </a:pPr>
-            <a:r>
-              <a:rPr lang="en-US" sz="1000" dirty="0">
-                <a:solidFill>
-                  <a:schemeClr val="tx2"/>
-                </a:solidFill>
-                <a:latin typeface="Malgun Gothic" pitchFamily="34" charset="0"/>
-                <a:ea typeface="Malgun Gothic" pitchFamily="34" charset="-122"/>
-                <a:cs typeface="Malgun Gothic" pitchFamily="34" charset="-120"/>
-              </a:rPr>
-              <a:t>영상: 팀 촬영 (사전 영상 참고)</a:t>
-            </a:r>
-            <a:endParaRPr lang="en-US" sz="1000" dirty="0"/>
-          </a:p>
-        </p:txBody>
-      </p:sp>
-      <p:sp>
-        <p:nvSpPr>
-          <p:cNvPr id="46" name="Shape 43"/>
-          <p:cNvSpPr/>
-          <p:nvPr/>
-        </p:nvSpPr>
-        <p:spPr>
-          <a:xfrm>
-            <a:off x="6446520" y="914400"/>
-            <a:ext cx="2240280" cy="3886200"/>
+              <a:t>① ② (AI 추정)</a:t>
+            </a:r>
+            <a:endParaRPr lang="en-US" sz="1200" dirty="0"/>
+          </a:p>
+        </p:txBody>
+      </p:sp>
+      <p:sp>
+        <p:nvSpPr>
+          <p:cNvPr id="28" name="Shape 25"/>
+          <p:cNvSpPr/>
+          <p:nvPr/>
+        </p:nvSpPr>
+        <p:spPr>
+          <a:xfrm>
+            <a:off x="457200" y="3291840"/>
+            <a:ext cx="8229600" cy="1280160"/>
           </a:xfrm>
           <a:prstGeom prst="roundRect">
             <a:avLst>
-              <a:gd name="adj" fmla="val 3265"/>
+              <a:gd name="adj" fmla="val 5714"/>
             </a:avLst>
           </a:prstGeom>
           <a:solidFill>
@@ -6459,14 +6379,14 @@
       </p:sp>
       <p:sp>
         <p:nvSpPr>
-          <p:cNvPr id="47" name="Text 44"/>
+          <p:cNvPr id="29" name="Text 26"/>
           <p:cNvSpPr txBox="1"/>
           <p:nvPr/>
         </p:nvSpPr>
         <p:spPr>
           <a:xfrm>
-            <a:off x="6629400" y="1097280"/>
-            <a:ext cx="1920240" cy="320040"/>
+            <a:off x="685800" y="3429000"/>
+            <a:ext cx="2743200" cy="320040"/>
           </a:xfrm>
           <a:prstGeom prst="rect">
             <a:avLst/>
@@ -6484,13 +6404,13 @@
             <a:r>
               <a:rPr lang="en-US" sz="1400" b="1" dirty="0">
                 <a:solidFill>
-                  <a:schemeClr val="tx1"/>
-                </a:solidFill>
-                <a:latin typeface="Malgun Gothic" pitchFamily="34" charset="0"/>
-                <a:ea typeface="Malgun Gothic" pitchFamily="34" charset="-122"/>
-                <a:cs typeface="Malgun Gothic" pitchFamily="34" charset="-120"/>
-              </a:rPr>
-              <a:t>이 화면에서</a:t>
+                  <a:schemeClr val="accent2"/>
+                </a:solidFill>
+                <a:latin typeface="Malgun Gothic" pitchFamily="34" charset="0"/>
+                <a:ea typeface="Malgun Gothic" pitchFamily="34" charset="-122"/>
+                <a:cs typeface="Malgun Gothic" pitchFamily="34" charset="-120"/>
+              </a:rPr>
+              <a:t>지킬 것</a:t>
             </a:r>
             <a:endParaRPr lang="en-US" sz="1400" dirty="0"/>
           </a:p>
@@ -6498,14 +6418,14 @@
       </p:sp>
       <p:sp>
         <p:nvSpPr>
-          <p:cNvPr id="48" name="Text 45"/>
+          <p:cNvPr id="30" name="Text 27"/>
           <p:cNvSpPr txBox="1"/>
           <p:nvPr/>
         </p:nvSpPr>
         <p:spPr>
           <a:xfrm>
-            <a:off x="6629400" y="1508760"/>
-            <a:ext cx="1920240" cy="3108960"/>
+            <a:off x="685800" y="3749040"/>
+            <a:ext cx="7772400" cy="777240"/>
           </a:xfrm>
           <a:prstGeom prst="rect">
             <a:avLst/>
@@ -6519,7 +6439,7 @@
           <a:p>
             <a:pPr marL="342900" indent="-342900">
               <a:spcAft>
-                <a:spcPts val="800"/>
+                <a:spcPts val="200"/>
               </a:spcAft>
               <a:buSzPct val="100000"/>
               <a:buChar char="•"/>
@@ -6533,14 +6453,14 @@
                 <a:ea typeface="Malgun Gothic" pitchFamily="34" charset="-122"/>
                 <a:cs typeface="Malgun Gothic" pitchFamily="34" charset="-120"/>
               </a:rPr>
-              <a:t>검색 또는 카테고리로 단어 찾기</a:t>
+              <a:t>AI-Hub 데이터는 학습에만 · 원본 영상은 앱에 넣지 않음 · 출처 표기</a:t>
             </a:r>
             <a:endParaRPr lang="en-US" sz="1200" dirty="0"/>
           </a:p>
           <a:p>
             <a:pPr marL="342900" indent="-342900">
               <a:spcAft>
-                <a:spcPts val="800"/>
+                <a:spcPts val="200"/>
               </a:spcAft>
               <a:buSzPct val="100000"/>
               <a:buChar char="•"/>
@@ -6554,14 +6474,14 @@
                 <a:ea typeface="Malgun Gothic" pitchFamily="34" charset="-122"/>
                 <a:cs typeface="Malgun Gothic" pitchFamily="34" charset="-120"/>
               </a:rPr>
-              <a:t>지역 점(●)으로 어느 지역 표현이 있는지 표시</a:t>
+              <a:t>학습은 국내 PC에서 (해외 클라우드 학습은 국외 반출)</a:t>
             </a:r>
             <a:endParaRPr lang="en-US" sz="1200" dirty="0"/>
           </a:p>
           <a:p>
             <a:pPr marL="342900" indent="-342900">
               <a:spcAft>
-                <a:spcPts val="800"/>
+                <a:spcPts val="200"/>
               </a:spcAft>
               <a:buSzPct val="100000"/>
               <a:buChar char="•"/>
@@ -6575,28 +6495,7 @@
                 <a:ea typeface="Malgun Gothic" pitchFamily="34" charset="-122"/>
                 <a:cs typeface="Malgun Gothic" pitchFamily="34" charset="-120"/>
               </a:rPr>
-              <a:t>지역 버튼을 누르면 아래 영상이 바뀜</a:t>
-            </a:r>
-            <a:endParaRPr lang="en-US" sz="1200" dirty="0"/>
-          </a:p>
-          <a:p>
-            <a:pPr marL="342900" indent="-342900">
-              <a:spcAft>
-                <a:spcPts val="800"/>
-              </a:spcAft>
-              <a:buSzPct val="100000"/>
-              <a:buChar char="•"/>
-            </a:pPr>
-            <a:r>
-              <a:rPr lang="en-US" sz="1200" dirty="0">
-                <a:solidFill>
-                  <a:schemeClr val="tx1"/>
-                </a:solidFill>
-                <a:latin typeface="Malgun Gothic" pitchFamily="34" charset="0"/>
-                <a:ea typeface="Malgun Gothic" pitchFamily="34" charset="-122"/>
-                <a:cs typeface="Malgun Gothic" pitchFamily="34" charset="-120"/>
-              </a:rPr>
-              <a:t>근거·출처 항상 표시</a:t>
+              <a:t>AI는 표준 수어만 배움 → 지역 비교는 검색(사전) 기능에서</a:t>
             </a:r>
             <a:endParaRPr lang="en-US" sz="1200" dirty="0"/>
           </a:p>
@@ -6707,7 +6606,7 @@
                 <a:ea typeface="Malgun Gothic" pitchFamily="34" charset="-122"/>
                 <a:cs typeface="Malgun Gothic" pitchFamily="34" charset="-120"/>
               </a:rPr>
-              <a:t>앱 레이아웃 ② 직접 해보기 (핵심)</a:t>
+              <a:t>앱 레이아웃 ① 검색</a:t>
             </a:r>
             <a:endParaRPr lang="en-US" sz="2600" dirty="0"/>
           </a:p>
@@ -6721,7 +6620,7 @@
         </p:nvSpPr>
         <p:spPr>
           <a:xfrm>
-            <a:off x="457200" y="914400"/>
+            <a:off x="822960" y="914400"/>
             <a:ext cx="2240280" cy="3886200"/>
           </a:xfrm>
           <a:prstGeom prst="roundRect">
@@ -6748,7 +6647,7 @@
         </p:nvSpPr>
         <p:spPr>
           <a:xfrm>
-            <a:off x="457200" y="4846320"/>
+            <a:off x="822960" y="4846320"/>
             <a:ext cx="2240280" cy="228600"/>
           </a:xfrm>
           <a:prstGeom prst="rect">
@@ -6773,7 +6672,7 @@
                 <a:ea typeface="Malgun Gothic" pitchFamily="34" charset="-122"/>
                 <a:cs typeface="Malgun Gothic" pitchFamily="34" charset="-120"/>
               </a:rPr>
-              <a:t>1 단어 고르기</a:t>
+              <a:t>단어 목록</a:t>
             </a:r>
             <a:endParaRPr lang="en-US" sz="1100" dirty="0"/>
           </a:p>
@@ -6787,7 +6686,7 @@
         </p:nvSpPr>
         <p:spPr>
           <a:xfrm>
-            <a:off x="457200" y="4389120"/>
+            <a:off x="822960" y="4389120"/>
             <a:ext cx="2240280" cy="0"/>
           </a:xfrm>
           <a:prstGeom prst="line">
@@ -6810,7 +6709,7 @@
         </p:nvSpPr>
         <p:spPr>
           <a:xfrm>
-            <a:off x="502920" y="4462272"/>
+            <a:off x="868680" y="4462272"/>
             <a:ext cx="716280" cy="228600"/>
           </a:xfrm>
           <a:prstGeom prst="rect">
@@ -6827,9 +6726,9 @@
               <a:buNone/>
             </a:pPr>
             <a:r>
-              <a:rPr lang="en-US" sz="1000" dirty="0">
-                <a:solidFill>
-                  <a:schemeClr val="tx2"/>
+              <a:rPr lang="en-US" sz="1000" b="1" dirty="0">
+                <a:solidFill>
+                  <a:schemeClr val="accent1"/>
                 </a:solidFill>
                 <a:latin typeface="Malgun Gothic" pitchFamily="34" charset="0"/>
                 <a:ea typeface="Malgun Gothic" pitchFamily="34" charset="-122"/>
@@ -6849,7 +6748,7 @@
         </p:nvSpPr>
         <p:spPr>
           <a:xfrm>
-            <a:off x="1219200" y="4462272"/>
+            <a:off x="1584960" y="4462272"/>
             <a:ext cx="716280" cy="228600"/>
           </a:xfrm>
           <a:prstGeom prst="rect">
@@ -6888,7 +6787,7 @@
         </p:nvSpPr>
         <p:spPr>
           <a:xfrm>
-            <a:off x="1935480" y="4462272"/>
+            <a:off x="2301240" y="4462272"/>
             <a:ext cx="716280" cy="228600"/>
           </a:xfrm>
           <a:prstGeom prst="rect">
@@ -6905,9 +6804,9 @@
               <a:buNone/>
             </a:pPr>
             <a:r>
-              <a:rPr lang="en-US" sz="1000" b="1" dirty="0">
-                <a:solidFill>
-                  <a:schemeClr val="accent1"/>
+              <a:rPr lang="en-US" sz="1000" dirty="0">
+                <a:solidFill>
+                  <a:schemeClr val="tx2"/>
                 </a:solidFill>
                 <a:latin typeface="Malgun Gothic" pitchFamily="34" charset="0"/>
                 <a:ea typeface="Malgun Gothic" pitchFamily="34" charset="-122"/>
@@ -6927,7 +6826,7 @@
         </p:nvSpPr>
         <p:spPr>
           <a:xfrm>
-            <a:off x="594360" y="1078992"/>
+            <a:off x="960120" y="1078992"/>
             <a:ext cx="1965960" cy="274320"/>
           </a:xfrm>
           <a:prstGeom prst="rect">
@@ -6952,7 +6851,7 @@
                 <a:ea typeface="Malgun Gothic" pitchFamily="34" charset="-122"/>
                 <a:cs typeface="Malgun Gothic" pitchFamily="34" charset="-120"/>
               </a:rPr>
-              <a:t>직접 해보기</a:t>
+              <a:t>수어42</a:t>
             </a:r>
             <a:endParaRPr lang="en-US" sz="1400" dirty="0"/>
           </a:p>
@@ -6961,56 +6860,64 @@
       <p:sp>
         <p:nvSpPr>
           <p:cNvPr id="11" name="Text 8"/>
-          <p:cNvSpPr txBox="1"/>
-          <p:nvPr/>
-        </p:nvSpPr>
-        <p:spPr>
-          <a:xfrm>
-            <a:off x="594360" y="1399032"/>
-            <a:ext cx="1965960" cy="219456"/>
-          </a:xfrm>
-          <a:prstGeom prst="rect">
-            <a:avLst/>
-          </a:prstGeom>
-          <a:noFill/>
-          <a:ln/>
-        </p:spPr>
-        <p:txBody>
-          <a:bodyPr wrap="square" lIns="0" tIns="0" rIns="0" bIns="0" rtlCol="0" anchor="ctr"/>
-          <a:lstStyle/>
-          <a:p>
-            <a:pPr indent="0" marL="0">
-              <a:buNone/>
-            </a:pPr>
-            <a:r>
-              <a:rPr lang="en-US" sz="1000" dirty="0">
-                <a:solidFill>
-                  <a:schemeClr val="tx2"/>
-                </a:solidFill>
-                <a:latin typeface="Malgun Gothic" pitchFamily="34" charset="0"/>
-                <a:ea typeface="Malgun Gothic" pitchFamily="34" charset="-122"/>
-                <a:cs typeface="Malgun Gothic" pitchFamily="34" charset="-120"/>
-              </a:rPr>
-              <a:t>따라 할 단어를 고르세요</a:t>
-            </a:r>
-            <a:endParaRPr lang="en-US" sz="1000" dirty="0"/>
-          </a:p>
-        </p:txBody>
-      </p:sp>
-      <p:sp>
-        <p:nvSpPr>
-          <p:cNvPr id="12" name="Text 9"/>
-          <p:cNvSpPr/>
-          <p:nvPr/>
-        </p:nvSpPr>
-        <p:spPr>
-          <a:xfrm>
-            <a:off x="594360" y="1764792"/>
-            <a:ext cx="1965960" cy="329184"/>
+          <p:cNvSpPr/>
+          <p:nvPr/>
+        </p:nvSpPr>
+        <p:spPr>
+          <a:xfrm>
+            <a:off x="960120" y="1444752"/>
+            <a:ext cx="1965960" cy="292608"/>
           </a:xfrm>
           <a:prstGeom prst="roundRect">
             <a:avLst>
-              <a:gd name="adj" fmla="val 16667"/>
+              <a:gd name="adj" fmla="val 18750"/>
+            </a:avLst>
+          </a:prstGeom>
+          <a:solidFill>
+            <a:schemeClr val="bg1"/>
+          </a:solidFill>
+          <a:ln w="9525">
+            <a:solidFill>
+              <a:schemeClr val="accent3"/>
+            </a:solidFill>
+          </a:ln>
+        </p:spPr>
+        <p:txBody>
+          <a:bodyPr wrap="square" lIns="762" tIns="762" rIns="762" bIns="762" rtlCol="0" anchor="ctr"/>
+          <a:lstStyle/>
+          <a:p>
+            <a:pPr indent="0" marL="0">
+              <a:buNone/>
+            </a:pPr>
+            <a:r>
+              <a:rPr lang="en-US" sz="1000" dirty="0">
+                <a:solidFill>
+                  <a:schemeClr val="tx2"/>
+                </a:solidFill>
+                <a:latin typeface="Malgun Gothic" pitchFamily="34" charset="0"/>
+                <a:ea typeface="Malgun Gothic" pitchFamily="34" charset="-122"/>
+                <a:cs typeface="Malgun Gothic" pitchFamily="34" charset="-120"/>
+              </a:rPr>
+              <a:t>🔍  단어 검색</a:t>
+            </a:r>
+            <a:endParaRPr lang="en-US" sz="1000" dirty="0"/>
+          </a:p>
+        </p:txBody>
+      </p:sp>
+      <p:sp>
+        <p:nvSpPr>
+          <p:cNvPr id="12" name="Text 9"/>
+          <p:cNvSpPr/>
+          <p:nvPr/>
+        </p:nvSpPr>
+        <p:spPr>
+          <a:xfrm>
+            <a:off x="960120" y="1856232"/>
+            <a:ext cx="438912" cy="219456"/>
+          </a:xfrm>
+          <a:prstGeom prst="roundRect">
+            <a:avLst>
+              <a:gd name="adj" fmla="val 50000"/>
             </a:avLst>
           </a:prstGeom>
           <a:solidFill>
@@ -7030,7 +6937,7 @@
               <a:buNone/>
             </a:pPr>
             <a:r>
-              <a:rPr lang="en-US" sz="1000" b="1" dirty="0">
+              <a:rPr lang="en-US" sz="1000" dirty="0">
                 <a:solidFill>
                   <a:schemeClr val="bg1"/>
                 </a:solidFill>
@@ -7038,7 +6945,7 @@
                 <a:ea typeface="Malgun Gothic" pitchFamily="34" charset="-122"/>
                 <a:cs typeface="Malgun Gothic" pitchFamily="34" charset="-120"/>
               </a:rPr>
-              <a:t>라면</a:t>
+              <a:t>전체</a:t>
             </a:r>
             <a:endParaRPr lang="en-US" sz="1000" dirty="0"/>
           </a:p>
@@ -7052,12 +6959,12 @@
         </p:nvSpPr>
         <p:spPr>
           <a:xfrm>
-            <a:off x="594360" y="2176272"/>
-            <a:ext cx="1965960" cy="329184"/>
+            <a:off x="1444752" y="1856232"/>
+            <a:ext cx="438912" cy="219456"/>
           </a:xfrm>
           <a:prstGeom prst="roundRect">
             <a:avLst>
-              <a:gd name="adj" fmla="val 16667"/>
+              <a:gd name="adj" fmla="val 50000"/>
             </a:avLst>
           </a:prstGeom>
           <a:solidFill>
@@ -7085,7 +6992,7 @@
                 <a:ea typeface="Malgun Gothic" pitchFamily="34" charset="-122"/>
                 <a:cs typeface="Malgun Gothic" pitchFamily="34" charset="-120"/>
               </a:rPr>
-              <a:t>우유</a:t>
+              <a:t>교통</a:t>
             </a:r>
             <a:endParaRPr lang="en-US" sz="1000" dirty="0"/>
           </a:p>
@@ -7099,12 +7006,12 @@
         </p:nvSpPr>
         <p:spPr>
           <a:xfrm>
-            <a:off x="594360" y="2587752"/>
-            <a:ext cx="1965960" cy="329184"/>
+            <a:off x="1929384" y="1856232"/>
+            <a:ext cx="438912" cy="219456"/>
           </a:xfrm>
           <a:prstGeom prst="roundRect">
             <a:avLst>
-              <a:gd name="adj" fmla="val 16667"/>
+              <a:gd name="adj" fmla="val 50000"/>
             </a:avLst>
           </a:prstGeom>
           <a:solidFill>
@@ -7132,7 +7039,7 @@
                 <a:ea typeface="Malgun Gothic" pitchFamily="34" charset="-122"/>
                 <a:cs typeface="Malgun Gothic" pitchFamily="34" charset="-120"/>
               </a:rPr>
-              <a:t>택시</a:t>
+              <a:t>생활</a:t>
             </a:r>
             <a:endParaRPr lang="en-US" sz="1000" dirty="0"/>
           </a:p>
@@ -7146,12 +7053,12 @@
         </p:nvSpPr>
         <p:spPr>
           <a:xfrm>
-            <a:off x="594360" y="2999232"/>
-            <a:ext cx="1965960" cy="329184"/>
+            <a:off x="2414016" y="1856232"/>
+            <a:ext cx="438912" cy="219456"/>
           </a:xfrm>
           <a:prstGeom prst="roundRect">
             <a:avLst>
-              <a:gd name="adj" fmla="val 16667"/>
+              <a:gd name="adj" fmla="val 50000"/>
             </a:avLst>
           </a:prstGeom>
           <a:solidFill>
@@ -7179,7 +7086,7 @@
                 <a:ea typeface="Malgun Gothic" pitchFamily="34" charset="-122"/>
                 <a:cs typeface="Malgun Gothic" pitchFamily="34" charset="-120"/>
               </a:rPr>
-              <a:t>김치</a:t>
+              <a:t>지명</a:t>
             </a:r>
             <a:endParaRPr lang="en-US" sz="1000" dirty="0"/>
           </a:p>
@@ -7193,16 +7100,16 @@
         </p:nvSpPr>
         <p:spPr>
           <a:xfrm>
-            <a:off x="594360" y="3410712"/>
-            <a:ext cx="1965960" cy="329184"/>
+            <a:off x="960120" y="2221992"/>
+            <a:ext cx="955548" cy="475488"/>
           </a:xfrm>
           <a:prstGeom prst="roundRect">
             <a:avLst>
-              <a:gd name="adj" fmla="val 16667"/>
+              <a:gd name="adj" fmla="val 11538"/>
             </a:avLst>
           </a:prstGeom>
           <a:solidFill>
-            <a:schemeClr val="bg1"/>
+            <a:schemeClr val="bg2"/>
           </a:solidFill>
           <a:ln w="9525">
             <a:solidFill>
@@ -7211,36 +7118,373 @@
           </a:ln>
         </p:spPr>
         <p:txBody>
-          <a:bodyPr wrap="square" lIns="0" tIns="0" rIns="0" bIns="0" rtlCol="0" anchor="ctr"/>
-          <a:lstStyle/>
-          <a:p>
-            <a:pPr algn="ctr" indent="0" marL="0">
+          <a:bodyPr wrap="square" lIns="762" tIns="762" rIns="762" bIns="762" rtlCol="0" anchor="ctr"/>
+          <a:lstStyle/>
+          <a:p>
+            <a:pPr indent="0" marL="0">
+              <a:buNone/>
+            </a:pPr>
+            <a:r>
+              <a:rPr lang="en-US" sz="1000" b="1" dirty="0">
+                <a:solidFill>
+                  <a:schemeClr val="tx1"/>
+                </a:solidFill>
+                <a:latin typeface="Malgun Gothic" pitchFamily="34" charset="0"/>
+                <a:ea typeface="Malgun Gothic" pitchFamily="34" charset="-122"/>
+                <a:cs typeface="Malgun Gothic" pitchFamily="34" charset="-120"/>
+              </a:rPr>
+              <a:t>택시</a:t>
+            </a:r>
+            <a:endParaRPr lang="en-US" sz="1000" dirty="0"/>
+          </a:p>
+          <a:p>
+            <a:pPr indent="0" marL="0">
               <a:buNone/>
             </a:pPr>
             <a:r>
               <a:rPr lang="en-US" sz="1000" dirty="0">
                 <a:solidFill>
+                  <a:schemeClr val="accent2"/>
+                </a:solidFill>
+                <a:latin typeface="Malgun Gothic" pitchFamily="34" charset="0"/>
+                <a:ea typeface="Malgun Gothic" pitchFamily="34" charset="-122"/>
+                <a:cs typeface="Malgun Gothic" pitchFamily="34" charset="-120"/>
+              </a:rPr>
+              <a:t>● ● ●</a:t>
+            </a:r>
+            <a:endParaRPr lang="en-US" sz="1000" dirty="0"/>
+          </a:p>
+        </p:txBody>
+      </p:sp>
+      <p:sp>
+        <p:nvSpPr>
+          <p:cNvPr id="17" name="Text 14"/>
+          <p:cNvSpPr/>
+          <p:nvPr/>
+        </p:nvSpPr>
+        <p:spPr>
+          <a:xfrm>
+            <a:off x="1970532" y="2221992"/>
+            <a:ext cx="955548" cy="475488"/>
+          </a:xfrm>
+          <a:prstGeom prst="roundRect">
+            <a:avLst>
+              <a:gd name="adj" fmla="val 11538"/>
+            </a:avLst>
+          </a:prstGeom>
+          <a:solidFill>
+            <a:schemeClr val="bg2"/>
+          </a:solidFill>
+          <a:ln w="9525">
+            <a:solidFill>
+              <a:schemeClr val="accent3"/>
+            </a:solidFill>
+          </a:ln>
+        </p:spPr>
+        <p:txBody>
+          <a:bodyPr wrap="square" lIns="762" tIns="762" rIns="762" bIns="762" rtlCol="0" anchor="ctr"/>
+          <a:lstStyle/>
+          <a:p>
+            <a:pPr indent="0" marL="0">
+              <a:buNone/>
+            </a:pPr>
+            <a:r>
+              <a:rPr lang="en-US" sz="1000" b="1" dirty="0">
+                <a:solidFill>
                   <a:schemeClr val="tx1"/>
                 </a:solidFill>
                 <a:latin typeface="Malgun Gothic" pitchFamily="34" charset="0"/>
                 <a:ea typeface="Malgun Gothic" pitchFamily="34" charset="-122"/>
                 <a:cs typeface="Malgun Gothic" pitchFamily="34" charset="-120"/>
               </a:rPr>
-              <a:t>콩나물</a:t>
+              <a:t>신호등</a:t>
             </a:r>
             <a:endParaRPr lang="en-US" sz="1000" dirty="0"/>
           </a:p>
-        </p:txBody>
-      </p:sp>
-      <p:sp>
-        <p:nvSpPr>
-          <p:cNvPr id="17" name="Shape 14"/>
-          <p:cNvSpPr/>
-          <p:nvPr/>
-        </p:nvSpPr>
-        <p:spPr>
-          <a:xfrm>
-            <a:off x="2807208" y="2651760"/>
+          <a:p>
+            <a:pPr indent="0" marL="0">
+              <a:buNone/>
+            </a:pPr>
+            <a:r>
+              <a:rPr lang="en-US" sz="1000" dirty="0">
+                <a:solidFill>
+                  <a:schemeClr val="accent2"/>
+                </a:solidFill>
+                <a:latin typeface="Malgun Gothic" pitchFamily="34" charset="0"/>
+                <a:ea typeface="Malgun Gothic" pitchFamily="34" charset="-122"/>
+                <a:cs typeface="Malgun Gothic" pitchFamily="34" charset="-120"/>
+              </a:rPr>
+              <a:t>● ● ●</a:t>
+            </a:r>
+            <a:endParaRPr lang="en-US" sz="1000" dirty="0"/>
+          </a:p>
+        </p:txBody>
+      </p:sp>
+      <p:sp>
+        <p:nvSpPr>
+          <p:cNvPr id="18" name="Text 15"/>
+          <p:cNvSpPr/>
+          <p:nvPr/>
+        </p:nvSpPr>
+        <p:spPr>
+          <a:xfrm>
+            <a:off x="960120" y="2788920"/>
+            <a:ext cx="955548" cy="475488"/>
+          </a:xfrm>
+          <a:prstGeom prst="roundRect">
+            <a:avLst>
+              <a:gd name="adj" fmla="val 11538"/>
+            </a:avLst>
+          </a:prstGeom>
+          <a:solidFill>
+            <a:schemeClr val="bg2"/>
+          </a:solidFill>
+          <a:ln w="9525">
+            <a:solidFill>
+              <a:schemeClr val="accent3"/>
+            </a:solidFill>
+          </a:ln>
+        </p:spPr>
+        <p:txBody>
+          <a:bodyPr wrap="square" lIns="762" tIns="762" rIns="762" bIns="762" rtlCol="0" anchor="ctr"/>
+          <a:lstStyle/>
+          <a:p>
+            <a:pPr indent="0" marL="0">
+              <a:buNone/>
+            </a:pPr>
+            <a:r>
+              <a:rPr lang="en-US" sz="1000" b="1" dirty="0">
+                <a:solidFill>
+                  <a:schemeClr val="tx1"/>
+                </a:solidFill>
+                <a:latin typeface="Malgun Gothic" pitchFamily="34" charset="0"/>
+                <a:ea typeface="Malgun Gothic" pitchFamily="34" charset="-122"/>
+                <a:cs typeface="Malgun Gothic" pitchFamily="34" charset="-120"/>
+              </a:rPr>
+              <a:t>버스</a:t>
+            </a:r>
+            <a:endParaRPr lang="en-US" sz="1000" dirty="0"/>
+          </a:p>
+          <a:p>
+            <a:pPr indent="0" marL="0">
+              <a:buNone/>
+            </a:pPr>
+            <a:r>
+              <a:rPr lang="en-US" sz="1000" dirty="0">
+                <a:solidFill>
+                  <a:schemeClr val="accent2"/>
+                </a:solidFill>
+                <a:latin typeface="Malgun Gothic" pitchFamily="34" charset="0"/>
+                <a:ea typeface="Malgun Gothic" pitchFamily="34" charset="-122"/>
+                <a:cs typeface="Malgun Gothic" pitchFamily="34" charset="-120"/>
+              </a:rPr>
+              <a:t>● ● ●</a:t>
+            </a:r>
+            <a:endParaRPr lang="en-US" sz="1000" dirty="0"/>
+          </a:p>
+        </p:txBody>
+      </p:sp>
+      <p:sp>
+        <p:nvSpPr>
+          <p:cNvPr id="19" name="Text 16"/>
+          <p:cNvSpPr/>
+          <p:nvPr/>
+        </p:nvSpPr>
+        <p:spPr>
+          <a:xfrm>
+            <a:off x="1970532" y="2788920"/>
+            <a:ext cx="955548" cy="475488"/>
+          </a:xfrm>
+          <a:prstGeom prst="roundRect">
+            <a:avLst>
+              <a:gd name="adj" fmla="val 11538"/>
+            </a:avLst>
+          </a:prstGeom>
+          <a:solidFill>
+            <a:schemeClr val="bg2"/>
+          </a:solidFill>
+          <a:ln w="9525">
+            <a:solidFill>
+              <a:schemeClr val="accent3"/>
+            </a:solidFill>
+          </a:ln>
+        </p:spPr>
+        <p:txBody>
+          <a:bodyPr wrap="square" lIns="762" tIns="762" rIns="762" bIns="762" rtlCol="0" anchor="ctr"/>
+          <a:lstStyle/>
+          <a:p>
+            <a:pPr indent="0" marL="0">
+              <a:buNone/>
+            </a:pPr>
+            <a:r>
+              <a:rPr lang="en-US" sz="1000" b="1" dirty="0">
+                <a:solidFill>
+                  <a:schemeClr val="tx1"/>
+                </a:solidFill>
+                <a:latin typeface="Malgun Gothic" pitchFamily="34" charset="0"/>
+                <a:ea typeface="Malgun Gothic" pitchFamily="34" charset="-122"/>
+                <a:cs typeface="Malgun Gothic" pitchFamily="34" charset="-120"/>
+              </a:rPr>
+              <a:t>지하철</a:t>
+            </a:r>
+            <a:endParaRPr lang="en-US" sz="1000" dirty="0"/>
+          </a:p>
+          <a:p>
+            <a:pPr indent="0" marL="0">
+              <a:buNone/>
+            </a:pPr>
+            <a:r>
+              <a:rPr lang="en-US" sz="1000" dirty="0">
+                <a:solidFill>
+                  <a:schemeClr val="accent2"/>
+                </a:solidFill>
+                <a:latin typeface="Malgun Gothic" pitchFamily="34" charset="0"/>
+                <a:ea typeface="Malgun Gothic" pitchFamily="34" charset="-122"/>
+                <a:cs typeface="Malgun Gothic" pitchFamily="34" charset="-120"/>
+              </a:rPr>
+              <a:t>● ● ●</a:t>
+            </a:r>
+            <a:endParaRPr lang="en-US" sz="1000" dirty="0"/>
+          </a:p>
+        </p:txBody>
+      </p:sp>
+      <p:sp>
+        <p:nvSpPr>
+          <p:cNvPr id="20" name="Text 17"/>
+          <p:cNvSpPr/>
+          <p:nvPr/>
+        </p:nvSpPr>
+        <p:spPr>
+          <a:xfrm>
+            <a:off x="960120" y="3355848"/>
+            <a:ext cx="955548" cy="475488"/>
+          </a:xfrm>
+          <a:prstGeom prst="roundRect">
+            <a:avLst>
+              <a:gd name="adj" fmla="val 11538"/>
+            </a:avLst>
+          </a:prstGeom>
+          <a:solidFill>
+            <a:schemeClr val="bg2"/>
+          </a:solidFill>
+          <a:ln w="9525">
+            <a:solidFill>
+              <a:schemeClr val="accent3"/>
+            </a:solidFill>
+          </a:ln>
+        </p:spPr>
+        <p:txBody>
+          <a:bodyPr wrap="square" lIns="762" tIns="762" rIns="762" bIns="762" rtlCol="0" anchor="ctr"/>
+          <a:lstStyle/>
+          <a:p>
+            <a:pPr indent="0" marL="0">
+              <a:buNone/>
+            </a:pPr>
+            <a:r>
+              <a:rPr lang="en-US" sz="1000" b="1" dirty="0">
+                <a:solidFill>
+                  <a:schemeClr val="tx1"/>
+                </a:solidFill>
+                <a:latin typeface="Malgun Gothic" pitchFamily="34" charset="0"/>
+                <a:ea typeface="Malgun Gothic" pitchFamily="34" charset="-122"/>
+                <a:cs typeface="Malgun Gothic" pitchFamily="34" charset="-120"/>
+              </a:rPr>
+              <a:t>학교</a:t>
+            </a:r>
+            <a:endParaRPr lang="en-US" sz="1000" dirty="0"/>
+          </a:p>
+          <a:p>
+            <a:pPr indent="0" marL="0">
+              <a:buNone/>
+            </a:pPr>
+            <a:r>
+              <a:rPr lang="en-US" sz="1000" dirty="0">
+                <a:solidFill>
+                  <a:schemeClr val="accent2"/>
+                </a:solidFill>
+                <a:latin typeface="Malgun Gothic" pitchFamily="34" charset="0"/>
+                <a:ea typeface="Malgun Gothic" pitchFamily="34" charset="-122"/>
+                <a:cs typeface="Malgun Gothic" pitchFamily="34" charset="-120"/>
+              </a:rPr>
+              <a:t>● ● ●</a:t>
+            </a:r>
+            <a:endParaRPr lang="en-US" sz="1000" dirty="0"/>
+          </a:p>
+        </p:txBody>
+      </p:sp>
+      <p:sp>
+        <p:nvSpPr>
+          <p:cNvPr id="21" name="Text 18"/>
+          <p:cNvSpPr/>
+          <p:nvPr/>
+        </p:nvSpPr>
+        <p:spPr>
+          <a:xfrm>
+            <a:off x="1970532" y="3355848"/>
+            <a:ext cx="955548" cy="475488"/>
+          </a:xfrm>
+          <a:prstGeom prst="roundRect">
+            <a:avLst>
+              <a:gd name="adj" fmla="val 11538"/>
+            </a:avLst>
+          </a:prstGeom>
+          <a:solidFill>
+            <a:schemeClr val="bg2"/>
+          </a:solidFill>
+          <a:ln w="9525">
+            <a:solidFill>
+              <a:schemeClr val="accent3"/>
+            </a:solidFill>
+          </a:ln>
+        </p:spPr>
+        <p:txBody>
+          <a:bodyPr wrap="square" lIns="762" tIns="762" rIns="762" bIns="762" rtlCol="0" anchor="ctr"/>
+          <a:lstStyle/>
+          <a:p>
+            <a:pPr indent="0" marL="0">
+              <a:buNone/>
+            </a:pPr>
+            <a:r>
+              <a:rPr lang="en-US" sz="1000" b="1" dirty="0">
+                <a:solidFill>
+                  <a:schemeClr val="tx1"/>
+                </a:solidFill>
+                <a:latin typeface="Malgun Gothic" pitchFamily="34" charset="0"/>
+                <a:ea typeface="Malgun Gothic" pitchFamily="34" charset="-122"/>
+                <a:cs typeface="Malgun Gothic" pitchFamily="34" charset="-120"/>
+              </a:rPr>
+              <a:t>기차</a:t>
+            </a:r>
+            <a:endParaRPr lang="en-US" sz="1000" dirty="0"/>
+          </a:p>
+          <a:p>
+            <a:pPr indent="0" marL="0">
+              <a:buNone/>
+            </a:pPr>
+            <a:r>
+              <a:rPr lang="en-US" sz="1000" dirty="0">
+                <a:solidFill>
+                  <a:schemeClr val="accent2"/>
+                </a:solidFill>
+                <a:latin typeface="Malgun Gothic" pitchFamily="34" charset="0"/>
+                <a:ea typeface="Malgun Gothic" pitchFamily="34" charset="-122"/>
+                <a:cs typeface="Malgun Gothic" pitchFamily="34" charset="-120"/>
+              </a:rPr>
+              <a:t>● ● ●</a:t>
+            </a:r>
+            <a:endParaRPr lang="en-US" sz="1000" dirty="0"/>
+          </a:p>
+        </p:txBody>
+      </p:sp>
+      <p:sp>
+        <p:nvSpPr>
+          <p:cNvPr id="22" name="Shape 19"/>
+          <p:cNvSpPr/>
+          <p:nvPr/>
+        </p:nvSpPr>
+        <p:spPr>
+          <a:xfrm>
+            <a:off x="3227832" y="2651760"/>
             <a:ext cx="274320" cy="274320"/>
           </a:xfrm>
           <a:prstGeom prst="rightArrow">
@@ -7259,13 +7503,13 @@
       </p:sp>
       <p:sp>
         <p:nvSpPr>
-          <p:cNvPr id="18" name="Shape 15"/>
-          <p:cNvSpPr/>
-          <p:nvPr/>
-        </p:nvSpPr>
-        <p:spPr>
-          <a:xfrm>
-            <a:off x="3291840" y="914400"/>
+          <p:cNvPr id="23" name="Shape 20"/>
+          <p:cNvSpPr/>
+          <p:nvPr/>
+        </p:nvSpPr>
+        <p:spPr>
+          <a:xfrm>
+            <a:off x="3657600" y="914400"/>
             <a:ext cx="2240280" cy="3886200"/>
           </a:xfrm>
           <a:prstGeom prst="roundRect">
@@ -7286,13 +7530,13 @@
       </p:sp>
       <p:sp>
         <p:nvSpPr>
-          <p:cNvPr id="19" name="Text 16"/>
+          <p:cNvPr id="24" name="Text 21"/>
           <p:cNvSpPr txBox="1"/>
           <p:nvPr/>
         </p:nvSpPr>
         <p:spPr>
           <a:xfrm>
-            <a:off x="3291840" y="4846320"/>
+            <a:off x="3657600" y="4846320"/>
             <a:ext cx="2240280" cy="228600"/>
           </a:xfrm>
           <a:prstGeom prst="rect">
@@ -7317,7 +7561,7 @@
                 <a:ea typeface="Malgun Gothic" pitchFamily="34" charset="-122"/>
                 <a:cs typeface="Malgun Gothic" pitchFamily="34" charset="-120"/>
               </a:rPr>
-              <a:t>2 따라 하기</a:t>
+              <a:t>단어 상세</a:t>
             </a:r>
             <a:endParaRPr lang="en-US" sz="1100" dirty="0"/>
           </a:p>
@@ -7325,13 +7569,13 @@
       </p:sp>
       <p:sp>
         <p:nvSpPr>
-          <p:cNvPr id="20" name="Shape 17"/>
-          <p:cNvSpPr/>
-          <p:nvPr/>
-        </p:nvSpPr>
-        <p:spPr>
-          <a:xfrm>
-            <a:off x="3291840" y="4389120"/>
+          <p:cNvPr id="25" name="Shape 22"/>
+          <p:cNvSpPr/>
+          <p:nvPr/>
+        </p:nvSpPr>
+        <p:spPr>
+          <a:xfrm>
+            <a:off x="3657600" y="4389120"/>
             <a:ext cx="2240280" cy="0"/>
           </a:xfrm>
           <a:prstGeom prst="line">
@@ -7348,13 +7592,13 @@
       </p:sp>
       <p:sp>
         <p:nvSpPr>
-          <p:cNvPr id="21" name="Text 18"/>
+          <p:cNvPr id="26" name="Text 23"/>
           <p:cNvSpPr txBox="1"/>
           <p:nvPr/>
         </p:nvSpPr>
         <p:spPr>
           <a:xfrm>
-            <a:off x="3337560" y="4462272"/>
+            <a:off x="3703320" y="4462272"/>
             <a:ext cx="716280" cy="228600"/>
           </a:xfrm>
           <a:prstGeom prst="rect">
@@ -7371,6 +7615,45 @@
               <a:buNone/>
             </a:pPr>
             <a:r>
+              <a:rPr lang="en-US" sz="1000" b="1" dirty="0">
+                <a:solidFill>
+                  <a:schemeClr val="accent1"/>
+                </a:solidFill>
+                <a:latin typeface="Malgun Gothic" pitchFamily="34" charset="0"/>
+                <a:ea typeface="Malgun Gothic" pitchFamily="34" charset="-122"/>
+                <a:cs typeface="Malgun Gothic" pitchFamily="34" charset="-120"/>
+              </a:rPr>
+              <a:t>검색</a:t>
+            </a:r>
+            <a:endParaRPr lang="en-US" sz="1000" dirty="0"/>
+          </a:p>
+        </p:txBody>
+      </p:sp>
+      <p:sp>
+        <p:nvSpPr>
+          <p:cNvPr id="27" name="Text 24"/>
+          <p:cNvSpPr txBox="1"/>
+          <p:nvPr/>
+        </p:nvSpPr>
+        <p:spPr>
+          <a:xfrm>
+            <a:off x="4419600" y="4462272"/>
+            <a:ext cx="716280" cy="228600"/>
+          </a:xfrm>
+          <a:prstGeom prst="rect">
+            <a:avLst/>
+          </a:prstGeom>
+          <a:noFill/>
+          <a:ln/>
+        </p:spPr>
+        <p:txBody>
+          <a:bodyPr wrap="square" lIns="0" tIns="0" rIns="0" bIns="0" rtlCol="0" anchor="ctr"/>
+          <a:lstStyle/>
+          <a:p>
+            <a:pPr algn="ctr" indent="0" marL="0">
+              <a:buNone/>
+            </a:pPr>
+            <a:r>
               <a:rPr lang="en-US" sz="1000" dirty="0">
                 <a:solidFill>
                   <a:schemeClr val="tx2"/>
@@ -7379,7 +7662,7 @@
                 <a:ea typeface="Malgun Gothic" pitchFamily="34" charset="-122"/>
                 <a:cs typeface="Malgun Gothic" pitchFamily="34" charset="-120"/>
               </a:rPr>
-              <a:t>검색</a:t>
+              <a:t>학습하기</a:t>
             </a:r>
             <a:endParaRPr lang="en-US" sz="1000" dirty="0"/>
           </a:p>
@@ -7387,13 +7670,13 @@
       </p:sp>
       <p:sp>
         <p:nvSpPr>
-          <p:cNvPr id="22" name="Text 19"/>
+          <p:cNvPr id="28" name="Text 25"/>
           <p:cNvSpPr txBox="1"/>
           <p:nvPr/>
         </p:nvSpPr>
         <p:spPr>
           <a:xfrm>
-            <a:off x="4053840" y="4462272"/>
+            <a:off x="5135880" y="4462272"/>
             <a:ext cx="716280" cy="228600"/>
           </a:xfrm>
           <a:prstGeom prst="rect">
@@ -7418,7 +7701,7 @@
                 <a:ea typeface="Malgun Gothic" pitchFamily="34" charset="-122"/>
                 <a:cs typeface="Malgun Gothic" pitchFamily="34" charset="-120"/>
               </a:rPr>
-              <a:t>학습하기</a:t>
+              <a:t>직접 해보기</a:t>
             </a:r>
             <a:endParaRPr lang="en-US" sz="1000" dirty="0"/>
           </a:p>
@@ -7426,14 +7709,14 @@
       </p:sp>
       <p:sp>
         <p:nvSpPr>
-          <p:cNvPr id="23" name="Text 20"/>
+          <p:cNvPr id="29" name="Text 26"/>
           <p:cNvSpPr txBox="1"/>
           <p:nvPr/>
         </p:nvSpPr>
         <p:spPr>
           <a:xfrm>
-            <a:off x="4770120" y="4462272"/>
-            <a:ext cx="716280" cy="228600"/>
+            <a:off x="3794760" y="1078992"/>
+            <a:ext cx="1965960" cy="219456"/>
           </a:xfrm>
           <a:prstGeom prst="rect">
             <a:avLst/>
@@ -7445,19 +7728,105 @@
           <a:bodyPr wrap="square" lIns="0" tIns="0" rIns="0" bIns="0" rtlCol="0" anchor="ctr"/>
           <a:lstStyle/>
           <a:p>
+            <a:pPr indent="0" marL="0">
+              <a:buNone/>
+            </a:pPr>
+            <a:r>
+              <a:rPr lang="en-US" sz="1000" dirty="0">
+                <a:solidFill>
+                  <a:schemeClr val="tx2"/>
+                </a:solidFill>
+                <a:latin typeface="Malgun Gothic" pitchFamily="34" charset="0"/>
+                <a:ea typeface="Malgun Gothic" pitchFamily="34" charset="-122"/>
+                <a:cs typeface="Malgun Gothic" pitchFamily="34" charset="-120"/>
+              </a:rPr>
+              <a:t>← 뒤로</a:t>
+            </a:r>
+            <a:endParaRPr lang="en-US" sz="1000" dirty="0"/>
+          </a:p>
+        </p:txBody>
+      </p:sp>
+      <p:sp>
+        <p:nvSpPr>
+          <p:cNvPr id="30" name="Text 27"/>
+          <p:cNvSpPr txBox="1"/>
+          <p:nvPr/>
+        </p:nvSpPr>
+        <p:spPr>
+          <a:xfrm>
+            <a:off x="3794760" y="1325880"/>
+            <a:ext cx="1965960" cy="274320"/>
+          </a:xfrm>
+          <a:prstGeom prst="rect">
+            <a:avLst/>
+          </a:prstGeom>
+          <a:noFill/>
+          <a:ln/>
+        </p:spPr>
+        <p:txBody>
+          <a:bodyPr wrap="square" lIns="0" tIns="0" rIns="0" bIns="0" rtlCol="0" anchor="ctr"/>
+          <a:lstStyle/>
+          <a:p>
+            <a:pPr indent="0" marL="0">
+              <a:buNone/>
+            </a:pPr>
+            <a:r>
+              <a:rPr lang="en-US" sz="1400" b="1" dirty="0">
+                <a:solidFill>
+                  <a:schemeClr val="tx1"/>
+                </a:solidFill>
+                <a:latin typeface="Malgun Gothic" pitchFamily="34" charset="0"/>
+                <a:ea typeface="Malgun Gothic" pitchFamily="34" charset="-122"/>
+                <a:cs typeface="Malgun Gothic" pitchFamily="34" charset="-120"/>
+              </a:rPr>
+              <a:t>택시</a:t>
+            </a:r>
+            <a:endParaRPr lang="en-US" sz="1400" dirty="0"/>
+          </a:p>
+        </p:txBody>
+      </p:sp>
+      <p:sp>
+        <p:nvSpPr>
+          <p:cNvPr id="31" name="Text 28"/>
+          <p:cNvSpPr/>
+          <p:nvPr/>
+        </p:nvSpPr>
+        <p:spPr>
+          <a:xfrm>
+            <a:off x="3794760" y="1673352"/>
+            <a:ext cx="786384" cy="219456"/>
+          </a:xfrm>
+          <a:prstGeom prst="roundRect">
+            <a:avLst>
+              <a:gd name="adj" fmla="val 50000"/>
+            </a:avLst>
+          </a:prstGeom>
+          <a:solidFill>
+            <a:schemeClr val="bg1"/>
+          </a:solidFill>
+          <a:ln w="9525">
+            <a:solidFill>
+              <a:schemeClr val="accent3"/>
+            </a:solidFill>
+          </a:ln>
+        </p:spPr>
+        <p:txBody>
+          <a:bodyPr wrap="square" lIns="0" tIns="0" rIns="0" bIns="0" rtlCol="0" anchor="ctr"/>
+          <a:lstStyle/>
+          <a:p>
             <a:pPr algn="ctr" indent="0" marL="0">
               <a:buNone/>
             </a:pPr>
             <a:r>
-              <a:rPr lang="en-US" sz="1000" b="1" dirty="0">
-                <a:solidFill>
-                  <a:schemeClr val="accent1"/>
-                </a:solidFill>
-                <a:latin typeface="Malgun Gothic" pitchFamily="34" charset="0"/>
-                <a:ea typeface="Malgun Gothic" pitchFamily="34" charset="-122"/>
-                <a:cs typeface="Malgun Gothic" pitchFamily="34" charset="-120"/>
-              </a:rPr>
-              <a:t>직접 해보기</a:t>
+              <a:rPr lang="en-US" sz="1000" dirty="0">
+                <a:solidFill>
+                  <a:schemeClr val="tx1"/>
+                </a:solidFill>
+                <a:latin typeface="Malgun Gothic" pitchFamily="34" charset="0"/>
+                <a:ea typeface="Malgun Gothic" pitchFamily="34" charset="-122"/>
+                <a:cs typeface="Malgun Gothic" pitchFamily="34" charset="-120"/>
+              </a:rPr>
+              <a:t>서울·경기</a:t>
             </a:r>
             <a:endParaRPr lang="en-US" sz="1000" dirty="0"/>
           </a:p>
@@ -7465,30 +7834,85 @@
       </p:sp>
       <p:sp>
         <p:nvSpPr>
-          <p:cNvPr id="24" name="Text 21"/>
-          <p:cNvSpPr txBox="1"/>
-          <p:nvPr/>
-        </p:nvSpPr>
-        <p:spPr>
-          <a:xfrm>
-            <a:off x="3429000" y="1078992"/>
-            <a:ext cx="1965960" cy="274320"/>
-          </a:xfrm>
-          <a:prstGeom prst="rect">
-            <a:avLst/>
-          </a:prstGeom>
-          <a:noFill/>
-          <a:ln/>
+          <p:cNvPr id="32" name="Text 29"/>
+          <p:cNvSpPr/>
+          <p:nvPr/>
+        </p:nvSpPr>
+        <p:spPr>
+          <a:xfrm>
+            <a:off x="4636008" y="1673352"/>
+            <a:ext cx="475488" cy="219456"/>
+          </a:xfrm>
+          <a:prstGeom prst="roundRect">
+            <a:avLst>
+              <a:gd name="adj" fmla="val 50000"/>
+            </a:avLst>
+          </a:prstGeom>
+          <a:solidFill>
+            <a:schemeClr val="accent1"/>
+          </a:solidFill>
+          <a:ln w="9525">
+            <a:solidFill>
+              <a:schemeClr val="accent1"/>
+            </a:solidFill>
+          </a:ln>
         </p:spPr>
         <p:txBody>
           <a:bodyPr wrap="square" lIns="0" tIns="0" rIns="0" bIns="0" rtlCol="0" anchor="ctr"/>
           <a:lstStyle/>
           <a:p>
-            <a:pPr indent="0" marL="0">
-              <a:buNone/>
-            </a:pPr>
-            <a:r>
-              <a:rPr lang="en-US" sz="1400" b="1" dirty="0">
+            <a:pPr algn="ctr" indent="0" marL="0">
+              <a:buNone/>
+            </a:pPr>
+            <a:r>
+              <a:rPr lang="en-US" sz="1000" dirty="0">
+                <a:solidFill>
+                  <a:schemeClr val="bg1"/>
+                </a:solidFill>
+                <a:latin typeface="Malgun Gothic" pitchFamily="34" charset="0"/>
+                <a:ea typeface="Malgun Gothic" pitchFamily="34" charset="-122"/>
+                <a:cs typeface="Malgun Gothic" pitchFamily="34" charset="-120"/>
+              </a:rPr>
+              <a:t>경상</a:t>
+            </a:r>
+            <a:endParaRPr lang="en-US" sz="1000" dirty="0"/>
+          </a:p>
+        </p:txBody>
+      </p:sp>
+      <p:sp>
+        <p:nvSpPr>
+          <p:cNvPr id="33" name="Text 30"/>
+          <p:cNvSpPr/>
+          <p:nvPr/>
+        </p:nvSpPr>
+        <p:spPr>
+          <a:xfrm>
+            <a:off x="5166360" y="1673352"/>
+            <a:ext cx="475488" cy="219456"/>
+          </a:xfrm>
+          <a:prstGeom prst="roundRect">
+            <a:avLst>
+              <a:gd name="adj" fmla="val 50000"/>
+            </a:avLst>
+          </a:prstGeom>
+          <a:solidFill>
+            <a:schemeClr val="bg1"/>
+          </a:solidFill>
+          <a:ln w="9525">
+            <a:solidFill>
+              <a:schemeClr val="accent3"/>
+            </a:solidFill>
+          </a:ln>
+        </p:spPr>
+        <p:txBody>
+          <a:bodyPr wrap="square" lIns="0" tIns="0" rIns="0" bIns="0" rtlCol="0" anchor="ctr"/>
+          <a:lstStyle/>
+          <a:p>
+            <a:pPr algn="ctr" indent="0" marL="0">
+              <a:buNone/>
+            </a:pPr>
+            <a:r>
+              <a:rPr lang="en-US" sz="1000" dirty="0">
                 <a:solidFill>
                   <a:schemeClr val="tx1"/>
                 </a:solidFill>
@@ -7496,22 +7920,116 @@
                 <a:ea typeface="Malgun Gothic" pitchFamily="34" charset="-122"/>
                 <a:cs typeface="Malgun Gothic" pitchFamily="34" charset="-120"/>
               </a:rPr>
-              <a:t>라면</a:t>
-            </a:r>
-            <a:endParaRPr lang="en-US" sz="1400" dirty="0"/>
-          </a:p>
-        </p:txBody>
-      </p:sp>
-      <p:sp>
-        <p:nvSpPr>
-          <p:cNvPr id="25" name="Shape 22"/>
-          <p:cNvSpPr/>
-          <p:nvPr/>
-        </p:nvSpPr>
-        <p:spPr>
-          <a:xfrm>
-            <a:off x="3429000" y="1426464"/>
-            <a:ext cx="1965960" cy="914400"/>
+              <a:t>전라</a:t>
+            </a:r>
+            <a:endParaRPr lang="en-US" sz="1000" dirty="0"/>
+          </a:p>
+        </p:txBody>
+      </p:sp>
+      <p:sp>
+        <p:nvSpPr>
+          <p:cNvPr id="34" name="Text 31"/>
+          <p:cNvSpPr/>
+          <p:nvPr/>
+        </p:nvSpPr>
+        <p:spPr>
+          <a:xfrm>
+            <a:off x="3794760" y="1947672"/>
+            <a:ext cx="475488" cy="219456"/>
+          </a:xfrm>
+          <a:prstGeom prst="roundRect">
+            <a:avLst>
+              <a:gd name="adj" fmla="val 50000"/>
+            </a:avLst>
+          </a:prstGeom>
+          <a:solidFill>
+            <a:schemeClr val="bg1"/>
+          </a:solidFill>
+          <a:ln w="9525">
+            <a:solidFill>
+              <a:schemeClr val="accent3"/>
+            </a:solidFill>
+          </a:ln>
+        </p:spPr>
+        <p:txBody>
+          <a:bodyPr wrap="square" lIns="0" tIns="0" rIns="0" bIns="0" rtlCol="0" anchor="ctr"/>
+          <a:lstStyle/>
+          <a:p>
+            <a:pPr algn="ctr" indent="0" marL="0">
+              <a:buNone/>
+            </a:pPr>
+            <a:r>
+              <a:rPr lang="en-US" sz="1000" dirty="0">
+                <a:solidFill>
+                  <a:schemeClr val="tx1"/>
+                </a:solidFill>
+                <a:latin typeface="Malgun Gothic" pitchFamily="34" charset="0"/>
+                <a:ea typeface="Malgun Gothic" pitchFamily="34" charset="-122"/>
+                <a:cs typeface="Malgun Gothic" pitchFamily="34" charset="-120"/>
+              </a:rPr>
+              <a:t>충청</a:t>
+            </a:r>
+            <a:endParaRPr lang="en-US" sz="1000" dirty="0"/>
+          </a:p>
+        </p:txBody>
+      </p:sp>
+      <p:sp>
+        <p:nvSpPr>
+          <p:cNvPr id="35" name="Text 32"/>
+          <p:cNvSpPr/>
+          <p:nvPr/>
+        </p:nvSpPr>
+        <p:spPr>
+          <a:xfrm>
+            <a:off x="4325112" y="1947672"/>
+            <a:ext cx="475488" cy="219456"/>
+          </a:xfrm>
+          <a:prstGeom prst="roundRect">
+            <a:avLst>
+              <a:gd name="adj" fmla="val 50000"/>
+            </a:avLst>
+          </a:prstGeom>
+          <a:solidFill>
+            <a:schemeClr val="bg1"/>
+          </a:solidFill>
+          <a:ln w="9525">
+            <a:solidFill>
+              <a:schemeClr val="accent3"/>
+            </a:solidFill>
+          </a:ln>
+        </p:spPr>
+        <p:txBody>
+          <a:bodyPr wrap="square" lIns="0" tIns="0" rIns="0" bIns="0" rtlCol="0" anchor="ctr"/>
+          <a:lstStyle/>
+          <a:p>
+            <a:pPr algn="ctr" indent="0" marL="0">
+              <a:buNone/>
+            </a:pPr>
+            <a:r>
+              <a:rPr lang="en-US" sz="1000" dirty="0">
+                <a:solidFill>
+                  <a:schemeClr val="tx1"/>
+                </a:solidFill>
+                <a:latin typeface="Malgun Gothic" pitchFamily="34" charset="0"/>
+                <a:ea typeface="Malgun Gothic" pitchFamily="34" charset="-122"/>
+                <a:cs typeface="Malgun Gothic" pitchFamily="34" charset="-120"/>
+              </a:rPr>
+              <a:t>제주</a:t>
+            </a:r>
+            <a:endParaRPr lang="en-US" sz="1000" dirty="0"/>
+          </a:p>
+        </p:txBody>
+      </p:sp>
+      <p:sp>
+        <p:nvSpPr>
+          <p:cNvPr id="36" name="Shape 33"/>
+          <p:cNvSpPr/>
+          <p:nvPr/>
+        </p:nvSpPr>
+        <p:spPr>
+          <a:xfrm>
+            <a:off x="3794760" y="2267712"/>
+            <a:ext cx="1965960" cy="685800"/>
           </a:xfrm>
           <a:prstGeom prst="rect">
             <a:avLst/>
@@ -7529,14 +8047,14 @@
       </p:sp>
       <p:sp>
         <p:nvSpPr>
-          <p:cNvPr id="26" name="Shape 23"/>
-          <p:cNvSpPr/>
-          <p:nvPr/>
-        </p:nvSpPr>
-        <p:spPr>
-          <a:xfrm>
-            <a:off x="3429000" y="1426464"/>
-            <a:ext cx="1965960" cy="914400"/>
+          <p:cNvPr id="37" name="Shape 34"/>
+          <p:cNvSpPr/>
+          <p:nvPr/>
+        </p:nvSpPr>
+        <p:spPr>
+          <a:xfrm>
+            <a:off x="3794760" y="2267712"/>
+            <a:ext cx="1965960" cy="685800"/>
           </a:xfrm>
           <a:prstGeom prst="line">
             <a:avLst/>
@@ -7552,14 +8070,14 @@
       </p:sp>
       <p:sp>
         <p:nvSpPr>
-          <p:cNvPr id="27" name="Shape 24"/>
-          <p:cNvSpPr/>
-          <p:nvPr/>
-        </p:nvSpPr>
-        <p:spPr>
-          <a:xfrm>
-            <a:off x="3429000" y="2340864"/>
-            <a:ext cx="1965960" cy="-914400"/>
+          <p:cNvPr id="38" name="Shape 35"/>
+          <p:cNvSpPr/>
+          <p:nvPr/>
+        </p:nvSpPr>
+        <p:spPr>
+          <a:xfrm>
+            <a:off x="3794760" y="2953512"/>
+            <a:ext cx="1965960" cy="-685800"/>
           </a:xfrm>
           <a:prstGeom prst="line">
             <a:avLst/>
@@ -7575,13 +8093,13 @@
       </p:sp>
       <p:sp>
         <p:nvSpPr>
-          <p:cNvPr id="28" name="Text 25"/>
+          <p:cNvPr id="39" name="Text 36"/>
           <p:cNvSpPr txBox="1"/>
           <p:nvPr/>
         </p:nvSpPr>
         <p:spPr>
           <a:xfrm>
-            <a:off x="3429000" y="1764792"/>
+            <a:off x="3794760" y="2491740"/>
             <a:ext cx="1965960" cy="237744"/>
           </a:xfrm>
           <a:prstGeom prst="rect">
@@ -7608,7 +8126,7 @@
                 <a:ea typeface="Malgun Gothic" pitchFamily="34" charset="-122"/>
                 <a:cs typeface="Malgun Gothic" pitchFamily="34" charset="-120"/>
               </a:rPr>
-              <a:t>사전 영상 (출처)</a:t>
+              <a:t>표준 수어 영상</a:t>
             </a:r>
             <a:endParaRPr lang="en-US" sz="1000" dirty="0"/>
           </a:p>
@@ -7616,14 +8134,14 @@
       </p:sp>
       <p:sp>
         <p:nvSpPr>
-          <p:cNvPr id="29" name="Shape 26"/>
-          <p:cNvSpPr/>
-          <p:nvPr/>
-        </p:nvSpPr>
-        <p:spPr>
-          <a:xfrm>
-            <a:off x="3429000" y="2432304"/>
-            <a:ext cx="1965960" cy="1051560"/>
+          <p:cNvPr id="40" name="Shape 37"/>
+          <p:cNvSpPr/>
+          <p:nvPr/>
+        </p:nvSpPr>
+        <p:spPr>
+          <a:xfrm>
+            <a:off x="3794760" y="3026664"/>
+            <a:ext cx="1965960" cy="685800"/>
           </a:xfrm>
           <a:prstGeom prst="rect">
             <a:avLst/>
@@ -7641,14 +8159,14 @@
       </p:sp>
       <p:sp>
         <p:nvSpPr>
-          <p:cNvPr id="30" name="Shape 27"/>
-          <p:cNvSpPr/>
-          <p:nvPr/>
-        </p:nvSpPr>
-        <p:spPr>
-          <a:xfrm>
-            <a:off x="3429000" y="2432304"/>
-            <a:ext cx="1965960" cy="1051560"/>
+          <p:cNvPr id="41" name="Shape 38"/>
+          <p:cNvSpPr/>
+          <p:nvPr/>
+        </p:nvSpPr>
+        <p:spPr>
+          <a:xfrm>
+            <a:off x="3794760" y="3026664"/>
+            <a:ext cx="1965960" cy="685800"/>
           </a:xfrm>
           <a:prstGeom prst="line">
             <a:avLst/>
@@ -7664,14 +8182,14 @@
       </p:sp>
       <p:sp>
         <p:nvSpPr>
-          <p:cNvPr id="31" name="Shape 28"/>
-          <p:cNvSpPr/>
-          <p:nvPr/>
-        </p:nvSpPr>
-        <p:spPr>
-          <a:xfrm>
-            <a:off x="3429000" y="3483864"/>
-            <a:ext cx="1965960" cy="-1051560"/>
+          <p:cNvPr id="42" name="Shape 39"/>
+          <p:cNvSpPr/>
+          <p:nvPr/>
+        </p:nvSpPr>
+        <p:spPr>
+          <a:xfrm>
+            <a:off x="3794760" y="3712464"/>
+            <a:ext cx="1965960" cy="-685800"/>
           </a:xfrm>
           <a:prstGeom prst="line">
             <a:avLst/>
@@ -7687,13 +8205,13 @@
       </p:sp>
       <p:sp>
         <p:nvSpPr>
-          <p:cNvPr id="32" name="Text 29"/>
+          <p:cNvPr id="43" name="Text 40"/>
           <p:cNvSpPr txBox="1"/>
           <p:nvPr/>
         </p:nvSpPr>
         <p:spPr>
           <a:xfrm>
-            <a:off x="3429000" y="2839212"/>
+            <a:off x="3794760" y="3250692"/>
             <a:ext cx="1965960" cy="237744"/>
           </a:xfrm>
           <a:prstGeom prst="rect">
@@ -7720,7 +8238,7 @@
                 <a:ea typeface="Malgun Gothic" pitchFamily="34" charset="-122"/>
                 <a:cs typeface="Malgun Gothic" pitchFamily="34" charset="-120"/>
               </a:rPr>
-              <a:t>내 카메라 + 손 좌표 점</a:t>
+              <a:t>경상(부산) 수어 영상</a:t>
             </a:r>
             <a:endParaRPr lang="en-US" sz="1000" dirty="0"/>
           </a:p>
@@ -7728,13 +8246,13 @@
       </p:sp>
       <p:sp>
         <p:nvSpPr>
-          <p:cNvPr id="33" name="Text 30"/>
+          <p:cNvPr id="44" name="Text 41"/>
           <p:cNvSpPr txBox="1"/>
           <p:nvPr/>
         </p:nvSpPr>
         <p:spPr>
           <a:xfrm>
-            <a:off x="3429000" y="3529584"/>
+            <a:off x="3794760" y="3758184"/>
             <a:ext cx="1965960" cy="219456"/>
           </a:xfrm>
           <a:prstGeom prst="rect">
@@ -7759,7 +8277,7 @@
                 <a:ea typeface="Malgun Gothic" pitchFamily="34" charset="-122"/>
                 <a:cs typeface="Malgun Gothic" pitchFamily="34" charset="-120"/>
               </a:rPr>
-              <a:t>영상은 기기 안에서만 처리돼요</a:t>
+              <a:t>근거: 경인일보 2013.11.08</a:t>
             </a:r>
             <a:endParaRPr lang="en-US" sz="1000" dirty="0"/>
           </a:p>
@@ -7767,382 +8285,57 @@
       </p:sp>
       <p:sp>
         <p:nvSpPr>
-          <p:cNvPr id="34" name="Text 31"/>
-          <p:cNvSpPr/>
-          <p:nvPr/>
-        </p:nvSpPr>
-        <p:spPr>
-          <a:xfrm>
-            <a:off x="3429000" y="3822192"/>
-            <a:ext cx="1965960" cy="347472"/>
+          <p:cNvPr id="45" name="Text 42"/>
+          <p:cNvSpPr txBox="1"/>
+          <p:nvPr/>
+        </p:nvSpPr>
+        <p:spPr>
+          <a:xfrm>
+            <a:off x="3794760" y="3959352"/>
+            <a:ext cx="1965960" cy="219456"/>
+          </a:xfrm>
+          <a:prstGeom prst="rect">
+            <a:avLst/>
+          </a:prstGeom>
+          <a:noFill/>
+          <a:ln/>
+        </p:spPr>
+        <p:txBody>
+          <a:bodyPr wrap="square" lIns="0" tIns="0" rIns="0" bIns="0" rtlCol="0" anchor="ctr"/>
+          <a:lstStyle/>
+          <a:p>
+            <a:pPr indent="0" marL="0">
+              <a:buNone/>
+            </a:pPr>
+            <a:r>
+              <a:rPr lang="en-US" sz="1000" dirty="0">
+                <a:solidFill>
+                  <a:schemeClr val="tx2"/>
+                </a:solidFill>
+                <a:latin typeface="Malgun Gothic" pitchFamily="34" charset="0"/>
+                <a:ea typeface="Malgun Gothic" pitchFamily="34" charset="-122"/>
+                <a:cs typeface="Malgun Gothic" pitchFamily="34" charset="-120"/>
+              </a:rPr>
+              <a:t>영상: 팀 촬영 (사전 영상 참고)</a:t>
+            </a:r>
+            <a:endParaRPr lang="en-US" sz="1000" dirty="0"/>
+          </a:p>
+        </p:txBody>
+      </p:sp>
+      <p:sp>
+        <p:nvSpPr>
+          <p:cNvPr id="46" name="Shape 43"/>
+          <p:cNvSpPr/>
+          <p:nvPr/>
+        </p:nvSpPr>
+        <p:spPr>
+          <a:xfrm>
+            <a:off x="6446520" y="914400"/>
+            <a:ext cx="2240280" cy="3886200"/>
           </a:xfrm>
           <a:prstGeom prst="roundRect">
             <a:avLst>
-              <a:gd name="adj" fmla="val 15789"/>
-            </a:avLst>
-          </a:prstGeom>
-          <a:solidFill>
-            <a:schemeClr val="accent1"/>
-          </a:solidFill>
-          <a:ln w="9525">
-            <a:solidFill>
-              <a:schemeClr val="accent1"/>
-            </a:solidFill>
-          </a:ln>
-        </p:spPr>
-        <p:txBody>
-          <a:bodyPr wrap="square" lIns="0" tIns="0" rIns="0" bIns="0" rtlCol="0" anchor="ctr"/>
-          <a:lstStyle/>
-          <a:p>
-            <a:pPr algn="ctr" indent="0" marL="0">
-              <a:buNone/>
-            </a:pPr>
-            <a:r>
-              <a:rPr lang="en-US" sz="1000" b="1" dirty="0">
-                <a:solidFill>
-                  <a:schemeClr val="bg1"/>
-                </a:solidFill>
-                <a:latin typeface="Malgun Gothic" pitchFamily="34" charset="0"/>
-                <a:ea typeface="Malgun Gothic" pitchFamily="34" charset="-122"/>
-                <a:cs typeface="Malgun Gothic" pitchFamily="34" charset="-120"/>
-              </a:rPr>
-              <a:t>● 동작 기록 (3초)</a:t>
-            </a:r>
-            <a:endParaRPr lang="en-US" sz="1000" dirty="0"/>
-          </a:p>
-        </p:txBody>
-      </p:sp>
-      <p:sp>
-        <p:nvSpPr>
-          <p:cNvPr id="35" name="Shape 32"/>
-          <p:cNvSpPr/>
-          <p:nvPr/>
-        </p:nvSpPr>
-        <p:spPr>
-          <a:xfrm>
-            <a:off x="5641848" y="2651760"/>
-            <a:ext cx="274320" cy="274320"/>
-          </a:xfrm>
-          <a:prstGeom prst="rightArrow">
-            <a:avLst/>
-          </a:prstGeom>
-          <a:solidFill>
-            <a:schemeClr val="accent2"/>
-          </a:solidFill>
-          <a:ln w="12700">
-            <a:solidFill>
-              <a:schemeClr val="accent2"/>
-            </a:solidFill>
-            <a:prstDash val="solid"/>
-          </a:ln>
-        </p:spPr>
-      </p:sp>
-      <p:sp>
-        <p:nvSpPr>
-          <p:cNvPr id="36" name="Shape 33"/>
-          <p:cNvSpPr/>
-          <p:nvPr/>
-        </p:nvSpPr>
-        <p:spPr>
-          <a:xfrm>
-            <a:off x="6126480" y="914400"/>
-            <a:ext cx="2240280" cy="3886200"/>
-          </a:xfrm>
-          <a:prstGeom prst="roundRect">
-            <a:avLst>
-              <a:gd name="adj" fmla="val 8163"/>
-            </a:avLst>
-          </a:prstGeom>
-          <a:solidFill>
-            <a:schemeClr val="bg1"/>
-          </a:solidFill>
-          <a:ln w="19050">
-            <a:solidFill>
-              <a:schemeClr val="tx1"/>
-            </a:solidFill>
-            <a:prstDash val="solid"/>
-          </a:ln>
-        </p:spPr>
-      </p:sp>
-      <p:sp>
-        <p:nvSpPr>
-          <p:cNvPr id="37" name="Text 34"/>
-          <p:cNvSpPr txBox="1"/>
-          <p:nvPr/>
-        </p:nvSpPr>
-        <p:spPr>
-          <a:xfrm>
-            <a:off x="6126480" y="4846320"/>
-            <a:ext cx="2240280" cy="228600"/>
-          </a:xfrm>
-          <a:prstGeom prst="rect">
-            <a:avLst/>
-          </a:prstGeom>
-          <a:noFill/>
-          <a:ln/>
-        </p:spPr>
-        <p:txBody>
-          <a:bodyPr wrap="square" lIns="0" tIns="0" rIns="0" bIns="0" rtlCol="0" anchor="t"/>
-          <a:lstStyle/>
-          <a:p>
-            <a:pPr algn="ctr" indent="0" marL="0">
-              <a:buNone/>
-            </a:pPr>
-            <a:r>
-              <a:rPr lang="en-US" sz="1100" b="1" dirty="0">
-                <a:solidFill>
-                  <a:schemeClr val="tx2"/>
-                </a:solidFill>
-                <a:latin typeface="Malgun Gothic" pitchFamily="34" charset="0"/>
-                <a:ea typeface="Malgun Gothic" pitchFamily="34" charset="-122"/>
-                <a:cs typeface="Malgun Gothic" pitchFamily="34" charset="-120"/>
-              </a:rPr>
-              <a:t>3 결과 · 사용자가 선택</a:t>
-            </a:r>
-            <a:endParaRPr lang="en-US" sz="1100" dirty="0"/>
-          </a:p>
-        </p:txBody>
-      </p:sp>
-      <p:sp>
-        <p:nvSpPr>
-          <p:cNvPr id="38" name="Shape 35"/>
-          <p:cNvSpPr/>
-          <p:nvPr/>
-        </p:nvSpPr>
-        <p:spPr>
-          <a:xfrm>
-            <a:off x="6126480" y="4389120"/>
-            <a:ext cx="2240280" cy="0"/>
-          </a:xfrm>
-          <a:prstGeom prst="line">
-            <a:avLst/>
-          </a:prstGeom>
-          <a:noFill/>
-          <a:ln w="9525">
-            <a:solidFill>
-              <a:schemeClr val="accent3"/>
-            </a:solidFill>
-            <a:prstDash val="solid"/>
-          </a:ln>
-        </p:spPr>
-      </p:sp>
-      <p:sp>
-        <p:nvSpPr>
-          <p:cNvPr id="39" name="Text 36"/>
-          <p:cNvSpPr txBox="1"/>
-          <p:nvPr/>
-        </p:nvSpPr>
-        <p:spPr>
-          <a:xfrm>
-            <a:off x="6172200" y="4462272"/>
-            <a:ext cx="716280" cy="228600"/>
-          </a:xfrm>
-          <a:prstGeom prst="rect">
-            <a:avLst/>
-          </a:prstGeom>
-          <a:noFill/>
-          <a:ln/>
-        </p:spPr>
-        <p:txBody>
-          <a:bodyPr wrap="square" lIns="0" tIns="0" rIns="0" bIns="0" rtlCol="0" anchor="ctr"/>
-          <a:lstStyle/>
-          <a:p>
-            <a:pPr algn="ctr" indent="0" marL="0">
-              <a:buNone/>
-            </a:pPr>
-            <a:r>
-              <a:rPr lang="en-US" sz="1000" dirty="0">
-                <a:solidFill>
-                  <a:schemeClr val="tx2"/>
-                </a:solidFill>
-                <a:latin typeface="Malgun Gothic" pitchFamily="34" charset="0"/>
-                <a:ea typeface="Malgun Gothic" pitchFamily="34" charset="-122"/>
-                <a:cs typeface="Malgun Gothic" pitchFamily="34" charset="-120"/>
-              </a:rPr>
-              <a:t>검색</a:t>
-            </a:r>
-            <a:endParaRPr lang="en-US" sz="1000" dirty="0"/>
-          </a:p>
-        </p:txBody>
-      </p:sp>
-      <p:sp>
-        <p:nvSpPr>
-          <p:cNvPr id="40" name="Text 37"/>
-          <p:cNvSpPr txBox="1"/>
-          <p:nvPr/>
-        </p:nvSpPr>
-        <p:spPr>
-          <a:xfrm>
-            <a:off x="6888480" y="4462272"/>
-            <a:ext cx="716280" cy="228600"/>
-          </a:xfrm>
-          <a:prstGeom prst="rect">
-            <a:avLst/>
-          </a:prstGeom>
-          <a:noFill/>
-          <a:ln/>
-        </p:spPr>
-        <p:txBody>
-          <a:bodyPr wrap="square" lIns="0" tIns="0" rIns="0" bIns="0" rtlCol="0" anchor="ctr"/>
-          <a:lstStyle/>
-          <a:p>
-            <a:pPr algn="ctr" indent="0" marL="0">
-              <a:buNone/>
-            </a:pPr>
-            <a:r>
-              <a:rPr lang="en-US" sz="1000" dirty="0">
-                <a:solidFill>
-                  <a:schemeClr val="tx2"/>
-                </a:solidFill>
-                <a:latin typeface="Malgun Gothic" pitchFamily="34" charset="0"/>
-                <a:ea typeface="Malgun Gothic" pitchFamily="34" charset="-122"/>
-                <a:cs typeface="Malgun Gothic" pitchFamily="34" charset="-120"/>
-              </a:rPr>
-              <a:t>학습하기</a:t>
-            </a:r>
-            <a:endParaRPr lang="en-US" sz="1000" dirty="0"/>
-          </a:p>
-        </p:txBody>
-      </p:sp>
-      <p:sp>
-        <p:nvSpPr>
-          <p:cNvPr id="41" name="Text 38"/>
-          <p:cNvSpPr txBox="1"/>
-          <p:nvPr/>
-        </p:nvSpPr>
-        <p:spPr>
-          <a:xfrm>
-            <a:off x="7604760" y="4462272"/>
-            <a:ext cx="716280" cy="228600"/>
-          </a:xfrm>
-          <a:prstGeom prst="rect">
-            <a:avLst/>
-          </a:prstGeom>
-          <a:noFill/>
-          <a:ln/>
-        </p:spPr>
-        <p:txBody>
-          <a:bodyPr wrap="square" lIns="0" tIns="0" rIns="0" bIns="0" rtlCol="0" anchor="ctr"/>
-          <a:lstStyle/>
-          <a:p>
-            <a:pPr algn="ctr" indent="0" marL="0">
-              <a:buNone/>
-            </a:pPr>
-            <a:r>
-              <a:rPr lang="en-US" sz="1000" b="1" dirty="0">
-                <a:solidFill>
-                  <a:schemeClr val="accent1"/>
-                </a:solidFill>
-                <a:latin typeface="Malgun Gothic" pitchFamily="34" charset="0"/>
-                <a:ea typeface="Malgun Gothic" pitchFamily="34" charset="-122"/>
-                <a:cs typeface="Malgun Gothic" pitchFamily="34" charset="-120"/>
-              </a:rPr>
-              <a:t>직접 해보기</a:t>
-            </a:r>
-            <a:endParaRPr lang="en-US" sz="1000" dirty="0"/>
-          </a:p>
-        </p:txBody>
-      </p:sp>
-      <p:sp>
-        <p:nvSpPr>
-          <p:cNvPr id="42" name="Text 39"/>
-          <p:cNvSpPr txBox="1"/>
-          <p:nvPr/>
-        </p:nvSpPr>
-        <p:spPr>
-          <a:xfrm>
-            <a:off x="6263640" y="1078992"/>
-            <a:ext cx="1965960" cy="219456"/>
-          </a:xfrm>
-          <a:prstGeom prst="rect">
-            <a:avLst/>
-          </a:prstGeom>
-          <a:noFill/>
-          <a:ln/>
-        </p:spPr>
-        <p:txBody>
-          <a:bodyPr wrap="square" lIns="0" tIns="0" rIns="0" bIns="0" rtlCol="0" anchor="ctr"/>
-          <a:lstStyle/>
-          <a:p>
-            <a:pPr indent="0" marL="0">
-              <a:buNone/>
-            </a:pPr>
-            <a:r>
-              <a:rPr lang="en-US" sz="1000" b="1" dirty="0">
-                <a:solidFill>
-                  <a:schemeClr val="tx1"/>
-                </a:solidFill>
-                <a:latin typeface="Malgun Gothic" pitchFamily="34" charset="0"/>
-                <a:ea typeface="Malgun Gothic" pitchFamily="34" charset="-122"/>
-                <a:cs typeface="Malgun Gothic" pitchFamily="34" charset="-120"/>
-              </a:rPr>
-              <a:t>비슷해 보이는 동작 (AI 추정)</a:t>
-            </a:r>
-            <a:endParaRPr lang="en-US" sz="1000" dirty="0"/>
-          </a:p>
-        </p:txBody>
-      </p:sp>
-      <p:sp>
-        <p:nvSpPr>
-          <p:cNvPr id="43" name="Text 40"/>
-          <p:cNvSpPr/>
-          <p:nvPr/>
-        </p:nvSpPr>
-        <p:spPr>
-          <a:xfrm>
-            <a:off x="6263640" y="1371600"/>
-            <a:ext cx="731520" cy="219456"/>
-          </a:xfrm>
-          <a:prstGeom prst="roundRect">
-            <a:avLst>
-              <a:gd name="adj" fmla="val 50000"/>
-            </a:avLst>
-          </a:prstGeom>
-          <a:solidFill>
-            <a:schemeClr val="accent1"/>
-          </a:solidFill>
-          <a:ln w="9525">
-            <a:solidFill>
-              <a:schemeClr val="accent1"/>
-            </a:solidFill>
-          </a:ln>
-        </p:spPr>
-        <p:txBody>
-          <a:bodyPr wrap="square" lIns="0" tIns="0" rIns="0" bIns="0" rtlCol="0" anchor="ctr"/>
-          <a:lstStyle/>
-          <a:p>
-            <a:pPr algn="ctr" indent="0" marL="0">
-              <a:buNone/>
-            </a:pPr>
-            <a:r>
-              <a:rPr lang="en-US" sz="1000" dirty="0">
-                <a:solidFill>
-                  <a:schemeClr val="bg1"/>
-                </a:solidFill>
-                <a:latin typeface="Malgun Gothic" pitchFamily="34" charset="0"/>
-                <a:ea typeface="Malgun Gothic" pitchFamily="34" charset="-122"/>
-                <a:cs typeface="Malgun Gothic" pitchFamily="34" charset="-120"/>
-              </a:rPr>
-              <a:t>① 라면</a:t>
-            </a:r>
-            <a:endParaRPr lang="en-US" sz="1000" dirty="0"/>
-          </a:p>
-        </p:txBody>
-      </p:sp>
-      <p:sp>
-        <p:nvSpPr>
-          <p:cNvPr id="44" name="Text 41"/>
-          <p:cNvSpPr/>
-          <p:nvPr/>
-        </p:nvSpPr>
-        <p:spPr>
-          <a:xfrm>
-            <a:off x="7068312" y="1371600"/>
-            <a:ext cx="822960" cy="219456"/>
-          </a:xfrm>
-          <a:prstGeom prst="roundRect">
-            <a:avLst>
-              <a:gd name="adj" fmla="val 50000"/>
+              <a:gd name="adj" fmla="val 3265"/>
             </a:avLst>
           </a:prstGeom>
           <a:solidFill>
@@ -8152,100 +8345,48 @@
             <a:solidFill>
               <a:schemeClr val="accent3"/>
             </a:solidFill>
-          </a:ln>
-        </p:spPr>
-        <p:txBody>
-          <a:bodyPr wrap="square" lIns="0" tIns="0" rIns="0" bIns="0" rtlCol="0" anchor="ctr"/>
-          <a:lstStyle/>
-          <a:p>
-            <a:pPr algn="ctr" indent="0" marL="0">
-              <a:buNone/>
-            </a:pPr>
-            <a:r>
-              <a:rPr lang="en-US" sz="1000" dirty="0">
-                <a:solidFill>
-                  <a:schemeClr val="tx1"/>
-                </a:solidFill>
-                <a:latin typeface="Malgun Gothic" pitchFamily="34" charset="0"/>
-                <a:ea typeface="Malgun Gothic" pitchFamily="34" charset="-122"/>
-                <a:cs typeface="Malgun Gothic" pitchFamily="34" charset="-120"/>
-              </a:rPr>
-              <a:t>② 짜장면</a:t>
-            </a:r>
-            <a:endParaRPr lang="en-US" sz="1000" dirty="0"/>
-          </a:p>
-        </p:txBody>
-      </p:sp>
-      <p:sp>
-        <p:nvSpPr>
-          <p:cNvPr id="45" name="Shape 42"/>
-          <p:cNvSpPr/>
-          <p:nvPr/>
-        </p:nvSpPr>
-        <p:spPr>
-          <a:xfrm>
-            <a:off x="6263640" y="1719072"/>
-            <a:ext cx="946404" cy="1051560"/>
-          </a:xfrm>
-          <a:prstGeom prst="rect">
-            <a:avLst/>
-          </a:prstGeom>
-          <a:solidFill>
-            <a:schemeClr val="accent4"/>
-          </a:solidFill>
-          <a:ln w="9525">
-            <a:solidFill>
-              <a:schemeClr val="accent3"/>
-            </a:solidFill>
-            <a:prstDash val="dash"/>
-          </a:ln>
-        </p:spPr>
-      </p:sp>
-      <p:sp>
-        <p:nvSpPr>
-          <p:cNvPr id="46" name="Shape 43"/>
-          <p:cNvSpPr/>
-          <p:nvPr/>
-        </p:nvSpPr>
-        <p:spPr>
-          <a:xfrm>
-            <a:off x="6263640" y="1719072"/>
-            <a:ext cx="946404" cy="1051560"/>
-          </a:xfrm>
-          <a:prstGeom prst="line">
-            <a:avLst/>
-          </a:prstGeom>
-          <a:noFill/>
-          <a:ln w="6350">
-            <a:solidFill>
-              <a:schemeClr val="accent3"/>
-            </a:solidFill>
             <a:prstDash val="solid"/>
           </a:ln>
         </p:spPr>
       </p:sp>
       <p:sp>
         <p:nvSpPr>
-          <p:cNvPr id="47" name="Shape 44"/>
-          <p:cNvSpPr/>
-          <p:nvPr/>
-        </p:nvSpPr>
-        <p:spPr>
-          <a:xfrm>
-            <a:off x="6263640" y="2770632"/>
-            <a:ext cx="946404" cy="-1051560"/>
-          </a:xfrm>
-          <a:prstGeom prst="line">
-            <a:avLst/>
-          </a:prstGeom>
-          <a:noFill/>
-          <a:ln w="6350">
-            <a:solidFill>
-              <a:schemeClr val="accent3"/>
-            </a:solidFill>
-            <a:prstDash val="solid"/>
-          </a:ln>
-        </p:spPr>
+          <p:cNvPr id="47" name="Text 44"/>
+          <p:cNvSpPr txBox="1"/>
+          <p:nvPr/>
+        </p:nvSpPr>
+        <p:spPr>
+          <a:xfrm>
+            <a:off x="6629400" y="1097280"/>
+            <a:ext cx="1920240" cy="320040"/>
+          </a:xfrm>
+          <a:prstGeom prst="rect">
+            <a:avLst/>
+          </a:prstGeom>
+          <a:noFill/>
+          <a:ln/>
+        </p:spPr>
+        <p:txBody>
+          <a:bodyPr wrap="square" lIns="0" tIns="0" rIns="0" bIns="0" rtlCol="0" anchor="t"/>
+          <a:lstStyle/>
+          <a:p>
+            <a:pPr indent="0" marL="0">
+              <a:buNone/>
+            </a:pPr>
+            <a:r>
+              <a:rPr lang="en-US" sz="1400" b="1" dirty="0">
+                <a:solidFill>
+                  <a:schemeClr val="tx1"/>
+                </a:solidFill>
+                <a:latin typeface="Malgun Gothic" pitchFamily="34" charset="0"/>
+                <a:ea typeface="Malgun Gothic" pitchFamily="34" charset="-122"/>
+                <a:cs typeface="Malgun Gothic" pitchFamily="34" charset="-120"/>
+              </a:rPr>
+              <a:t>이 화면에서</a:t>
+            </a:r>
+            <a:endParaRPr lang="en-US" sz="1400" dirty="0"/>
+          </a:p>
+        </p:txBody>
       </p:sp>
       <p:sp>
         <p:nvSpPr>
@@ -8255,271 +8396,28 @@
         </p:nvSpPr>
         <p:spPr>
           <a:xfrm>
-            <a:off x="6263640" y="2125980"/>
-            <a:ext cx="946404" cy="237744"/>
-          </a:xfrm>
-          <a:prstGeom prst="rect">
-            <a:avLst/>
-          </a:prstGeom>
-          <a:solidFill>
-            <a:schemeClr val="accent4"/>
-          </a:solidFill>
+            <a:off x="6629400" y="1508760"/>
+            <a:ext cx="1920240" cy="3108960"/>
+          </a:xfrm>
+          <a:prstGeom prst="rect">
+            <a:avLst/>
+          </a:prstGeom>
+          <a:noFill/>
           <a:ln/>
         </p:spPr>
         <p:txBody>
           <a:bodyPr wrap="square" lIns="0" tIns="0" rIns="0" bIns="0" rtlCol="0" anchor="t"/>
           <a:lstStyle/>
           <a:p>
-            <a:pPr algn="ctr" indent="0" marL="0">
-              <a:buNone/>
-            </a:pPr>
-            <a:r>
-              <a:rPr lang="en-US" sz="1000" dirty="0">
-                <a:solidFill>
-                  <a:schemeClr val="tx2"/>
-                </a:solidFill>
-                <a:latin typeface="Malgun Gothic" pitchFamily="34" charset="0"/>
-                <a:ea typeface="Malgun Gothic" pitchFamily="34" charset="-122"/>
-                <a:cs typeface="Malgun Gothic" pitchFamily="34" charset="-120"/>
-              </a:rPr>
-              <a:t>내 동작</a:t>
-            </a:r>
-            <a:endParaRPr lang="en-US" sz="1000" dirty="0"/>
-          </a:p>
-        </p:txBody>
-      </p:sp>
-      <p:sp>
-        <p:nvSpPr>
-          <p:cNvPr id="49" name="Shape 46"/>
-          <p:cNvSpPr/>
-          <p:nvPr/>
-        </p:nvSpPr>
-        <p:spPr>
-          <a:xfrm>
-            <a:off x="7283196" y="1719072"/>
-            <a:ext cx="946404" cy="1051560"/>
-          </a:xfrm>
-          <a:prstGeom prst="rect">
-            <a:avLst/>
-          </a:prstGeom>
-          <a:solidFill>
-            <a:schemeClr val="accent4"/>
-          </a:solidFill>
-          <a:ln w="9525">
-            <a:solidFill>
-              <a:schemeClr val="accent3"/>
-            </a:solidFill>
-            <a:prstDash val="dash"/>
-          </a:ln>
-        </p:spPr>
-      </p:sp>
-      <p:sp>
-        <p:nvSpPr>
-          <p:cNvPr id="50" name="Shape 47"/>
-          <p:cNvSpPr/>
-          <p:nvPr/>
-        </p:nvSpPr>
-        <p:spPr>
-          <a:xfrm>
-            <a:off x="7283196" y="1719072"/>
-            <a:ext cx="946404" cy="1051560"/>
-          </a:xfrm>
-          <a:prstGeom prst="line">
-            <a:avLst/>
-          </a:prstGeom>
-          <a:noFill/>
-          <a:ln w="6350">
-            <a:solidFill>
-              <a:schemeClr val="accent3"/>
-            </a:solidFill>
-            <a:prstDash val="solid"/>
-          </a:ln>
-        </p:spPr>
-      </p:sp>
-      <p:sp>
-        <p:nvSpPr>
-          <p:cNvPr id="51" name="Shape 48"/>
-          <p:cNvSpPr/>
-          <p:nvPr/>
-        </p:nvSpPr>
-        <p:spPr>
-          <a:xfrm>
-            <a:off x="7283196" y="2770632"/>
-            <a:ext cx="946404" cy="-1051560"/>
-          </a:xfrm>
-          <a:prstGeom prst="line">
-            <a:avLst/>
-          </a:prstGeom>
-          <a:noFill/>
-          <a:ln w="6350">
-            <a:solidFill>
-              <a:schemeClr val="accent3"/>
-            </a:solidFill>
-            <a:prstDash val="solid"/>
-          </a:ln>
-        </p:spPr>
-      </p:sp>
-      <p:sp>
-        <p:nvSpPr>
-          <p:cNvPr id="52" name="Text 49"/>
-          <p:cNvSpPr txBox="1"/>
-          <p:nvPr/>
-        </p:nvSpPr>
-        <p:spPr>
-          <a:xfrm>
-            <a:off x="7283196" y="2125980"/>
-            <a:ext cx="946404" cy="237744"/>
-          </a:xfrm>
-          <a:prstGeom prst="rect">
-            <a:avLst/>
-          </a:prstGeom>
-          <a:solidFill>
-            <a:schemeClr val="accent4"/>
-          </a:solidFill>
-          <a:ln/>
-        </p:spPr>
-        <p:txBody>
-          <a:bodyPr wrap="square" lIns="0" tIns="0" rIns="0" bIns="0" rtlCol="0" anchor="t"/>
-          <a:lstStyle/>
-          <a:p>
-            <a:pPr algn="ctr" indent="0" marL="0">
-              <a:buNone/>
-            </a:pPr>
-            <a:r>
-              <a:rPr lang="en-US" sz="1000" dirty="0">
-                <a:solidFill>
-                  <a:schemeClr val="tx2"/>
-                </a:solidFill>
-                <a:latin typeface="Malgun Gothic" pitchFamily="34" charset="0"/>
-                <a:ea typeface="Malgun Gothic" pitchFamily="34" charset="-122"/>
-                <a:cs typeface="Malgun Gothic" pitchFamily="34" charset="-120"/>
-              </a:rPr>
-              <a:t>사전 영상</a:t>
-            </a:r>
-            <a:endParaRPr lang="en-US" sz="1000" dirty="0"/>
-          </a:p>
-        </p:txBody>
-      </p:sp>
-      <p:sp>
-        <p:nvSpPr>
-          <p:cNvPr id="53" name="Text 50"/>
-          <p:cNvSpPr txBox="1"/>
-          <p:nvPr/>
-        </p:nvSpPr>
-        <p:spPr>
-          <a:xfrm>
-            <a:off x="6263640" y="2816352"/>
-            <a:ext cx="1965960" cy="219456"/>
-          </a:xfrm>
-          <a:prstGeom prst="rect">
-            <a:avLst/>
-          </a:prstGeom>
-          <a:noFill/>
-          <a:ln/>
-        </p:spPr>
-        <p:txBody>
-          <a:bodyPr wrap="square" lIns="0" tIns="0" rIns="0" bIns="0" rtlCol="0" anchor="ctr"/>
-          <a:lstStyle/>
-          <a:p>
-            <a:pPr indent="0" marL="0">
-              <a:buNone/>
-            </a:pPr>
-            <a:r>
-              <a:rPr lang="en-US" sz="1000" dirty="0">
-                <a:solidFill>
-                  <a:schemeClr val="tx2"/>
-                </a:solidFill>
-                <a:latin typeface="Malgun Gothic" pitchFamily="34" charset="0"/>
-                <a:ea typeface="Malgun Gothic" pitchFamily="34" charset="-122"/>
-                <a:cs typeface="Malgun Gothic" pitchFamily="34" charset="-120"/>
-              </a:rPr>
-              <a:t>출처: 국립국어원 한국수어사전</a:t>
-            </a:r>
-            <a:endParaRPr lang="en-US" sz="1000" dirty="0"/>
-          </a:p>
-        </p:txBody>
-      </p:sp>
-      <p:sp>
-        <p:nvSpPr>
-          <p:cNvPr id="54" name="Text 51"/>
-          <p:cNvSpPr/>
-          <p:nvPr/>
-        </p:nvSpPr>
-        <p:spPr>
-          <a:xfrm>
-            <a:off x="6263640" y="3108960"/>
-            <a:ext cx="1965960" cy="310896"/>
-          </a:xfrm>
-          <a:prstGeom prst="roundRect">
-            <a:avLst>
-              <a:gd name="adj" fmla="val 17647"/>
-            </a:avLst>
-          </a:prstGeom>
-          <a:solidFill>
-            <a:schemeClr val="accent1"/>
-          </a:solidFill>
-          <a:ln w="9525">
-            <a:solidFill>
-              <a:schemeClr val="accent1"/>
-            </a:solidFill>
-          </a:ln>
-        </p:spPr>
-        <p:txBody>
-          <a:bodyPr wrap="square" lIns="0" tIns="0" rIns="0" bIns="0" rtlCol="0" anchor="ctr"/>
-          <a:lstStyle/>
-          <a:p>
-            <a:pPr algn="ctr" indent="0" marL="0">
-              <a:buNone/>
-            </a:pPr>
-            <a:r>
-              <a:rPr lang="en-US" sz="1000" b="1" dirty="0">
-                <a:solidFill>
-                  <a:schemeClr val="bg1"/>
-                </a:solidFill>
-                <a:latin typeface="Malgun Gothic" pitchFamily="34" charset="0"/>
-                <a:ea typeface="Malgun Gothic" pitchFamily="34" charset="-122"/>
-                <a:cs typeface="Malgun Gothic" pitchFamily="34" charset="-120"/>
-              </a:rPr>
-              <a:t>비슷하게 한 것 같아요</a:t>
-            </a:r>
-            <a:endParaRPr lang="en-US" sz="1000" dirty="0"/>
-          </a:p>
-        </p:txBody>
-      </p:sp>
-      <p:sp>
-        <p:nvSpPr>
-          <p:cNvPr id="55" name="Text 52"/>
-          <p:cNvSpPr/>
-          <p:nvPr/>
-        </p:nvSpPr>
-        <p:spPr>
-          <a:xfrm>
-            <a:off x="6263640" y="3493008"/>
-            <a:ext cx="1965960" cy="310896"/>
-          </a:xfrm>
-          <a:prstGeom prst="roundRect">
-            <a:avLst>
-              <a:gd name="adj" fmla="val 17647"/>
-            </a:avLst>
-          </a:prstGeom>
-          <a:solidFill>
-            <a:schemeClr val="bg1"/>
-          </a:solidFill>
-          <a:ln w="9525">
-            <a:solidFill>
-              <a:schemeClr val="accent3"/>
-            </a:solidFill>
-          </a:ln>
-        </p:spPr>
-        <p:txBody>
-          <a:bodyPr wrap="square" lIns="0" tIns="0" rIns="0" bIns="0" rtlCol="0" anchor="ctr"/>
-          <a:lstStyle/>
-          <a:p>
-            <a:pPr algn="ctr" indent="0" marL="0">
-              <a:buNone/>
-            </a:pPr>
-            <a:r>
-              <a:rPr lang="en-US" sz="1000" dirty="0">
+            <a:pPr marL="342900" indent="-342900">
+              <a:spcAft>
+                <a:spcPts val="800"/>
+              </a:spcAft>
+              <a:buSzPct val="100000"/>
+              <a:buChar char="•"/>
+            </a:pPr>
+            <a:r>
+              <a:rPr lang="en-US" sz="1200" dirty="0">
                 <a:solidFill>
                   <a:schemeClr val="tx1"/>
                 </a:solidFill>
@@ -8527,46 +8425,20 @@
                 <a:ea typeface="Malgun Gothic" pitchFamily="34" charset="-122"/>
                 <a:cs typeface="Malgun Gothic" pitchFamily="34" charset="-120"/>
               </a:rPr>
-              <a:t>다시 해볼래요</a:t>
-            </a:r>
-            <a:endParaRPr lang="en-US" sz="1000" dirty="0"/>
-          </a:p>
-        </p:txBody>
-      </p:sp>
-      <p:sp>
-        <p:nvSpPr>
-          <p:cNvPr id="56" name="Text 53"/>
-          <p:cNvSpPr/>
-          <p:nvPr/>
-        </p:nvSpPr>
-        <p:spPr>
-          <a:xfrm>
-            <a:off x="6263640" y="3877056"/>
-            <a:ext cx="1965960" cy="310896"/>
-          </a:xfrm>
-          <a:prstGeom prst="roundRect">
-            <a:avLst>
-              <a:gd name="adj" fmla="val 17647"/>
-            </a:avLst>
-          </a:prstGeom>
-          <a:solidFill>
-            <a:schemeClr val="bg1"/>
-          </a:solidFill>
-          <a:ln w="9525">
-            <a:solidFill>
-              <a:schemeClr val="accent3"/>
-            </a:solidFill>
-          </a:ln>
-        </p:spPr>
-        <p:txBody>
-          <a:bodyPr wrap="square" lIns="0" tIns="0" rIns="0" bIns="0" rtlCol="0" anchor="ctr"/>
-          <a:lstStyle/>
-          <a:p>
-            <a:pPr algn="ctr" indent="0" marL="0">
-              <a:buNone/>
-            </a:pPr>
-            <a:r>
-              <a:rPr lang="en-US" sz="1000" dirty="0">
+              <a:t>검색 또는 카테고리로 단어 찾기</a:t>
+            </a:r>
+            <a:endParaRPr lang="en-US" sz="1200" dirty="0"/>
+          </a:p>
+          <a:p>
+            <a:pPr marL="342900" indent="-342900">
+              <a:spcAft>
+                <a:spcPts val="800"/>
+              </a:spcAft>
+              <a:buSzPct val="100000"/>
+              <a:buChar char="•"/>
+            </a:pPr>
+            <a:r>
+              <a:rPr lang="en-US" sz="1200" dirty="0">
                 <a:solidFill>
                   <a:schemeClr val="tx1"/>
                 </a:solidFill>
@@ -8574,9 +8446,51 @@
                 <a:ea typeface="Malgun Gothic" pitchFamily="34" charset="-122"/>
                 <a:cs typeface="Malgun Gothic" pitchFamily="34" charset="-120"/>
               </a:rPr>
-              <a:t>다른 동작 영상 보기</a:t>
-            </a:r>
-            <a:endParaRPr lang="en-US" sz="1000" dirty="0"/>
+              <a:t>지역 점(●)으로 어느 지역 표현이 있는지 표시</a:t>
+            </a:r>
+            <a:endParaRPr lang="en-US" sz="1200" dirty="0"/>
+          </a:p>
+          <a:p>
+            <a:pPr marL="342900" indent="-342900">
+              <a:spcAft>
+                <a:spcPts val="800"/>
+              </a:spcAft>
+              <a:buSzPct val="100000"/>
+              <a:buChar char="•"/>
+            </a:pPr>
+            <a:r>
+              <a:rPr lang="en-US" sz="1200" dirty="0">
+                <a:solidFill>
+                  <a:schemeClr val="tx1"/>
+                </a:solidFill>
+                <a:latin typeface="Malgun Gothic" pitchFamily="34" charset="0"/>
+                <a:ea typeface="Malgun Gothic" pitchFamily="34" charset="-122"/>
+                <a:cs typeface="Malgun Gothic" pitchFamily="34" charset="-120"/>
+              </a:rPr>
+              <a:t>지역 버튼을 누르면 아래 영상이 바뀜</a:t>
+            </a:r>
+            <a:endParaRPr lang="en-US" sz="1200" dirty="0"/>
+          </a:p>
+          <a:p>
+            <a:pPr marL="342900" indent="-342900">
+              <a:spcAft>
+                <a:spcPts val="800"/>
+              </a:spcAft>
+              <a:buSzPct val="100000"/>
+              <a:buChar char="•"/>
+            </a:pPr>
+            <a:r>
+              <a:rPr lang="en-US" sz="1200" dirty="0">
+                <a:solidFill>
+                  <a:schemeClr val="tx1"/>
+                </a:solidFill>
+                <a:latin typeface="Malgun Gothic" pitchFamily="34" charset="0"/>
+                <a:ea typeface="Malgun Gothic" pitchFamily="34" charset="-122"/>
+                <a:cs typeface="Malgun Gothic" pitchFamily="34" charset="-120"/>
+              </a:rPr>
+              <a:t>근거·출처 항상 표시</a:t>
+            </a:r>
+            <a:endParaRPr lang="en-US" sz="1200" dirty="0"/>
           </a:p>
         </p:txBody>
       </p:sp>
@@ -8685,7 +8599,7 @@
                 <a:ea typeface="Malgun Gothic" pitchFamily="34" charset="-122"/>
                 <a:cs typeface="Malgun Gothic" pitchFamily="34" charset="-120"/>
               </a:rPr>
-              <a:t>앱 레이아웃 ③ 학습하기 · 뜻 맞히기</a:t>
+              <a:t>앱 레이아웃 ② 직접 해보기 (핵심)</a:t>
             </a:r>
             <a:endParaRPr lang="en-US" sz="2600" dirty="0"/>
           </a:p>
@@ -8699,7 +8613,7 @@
         </p:nvSpPr>
         <p:spPr>
           <a:xfrm>
-            <a:off x="822960" y="914400"/>
+            <a:off x="457200" y="914400"/>
             <a:ext cx="2240280" cy="3886200"/>
           </a:xfrm>
           <a:prstGeom prst="roundRect">
@@ -8726,7 +8640,7 @@
         </p:nvSpPr>
         <p:spPr>
           <a:xfrm>
-            <a:off x="822960" y="4846320"/>
+            <a:off x="457200" y="4846320"/>
             <a:ext cx="2240280" cy="228600"/>
           </a:xfrm>
           <a:prstGeom prst="rect">
@@ -8751,7 +8665,7 @@
                 <a:ea typeface="Malgun Gothic" pitchFamily="34" charset="-122"/>
                 <a:cs typeface="Malgun Gothic" pitchFamily="34" charset="-120"/>
               </a:rPr>
-              <a:t>문제</a:t>
+              <a:t>1 단어 고르기</a:t>
             </a:r>
             <a:endParaRPr lang="en-US" sz="1100" dirty="0"/>
           </a:p>
@@ -8765,7 +8679,7 @@
         </p:nvSpPr>
         <p:spPr>
           <a:xfrm>
-            <a:off x="822960" y="4389120"/>
+            <a:off x="457200" y="4389120"/>
             <a:ext cx="2240280" cy="0"/>
           </a:xfrm>
           <a:prstGeom prst="line">
@@ -8788,7 +8702,7 @@
         </p:nvSpPr>
         <p:spPr>
           <a:xfrm>
-            <a:off x="868680" y="4462272"/>
+            <a:off x="502920" y="4462272"/>
             <a:ext cx="716280" cy="228600"/>
           </a:xfrm>
           <a:prstGeom prst="rect">
@@ -8827,7 +8741,7 @@
         </p:nvSpPr>
         <p:spPr>
           <a:xfrm>
-            <a:off x="1584960" y="4462272"/>
+            <a:off x="1219200" y="4462272"/>
             <a:ext cx="716280" cy="228600"/>
           </a:xfrm>
           <a:prstGeom prst="rect">
@@ -8844,9 +8758,9 @@
               <a:buNone/>
             </a:pPr>
             <a:r>
-              <a:rPr lang="en-US" sz="1000" b="1" dirty="0">
-                <a:solidFill>
-                  <a:schemeClr val="accent1"/>
+              <a:rPr lang="en-US" sz="1000" dirty="0">
+                <a:solidFill>
+                  <a:schemeClr val="tx2"/>
                 </a:solidFill>
                 <a:latin typeface="Malgun Gothic" pitchFamily="34" charset="0"/>
                 <a:ea typeface="Malgun Gothic" pitchFamily="34" charset="-122"/>
@@ -8866,7 +8780,7 @@
         </p:nvSpPr>
         <p:spPr>
           <a:xfrm>
-            <a:off x="2301240" y="4462272"/>
+            <a:off x="1935480" y="4462272"/>
             <a:ext cx="716280" cy="228600"/>
           </a:xfrm>
           <a:prstGeom prst="rect">
@@ -8883,9 +8797,9 @@
               <a:buNone/>
             </a:pPr>
             <a:r>
-              <a:rPr lang="en-US" sz="1000" dirty="0">
-                <a:solidFill>
-                  <a:schemeClr val="tx2"/>
+              <a:rPr lang="en-US" sz="1000" b="1" dirty="0">
+                <a:solidFill>
+                  <a:schemeClr val="accent1"/>
                 </a:solidFill>
                 <a:latin typeface="Malgun Gothic" pitchFamily="34" charset="0"/>
                 <a:ea typeface="Malgun Gothic" pitchFamily="34" charset="-122"/>
@@ -8905,7 +8819,7 @@
         </p:nvSpPr>
         <p:spPr>
           <a:xfrm>
-            <a:off x="960120" y="1078992"/>
+            <a:off x="594360" y="1078992"/>
             <a:ext cx="1965960" cy="274320"/>
           </a:xfrm>
           <a:prstGeom prst="rect">
@@ -8930,7 +8844,7 @@
                 <a:ea typeface="Malgun Gothic" pitchFamily="34" charset="-122"/>
                 <a:cs typeface="Malgun Gothic" pitchFamily="34" charset="-120"/>
               </a:rPr>
-              <a:t>영상 보고 뜻 맞히기</a:t>
+              <a:t>직접 해보기</a:t>
             </a:r>
             <a:endParaRPr lang="en-US" sz="1400" dirty="0"/>
           </a:p>
@@ -8938,14 +8852,558 @@
       </p:sp>
       <p:sp>
         <p:nvSpPr>
-          <p:cNvPr id="11" name="Shape 8"/>
-          <p:cNvSpPr/>
-          <p:nvPr/>
-        </p:nvSpPr>
-        <p:spPr>
-          <a:xfrm>
-            <a:off x="960120" y="1444752"/>
-            <a:ext cx="1965960" cy="1280160"/>
+          <p:cNvPr id="11" name="Text 8"/>
+          <p:cNvSpPr txBox="1"/>
+          <p:nvPr/>
+        </p:nvSpPr>
+        <p:spPr>
+          <a:xfrm>
+            <a:off x="594360" y="1399032"/>
+            <a:ext cx="1965960" cy="219456"/>
+          </a:xfrm>
+          <a:prstGeom prst="rect">
+            <a:avLst/>
+          </a:prstGeom>
+          <a:noFill/>
+          <a:ln/>
+        </p:spPr>
+        <p:txBody>
+          <a:bodyPr wrap="square" lIns="0" tIns="0" rIns="0" bIns="0" rtlCol="0" anchor="ctr"/>
+          <a:lstStyle/>
+          <a:p>
+            <a:pPr indent="0" marL="0">
+              <a:buNone/>
+            </a:pPr>
+            <a:r>
+              <a:rPr lang="en-US" sz="1000" dirty="0">
+                <a:solidFill>
+                  <a:schemeClr val="tx2"/>
+                </a:solidFill>
+                <a:latin typeface="Malgun Gothic" pitchFamily="34" charset="0"/>
+                <a:ea typeface="Malgun Gothic" pitchFamily="34" charset="-122"/>
+                <a:cs typeface="Malgun Gothic" pitchFamily="34" charset="-120"/>
+              </a:rPr>
+              <a:t>따라 할 단어를 고르세요</a:t>
+            </a:r>
+            <a:endParaRPr lang="en-US" sz="1000" dirty="0"/>
+          </a:p>
+        </p:txBody>
+      </p:sp>
+      <p:sp>
+        <p:nvSpPr>
+          <p:cNvPr id="12" name="Text 9"/>
+          <p:cNvSpPr/>
+          <p:nvPr/>
+        </p:nvSpPr>
+        <p:spPr>
+          <a:xfrm>
+            <a:off x="594360" y="1764792"/>
+            <a:ext cx="1965960" cy="329184"/>
+          </a:xfrm>
+          <a:prstGeom prst="roundRect">
+            <a:avLst>
+              <a:gd name="adj" fmla="val 16667"/>
+            </a:avLst>
+          </a:prstGeom>
+          <a:solidFill>
+            <a:schemeClr val="accent1"/>
+          </a:solidFill>
+          <a:ln w="9525">
+            <a:solidFill>
+              <a:schemeClr val="accent1"/>
+            </a:solidFill>
+          </a:ln>
+        </p:spPr>
+        <p:txBody>
+          <a:bodyPr wrap="square" lIns="0" tIns="0" rIns="0" bIns="0" rtlCol="0" anchor="ctr"/>
+          <a:lstStyle/>
+          <a:p>
+            <a:pPr algn="ctr" indent="0" marL="0">
+              <a:buNone/>
+            </a:pPr>
+            <a:r>
+              <a:rPr lang="en-US" sz="1000" b="1" dirty="0">
+                <a:solidFill>
+                  <a:schemeClr val="bg1"/>
+                </a:solidFill>
+                <a:latin typeface="Malgun Gothic" pitchFamily="34" charset="0"/>
+                <a:ea typeface="Malgun Gothic" pitchFamily="34" charset="-122"/>
+                <a:cs typeface="Malgun Gothic" pitchFamily="34" charset="-120"/>
+              </a:rPr>
+              <a:t>택시</a:t>
+            </a:r>
+            <a:endParaRPr lang="en-US" sz="1000" dirty="0"/>
+          </a:p>
+        </p:txBody>
+      </p:sp>
+      <p:sp>
+        <p:nvSpPr>
+          <p:cNvPr id="13" name="Text 10"/>
+          <p:cNvSpPr/>
+          <p:nvPr/>
+        </p:nvSpPr>
+        <p:spPr>
+          <a:xfrm>
+            <a:off x="594360" y="2176272"/>
+            <a:ext cx="1965960" cy="329184"/>
+          </a:xfrm>
+          <a:prstGeom prst="roundRect">
+            <a:avLst>
+              <a:gd name="adj" fmla="val 16667"/>
+            </a:avLst>
+          </a:prstGeom>
+          <a:solidFill>
+            <a:schemeClr val="bg1"/>
+          </a:solidFill>
+          <a:ln w="9525">
+            <a:solidFill>
+              <a:schemeClr val="accent3"/>
+            </a:solidFill>
+          </a:ln>
+        </p:spPr>
+        <p:txBody>
+          <a:bodyPr wrap="square" lIns="0" tIns="0" rIns="0" bIns="0" rtlCol="0" anchor="ctr"/>
+          <a:lstStyle/>
+          <a:p>
+            <a:pPr algn="ctr" indent="0" marL="0">
+              <a:buNone/>
+            </a:pPr>
+            <a:r>
+              <a:rPr lang="en-US" sz="1000" dirty="0">
+                <a:solidFill>
+                  <a:schemeClr val="tx1"/>
+                </a:solidFill>
+                <a:latin typeface="Malgun Gothic" pitchFamily="34" charset="0"/>
+                <a:ea typeface="Malgun Gothic" pitchFamily="34" charset="-122"/>
+                <a:cs typeface="Malgun Gothic" pitchFamily="34" charset="-120"/>
+              </a:rPr>
+              <a:t>신호등</a:t>
+            </a:r>
+            <a:endParaRPr lang="en-US" sz="1000" dirty="0"/>
+          </a:p>
+        </p:txBody>
+      </p:sp>
+      <p:sp>
+        <p:nvSpPr>
+          <p:cNvPr id="14" name="Text 11"/>
+          <p:cNvSpPr/>
+          <p:nvPr/>
+        </p:nvSpPr>
+        <p:spPr>
+          <a:xfrm>
+            <a:off x="594360" y="2587752"/>
+            <a:ext cx="1965960" cy="329184"/>
+          </a:xfrm>
+          <a:prstGeom prst="roundRect">
+            <a:avLst>
+              <a:gd name="adj" fmla="val 16667"/>
+            </a:avLst>
+          </a:prstGeom>
+          <a:solidFill>
+            <a:schemeClr val="bg1"/>
+          </a:solidFill>
+          <a:ln w="9525">
+            <a:solidFill>
+              <a:schemeClr val="accent3"/>
+            </a:solidFill>
+          </a:ln>
+        </p:spPr>
+        <p:txBody>
+          <a:bodyPr wrap="square" lIns="0" tIns="0" rIns="0" bIns="0" rtlCol="0" anchor="ctr"/>
+          <a:lstStyle/>
+          <a:p>
+            <a:pPr algn="ctr" indent="0" marL="0">
+              <a:buNone/>
+            </a:pPr>
+            <a:r>
+              <a:rPr lang="en-US" sz="1000" dirty="0">
+                <a:solidFill>
+                  <a:schemeClr val="tx1"/>
+                </a:solidFill>
+                <a:latin typeface="Malgun Gothic" pitchFamily="34" charset="0"/>
+                <a:ea typeface="Malgun Gothic" pitchFamily="34" charset="-122"/>
+                <a:cs typeface="Malgun Gothic" pitchFamily="34" charset="-120"/>
+              </a:rPr>
+              <a:t>버스</a:t>
+            </a:r>
+            <a:endParaRPr lang="en-US" sz="1000" dirty="0"/>
+          </a:p>
+        </p:txBody>
+      </p:sp>
+      <p:sp>
+        <p:nvSpPr>
+          <p:cNvPr id="15" name="Text 12"/>
+          <p:cNvSpPr/>
+          <p:nvPr/>
+        </p:nvSpPr>
+        <p:spPr>
+          <a:xfrm>
+            <a:off x="594360" y="2999232"/>
+            <a:ext cx="1965960" cy="329184"/>
+          </a:xfrm>
+          <a:prstGeom prst="roundRect">
+            <a:avLst>
+              <a:gd name="adj" fmla="val 16667"/>
+            </a:avLst>
+          </a:prstGeom>
+          <a:solidFill>
+            <a:schemeClr val="bg1"/>
+          </a:solidFill>
+          <a:ln w="9525">
+            <a:solidFill>
+              <a:schemeClr val="accent3"/>
+            </a:solidFill>
+          </a:ln>
+        </p:spPr>
+        <p:txBody>
+          <a:bodyPr wrap="square" lIns="0" tIns="0" rIns="0" bIns="0" rtlCol="0" anchor="ctr"/>
+          <a:lstStyle/>
+          <a:p>
+            <a:pPr algn="ctr" indent="0" marL="0">
+              <a:buNone/>
+            </a:pPr>
+            <a:r>
+              <a:rPr lang="en-US" sz="1000" dirty="0">
+                <a:solidFill>
+                  <a:schemeClr val="tx1"/>
+                </a:solidFill>
+                <a:latin typeface="Malgun Gothic" pitchFamily="34" charset="0"/>
+                <a:ea typeface="Malgun Gothic" pitchFamily="34" charset="-122"/>
+                <a:cs typeface="Malgun Gothic" pitchFamily="34" charset="-120"/>
+              </a:rPr>
+              <a:t>지하철</a:t>
+            </a:r>
+            <a:endParaRPr lang="en-US" sz="1000" dirty="0"/>
+          </a:p>
+        </p:txBody>
+      </p:sp>
+      <p:sp>
+        <p:nvSpPr>
+          <p:cNvPr id="16" name="Text 13"/>
+          <p:cNvSpPr/>
+          <p:nvPr/>
+        </p:nvSpPr>
+        <p:spPr>
+          <a:xfrm>
+            <a:off x="594360" y="3410712"/>
+            <a:ext cx="1965960" cy="329184"/>
+          </a:xfrm>
+          <a:prstGeom prst="roundRect">
+            <a:avLst>
+              <a:gd name="adj" fmla="val 16667"/>
+            </a:avLst>
+          </a:prstGeom>
+          <a:solidFill>
+            <a:schemeClr val="bg1"/>
+          </a:solidFill>
+          <a:ln w="9525">
+            <a:solidFill>
+              <a:schemeClr val="accent3"/>
+            </a:solidFill>
+          </a:ln>
+        </p:spPr>
+        <p:txBody>
+          <a:bodyPr wrap="square" lIns="0" tIns="0" rIns="0" bIns="0" rtlCol="0" anchor="ctr"/>
+          <a:lstStyle/>
+          <a:p>
+            <a:pPr algn="ctr" indent="0" marL="0">
+              <a:buNone/>
+            </a:pPr>
+            <a:r>
+              <a:rPr lang="en-US" sz="1000" dirty="0">
+                <a:solidFill>
+                  <a:schemeClr val="tx1"/>
+                </a:solidFill>
+                <a:latin typeface="Malgun Gothic" pitchFamily="34" charset="0"/>
+                <a:ea typeface="Malgun Gothic" pitchFamily="34" charset="-122"/>
+                <a:cs typeface="Malgun Gothic" pitchFamily="34" charset="-120"/>
+              </a:rPr>
+              <a:t>학교</a:t>
+            </a:r>
+            <a:endParaRPr lang="en-US" sz="1000" dirty="0"/>
+          </a:p>
+        </p:txBody>
+      </p:sp>
+      <p:sp>
+        <p:nvSpPr>
+          <p:cNvPr id="17" name="Shape 14"/>
+          <p:cNvSpPr/>
+          <p:nvPr/>
+        </p:nvSpPr>
+        <p:spPr>
+          <a:xfrm>
+            <a:off x="2807208" y="2651760"/>
+            <a:ext cx="274320" cy="274320"/>
+          </a:xfrm>
+          <a:prstGeom prst="rightArrow">
+            <a:avLst/>
+          </a:prstGeom>
+          <a:solidFill>
+            <a:schemeClr val="accent2"/>
+          </a:solidFill>
+          <a:ln w="12700">
+            <a:solidFill>
+              <a:schemeClr val="accent2"/>
+            </a:solidFill>
+            <a:prstDash val="solid"/>
+          </a:ln>
+        </p:spPr>
+      </p:sp>
+      <p:sp>
+        <p:nvSpPr>
+          <p:cNvPr id="18" name="Shape 15"/>
+          <p:cNvSpPr/>
+          <p:nvPr/>
+        </p:nvSpPr>
+        <p:spPr>
+          <a:xfrm>
+            <a:off x="3291840" y="914400"/>
+            <a:ext cx="2240280" cy="3886200"/>
+          </a:xfrm>
+          <a:prstGeom prst="roundRect">
+            <a:avLst>
+              <a:gd name="adj" fmla="val 8163"/>
+            </a:avLst>
+          </a:prstGeom>
+          <a:solidFill>
+            <a:schemeClr val="bg1"/>
+          </a:solidFill>
+          <a:ln w="19050">
+            <a:solidFill>
+              <a:schemeClr val="tx1"/>
+            </a:solidFill>
+            <a:prstDash val="solid"/>
+          </a:ln>
+        </p:spPr>
+      </p:sp>
+      <p:sp>
+        <p:nvSpPr>
+          <p:cNvPr id="19" name="Text 16"/>
+          <p:cNvSpPr txBox="1"/>
+          <p:nvPr/>
+        </p:nvSpPr>
+        <p:spPr>
+          <a:xfrm>
+            <a:off x="3291840" y="4846320"/>
+            <a:ext cx="2240280" cy="228600"/>
+          </a:xfrm>
+          <a:prstGeom prst="rect">
+            <a:avLst/>
+          </a:prstGeom>
+          <a:noFill/>
+          <a:ln/>
+        </p:spPr>
+        <p:txBody>
+          <a:bodyPr wrap="square" lIns="0" tIns="0" rIns="0" bIns="0" rtlCol="0" anchor="t"/>
+          <a:lstStyle/>
+          <a:p>
+            <a:pPr algn="ctr" indent="0" marL="0">
+              <a:buNone/>
+            </a:pPr>
+            <a:r>
+              <a:rPr lang="en-US" sz="1100" b="1" dirty="0">
+                <a:solidFill>
+                  <a:schemeClr val="tx2"/>
+                </a:solidFill>
+                <a:latin typeface="Malgun Gothic" pitchFamily="34" charset="0"/>
+                <a:ea typeface="Malgun Gothic" pitchFamily="34" charset="-122"/>
+                <a:cs typeface="Malgun Gothic" pitchFamily="34" charset="-120"/>
+              </a:rPr>
+              <a:t>2 따라 하기</a:t>
+            </a:r>
+            <a:endParaRPr lang="en-US" sz="1100" dirty="0"/>
+          </a:p>
+        </p:txBody>
+      </p:sp>
+      <p:sp>
+        <p:nvSpPr>
+          <p:cNvPr id="20" name="Shape 17"/>
+          <p:cNvSpPr/>
+          <p:nvPr/>
+        </p:nvSpPr>
+        <p:spPr>
+          <a:xfrm>
+            <a:off x="3291840" y="4389120"/>
+            <a:ext cx="2240280" cy="0"/>
+          </a:xfrm>
+          <a:prstGeom prst="line">
+            <a:avLst/>
+          </a:prstGeom>
+          <a:noFill/>
+          <a:ln w="9525">
+            <a:solidFill>
+              <a:schemeClr val="accent3"/>
+            </a:solidFill>
+            <a:prstDash val="solid"/>
+          </a:ln>
+        </p:spPr>
+      </p:sp>
+      <p:sp>
+        <p:nvSpPr>
+          <p:cNvPr id="21" name="Text 18"/>
+          <p:cNvSpPr txBox="1"/>
+          <p:nvPr/>
+        </p:nvSpPr>
+        <p:spPr>
+          <a:xfrm>
+            <a:off x="3337560" y="4462272"/>
+            <a:ext cx="716280" cy="228600"/>
+          </a:xfrm>
+          <a:prstGeom prst="rect">
+            <a:avLst/>
+          </a:prstGeom>
+          <a:noFill/>
+          <a:ln/>
+        </p:spPr>
+        <p:txBody>
+          <a:bodyPr wrap="square" lIns="0" tIns="0" rIns="0" bIns="0" rtlCol="0" anchor="ctr"/>
+          <a:lstStyle/>
+          <a:p>
+            <a:pPr algn="ctr" indent="0" marL="0">
+              <a:buNone/>
+            </a:pPr>
+            <a:r>
+              <a:rPr lang="en-US" sz="1000" dirty="0">
+                <a:solidFill>
+                  <a:schemeClr val="tx2"/>
+                </a:solidFill>
+                <a:latin typeface="Malgun Gothic" pitchFamily="34" charset="0"/>
+                <a:ea typeface="Malgun Gothic" pitchFamily="34" charset="-122"/>
+                <a:cs typeface="Malgun Gothic" pitchFamily="34" charset="-120"/>
+              </a:rPr>
+              <a:t>검색</a:t>
+            </a:r>
+            <a:endParaRPr lang="en-US" sz="1000" dirty="0"/>
+          </a:p>
+        </p:txBody>
+      </p:sp>
+      <p:sp>
+        <p:nvSpPr>
+          <p:cNvPr id="22" name="Text 19"/>
+          <p:cNvSpPr txBox="1"/>
+          <p:nvPr/>
+        </p:nvSpPr>
+        <p:spPr>
+          <a:xfrm>
+            <a:off x="4053840" y="4462272"/>
+            <a:ext cx="716280" cy="228600"/>
+          </a:xfrm>
+          <a:prstGeom prst="rect">
+            <a:avLst/>
+          </a:prstGeom>
+          <a:noFill/>
+          <a:ln/>
+        </p:spPr>
+        <p:txBody>
+          <a:bodyPr wrap="square" lIns="0" tIns="0" rIns="0" bIns="0" rtlCol="0" anchor="ctr"/>
+          <a:lstStyle/>
+          <a:p>
+            <a:pPr algn="ctr" indent="0" marL="0">
+              <a:buNone/>
+            </a:pPr>
+            <a:r>
+              <a:rPr lang="en-US" sz="1000" dirty="0">
+                <a:solidFill>
+                  <a:schemeClr val="tx2"/>
+                </a:solidFill>
+                <a:latin typeface="Malgun Gothic" pitchFamily="34" charset="0"/>
+                <a:ea typeface="Malgun Gothic" pitchFamily="34" charset="-122"/>
+                <a:cs typeface="Malgun Gothic" pitchFamily="34" charset="-120"/>
+              </a:rPr>
+              <a:t>학습하기</a:t>
+            </a:r>
+            <a:endParaRPr lang="en-US" sz="1000" dirty="0"/>
+          </a:p>
+        </p:txBody>
+      </p:sp>
+      <p:sp>
+        <p:nvSpPr>
+          <p:cNvPr id="23" name="Text 20"/>
+          <p:cNvSpPr txBox="1"/>
+          <p:nvPr/>
+        </p:nvSpPr>
+        <p:spPr>
+          <a:xfrm>
+            <a:off x="4770120" y="4462272"/>
+            <a:ext cx="716280" cy="228600"/>
+          </a:xfrm>
+          <a:prstGeom prst="rect">
+            <a:avLst/>
+          </a:prstGeom>
+          <a:noFill/>
+          <a:ln/>
+        </p:spPr>
+        <p:txBody>
+          <a:bodyPr wrap="square" lIns="0" tIns="0" rIns="0" bIns="0" rtlCol="0" anchor="ctr"/>
+          <a:lstStyle/>
+          <a:p>
+            <a:pPr algn="ctr" indent="0" marL="0">
+              <a:buNone/>
+            </a:pPr>
+            <a:r>
+              <a:rPr lang="en-US" sz="1000" b="1" dirty="0">
+                <a:solidFill>
+                  <a:schemeClr val="accent1"/>
+                </a:solidFill>
+                <a:latin typeface="Malgun Gothic" pitchFamily="34" charset="0"/>
+                <a:ea typeface="Malgun Gothic" pitchFamily="34" charset="-122"/>
+                <a:cs typeface="Malgun Gothic" pitchFamily="34" charset="-120"/>
+              </a:rPr>
+              <a:t>직접 해보기</a:t>
+            </a:r>
+            <a:endParaRPr lang="en-US" sz="1000" dirty="0"/>
+          </a:p>
+        </p:txBody>
+      </p:sp>
+      <p:sp>
+        <p:nvSpPr>
+          <p:cNvPr id="24" name="Text 21"/>
+          <p:cNvSpPr txBox="1"/>
+          <p:nvPr/>
+        </p:nvSpPr>
+        <p:spPr>
+          <a:xfrm>
+            <a:off x="3429000" y="1078992"/>
+            <a:ext cx="1965960" cy="274320"/>
+          </a:xfrm>
+          <a:prstGeom prst="rect">
+            <a:avLst/>
+          </a:prstGeom>
+          <a:noFill/>
+          <a:ln/>
+        </p:spPr>
+        <p:txBody>
+          <a:bodyPr wrap="square" lIns="0" tIns="0" rIns="0" bIns="0" rtlCol="0" anchor="ctr"/>
+          <a:lstStyle/>
+          <a:p>
+            <a:pPr indent="0" marL="0">
+              <a:buNone/>
+            </a:pPr>
+            <a:r>
+              <a:rPr lang="en-US" sz="1400" b="1" dirty="0">
+                <a:solidFill>
+                  <a:schemeClr val="tx1"/>
+                </a:solidFill>
+                <a:latin typeface="Malgun Gothic" pitchFamily="34" charset="0"/>
+                <a:ea typeface="Malgun Gothic" pitchFamily="34" charset="-122"/>
+                <a:cs typeface="Malgun Gothic" pitchFamily="34" charset="-120"/>
+              </a:rPr>
+              <a:t>택시</a:t>
+            </a:r>
+            <a:endParaRPr lang="en-US" sz="1400" dirty="0"/>
+          </a:p>
+        </p:txBody>
+      </p:sp>
+      <p:sp>
+        <p:nvSpPr>
+          <p:cNvPr id="25" name="Shape 22"/>
+          <p:cNvSpPr/>
+          <p:nvPr/>
+        </p:nvSpPr>
+        <p:spPr>
+          <a:xfrm>
+            <a:off x="3429000" y="1426464"/>
+            <a:ext cx="1965960" cy="914400"/>
           </a:xfrm>
           <a:prstGeom prst="rect">
             <a:avLst/>
@@ -8963,14 +9421,14 @@
       </p:sp>
       <p:sp>
         <p:nvSpPr>
-          <p:cNvPr id="12" name="Shape 9"/>
-          <p:cNvSpPr/>
-          <p:nvPr/>
-        </p:nvSpPr>
-        <p:spPr>
-          <a:xfrm>
-            <a:off x="960120" y="1444752"/>
-            <a:ext cx="1965960" cy="1280160"/>
+          <p:cNvPr id="26" name="Shape 23"/>
+          <p:cNvSpPr/>
+          <p:nvPr/>
+        </p:nvSpPr>
+        <p:spPr>
+          <a:xfrm>
+            <a:off x="3429000" y="1426464"/>
+            <a:ext cx="1965960" cy="914400"/>
           </a:xfrm>
           <a:prstGeom prst="line">
             <a:avLst/>
@@ -8986,14 +9444,14 @@
       </p:sp>
       <p:sp>
         <p:nvSpPr>
-          <p:cNvPr id="13" name="Shape 10"/>
-          <p:cNvSpPr/>
-          <p:nvPr/>
-        </p:nvSpPr>
-        <p:spPr>
-          <a:xfrm>
-            <a:off x="960120" y="2724912"/>
-            <a:ext cx="1965960" cy="-1280160"/>
+          <p:cNvPr id="27" name="Shape 24"/>
+          <p:cNvSpPr/>
+          <p:nvPr/>
+        </p:nvSpPr>
+        <p:spPr>
+          <a:xfrm>
+            <a:off x="3429000" y="2340864"/>
+            <a:ext cx="1965960" cy="-914400"/>
           </a:xfrm>
           <a:prstGeom prst="line">
             <a:avLst/>
@@ -9009,13 +9467,13 @@
       </p:sp>
       <p:sp>
         <p:nvSpPr>
-          <p:cNvPr id="14" name="Text 11"/>
+          <p:cNvPr id="28" name="Text 25"/>
           <p:cNvSpPr txBox="1"/>
           <p:nvPr/>
         </p:nvSpPr>
         <p:spPr>
           <a:xfrm>
-            <a:off x="960120" y="1965960"/>
+            <a:off x="3429000" y="1764792"/>
             <a:ext cx="1965960" cy="237744"/>
           </a:xfrm>
           <a:prstGeom prst="rect">
@@ -9042,7 +9500,7 @@
                 <a:ea typeface="Malgun Gothic" pitchFamily="34" charset="-122"/>
                 <a:cs typeface="Malgun Gothic" pitchFamily="34" charset="-120"/>
               </a:rPr>
-              <a:t>수어 영상</a:t>
+              <a:t>사전 영상 (출처)</a:t>
             </a:r>
             <a:endParaRPr lang="en-US" sz="1000" dirty="0"/>
           </a:p>
@@ -9050,85 +9508,150 @@
       </p:sp>
       <p:sp>
         <p:nvSpPr>
-          <p:cNvPr id="15" name="Text 12"/>
-          <p:cNvSpPr txBox="1"/>
-          <p:nvPr/>
-        </p:nvSpPr>
-        <p:spPr>
-          <a:xfrm>
-            <a:off x="960120" y="2816352"/>
-            <a:ext cx="1965960" cy="219456"/>
-          </a:xfrm>
-          <a:prstGeom prst="rect">
-            <a:avLst/>
-          </a:prstGeom>
-          <a:noFill/>
-          <a:ln/>
-        </p:spPr>
-        <p:txBody>
-          <a:bodyPr wrap="square" lIns="0" tIns="0" rIns="0" bIns="0" rtlCol="0" anchor="ctr"/>
-          <a:lstStyle/>
-          <a:p>
-            <a:pPr indent="0" marL="0">
-              <a:buNone/>
-            </a:pPr>
-            <a:r>
-              <a:rPr lang="en-US" sz="1000" b="1" dirty="0">
-                <a:solidFill>
-                  <a:schemeClr val="tx1"/>
-                </a:solidFill>
-                <a:latin typeface="Malgun Gothic" pitchFamily="34" charset="0"/>
-                <a:ea typeface="Malgun Gothic" pitchFamily="34" charset="-122"/>
-                <a:cs typeface="Malgun Gothic" pitchFamily="34" charset="-120"/>
-              </a:rPr>
-              <a:t>이 수어의 뜻은?</a:t>
-            </a:r>
-            <a:endParaRPr lang="en-US" sz="1000" dirty="0"/>
-          </a:p>
-        </p:txBody>
-      </p:sp>
-      <p:sp>
-        <p:nvSpPr>
-          <p:cNvPr id="16" name="Text 13"/>
-          <p:cNvSpPr/>
-          <p:nvPr/>
-        </p:nvSpPr>
-        <p:spPr>
-          <a:xfrm>
-            <a:off x="960120" y="3136392"/>
-            <a:ext cx="955548" cy="329184"/>
-          </a:xfrm>
-          <a:prstGeom prst="roundRect">
-            <a:avLst>
-              <a:gd name="adj" fmla="val 16667"/>
-            </a:avLst>
+          <p:cNvPr id="29" name="Shape 26"/>
+          <p:cNvSpPr/>
+          <p:nvPr/>
+        </p:nvSpPr>
+        <p:spPr>
+          <a:xfrm>
+            <a:off x="3429000" y="2432304"/>
+            <a:ext cx="1965960" cy="1051560"/>
+          </a:xfrm>
+          <a:prstGeom prst="rect">
+            <a:avLst/>
           </a:prstGeom>
           <a:solidFill>
-            <a:schemeClr val="bg1"/>
+            <a:schemeClr val="accent4"/>
           </a:solidFill>
           <a:ln w="9525">
             <a:solidFill>
               <a:schemeClr val="accent3"/>
             </a:solidFill>
+            <a:prstDash val="dash"/>
           </a:ln>
         </p:spPr>
+      </p:sp>
+      <p:sp>
+        <p:nvSpPr>
+          <p:cNvPr id="30" name="Shape 27"/>
+          <p:cNvSpPr/>
+          <p:nvPr/>
+        </p:nvSpPr>
+        <p:spPr>
+          <a:xfrm>
+            <a:off x="3429000" y="2432304"/>
+            <a:ext cx="1965960" cy="1051560"/>
+          </a:xfrm>
+          <a:prstGeom prst="line">
+            <a:avLst/>
+          </a:prstGeom>
+          <a:noFill/>
+          <a:ln w="6350">
+            <a:solidFill>
+              <a:schemeClr val="accent3"/>
+            </a:solidFill>
+            <a:prstDash val="solid"/>
+          </a:ln>
+        </p:spPr>
+      </p:sp>
+      <p:sp>
+        <p:nvSpPr>
+          <p:cNvPr id="31" name="Shape 28"/>
+          <p:cNvSpPr/>
+          <p:nvPr/>
+        </p:nvSpPr>
+        <p:spPr>
+          <a:xfrm>
+            <a:off x="3429000" y="3483864"/>
+            <a:ext cx="1965960" cy="-1051560"/>
+          </a:xfrm>
+          <a:prstGeom prst="line">
+            <a:avLst/>
+          </a:prstGeom>
+          <a:noFill/>
+          <a:ln w="6350">
+            <a:solidFill>
+              <a:schemeClr val="accent3"/>
+            </a:solidFill>
+            <a:prstDash val="solid"/>
+          </a:ln>
+        </p:spPr>
+      </p:sp>
+      <p:sp>
+        <p:nvSpPr>
+          <p:cNvPr id="32" name="Text 29"/>
+          <p:cNvSpPr txBox="1"/>
+          <p:nvPr/>
+        </p:nvSpPr>
+        <p:spPr>
+          <a:xfrm>
+            <a:off x="3429000" y="2839212"/>
+            <a:ext cx="1965960" cy="237744"/>
+          </a:xfrm>
+          <a:prstGeom prst="rect">
+            <a:avLst/>
+          </a:prstGeom>
+          <a:solidFill>
+            <a:schemeClr val="accent4"/>
+          </a:solidFill>
+          <a:ln/>
+        </p:spPr>
+        <p:txBody>
+          <a:bodyPr wrap="square" lIns="0" tIns="0" rIns="0" bIns="0" rtlCol="0" anchor="t"/>
+          <a:lstStyle/>
+          <a:p>
+            <a:pPr algn="ctr" indent="0" marL="0">
+              <a:buNone/>
+            </a:pPr>
+            <a:r>
+              <a:rPr lang="en-US" sz="1000" dirty="0">
+                <a:solidFill>
+                  <a:schemeClr val="tx2"/>
+                </a:solidFill>
+                <a:latin typeface="Malgun Gothic" pitchFamily="34" charset="0"/>
+                <a:ea typeface="Malgun Gothic" pitchFamily="34" charset="-122"/>
+                <a:cs typeface="Malgun Gothic" pitchFamily="34" charset="-120"/>
+              </a:rPr>
+              <a:t>내 카메라 + 손 좌표 점</a:t>
+            </a:r>
+            <a:endParaRPr lang="en-US" sz="1000" dirty="0"/>
+          </a:p>
+        </p:txBody>
+      </p:sp>
+      <p:sp>
+        <p:nvSpPr>
+          <p:cNvPr id="33" name="Text 30"/>
+          <p:cNvSpPr txBox="1"/>
+          <p:nvPr/>
+        </p:nvSpPr>
+        <p:spPr>
+          <a:xfrm>
+            <a:off x="3429000" y="3529584"/>
+            <a:ext cx="1965960" cy="219456"/>
+          </a:xfrm>
+          <a:prstGeom prst="rect">
+            <a:avLst/>
+          </a:prstGeom>
+          <a:noFill/>
+          <a:ln/>
+        </p:spPr>
         <p:txBody>
           <a:bodyPr wrap="square" lIns="0" tIns="0" rIns="0" bIns="0" rtlCol="0" anchor="ctr"/>
           <a:lstStyle/>
           <a:p>
-            <a:pPr algn="ctr" indent="0" marL="0">
+            <a:pPr indent="0" marL="0">
               <a:buNone/>
             </a:pPr>
             <a:r>
               <a:rPr lang="en-US" sz="1000" dirty="0">
                 <a:solidFill>
-                  <a:schemeClr val="tx1"/>
-                </a:solidFill>
-                <a:latin typeface="Malgun Gothic" pitchFamily="34" charset="0"/>
-                <a:ea typeface="Malgun Gothic" pitchFamily="34" charset="-122"/>
-                <a:cs typeface="Malgun Gothic" pitchFamily="34" charset="-120"/>
-              </a:rPr>
-              <a:t>라면</a:t>
+                  <a:schemeClr val="tx2"/>
+                </a:solidFill>
+                <a:latin typeface="Malgun Gothic" pitchFamily="34" charset="0"/>
+                <a:ea typeface="Malgun Gothic" pitchFamily="34" charset="-122"/>
+                <a:cs typeface="Malgun Gothic" pitchFamily="34" charset="-120"/>
+              </a:rPr>
+              <a:t>영상은 기기 안에서만 처리돼요</a:t>
             </a:r>
             <a:endParaRPr lang="en-US" sz="1000" dirty="0"/>
           </a:p>
@@ -9136,26 +9659,26 @@
       </p:sp>
       <p:sp>
         <p:nvSpPr>
-          <p:cNvPr id="17" name="Text 14"/>
-          <p:cNvSpPr/>
-          <p:nvPr/>
-        </p:nvSpPr>
-        <p:spPr>
-          <a:xfrm>
-            <a:off x="1970532" y="3136392"/>
-            <a:ext cx="955548" cy="329184"/>
+          <p:cNvPr id="34" name="Text 31"/>
+          <p:cNvSpPr/>
+          <p:nvPr/>
+        </p:nvSpPr>
+        <p:spPr>
+          <a:xfrm>
+            <a:off x="3429000" y="3822192"/>
+            <a:ext cx="1965960" cy="347472"/>
           </a:xfrm>
           <a:prstGeom prst="roundRect">
             <a:avLst>
-              <a:gd name="adj" fmla="val 16667"/>
+              <a:gd name="adj" fmla="val 15789"/>
             </a:avLst>
           </a:prstGeom>
           <a:solidFill>
-            <a:schemeClr val="bg1"/>
+            <a:schemeClr val="accent1"/>
           </a:solidFill>
           <a:ln w="9525">
             <a:solidFill>
-              <a:schemeClr val="accent3"/>
+              <a:schemeClr val="accent1"/>
             </a:solidFill>
           </a:ln>
         </p:spPr>
@@ -9167,15 +9690,15 @@
               <a:buNone/>
             </a:pPr>
             <a:r>
-              <a:rPr lang="en-US" sz="1000" dirty="0">
-                <a:solidFill>
-                  <a:schemeClr val="tx1"/>
-                </a:solidFill>
-                <a:latin typeface="Malgun Gothic" pitchFamily="34" charset="0"/>
-                <a:ea typeface="Malgun Gothic" pitchFamily="34" charset="-122"/>
-                <a:cs typeface="Malgun Gothic" pitchFamily="34" charset="-120"/>
-              </a:rPr>
-              <a:t>우유</a:t>
+              <a:rPr lang="en-US" sz="1000" b="1" dirty="0">
+                <a:solidFill>
+                  <a:schemeClr val="bg1"/>
+                </a:solidFill>
+                <a:latin typeface="Malgun Gothic" pitchFamily="34" charset="0"/>
+                <a:ea typeface="Malgun Gothic" pitchFamily="34" charset="-122"/>
+                <a:cs typeface="Malgun Gothic" pitchFamily="34" charset="-120"/>
+              </a:rPr>
+              <a:t>● 동작 기록 (3초)</a:t>
             </a:r>
             <a:endParaRPr lang="en-US" sz="1000" dirty="0"/>
           </a:p>
@@ -9183,107 +9706,13 @@
       </p:sp>
       <p:sp>
         <p:nvSpPr>
-          <p:cNvPr id="18" name="Text 15"/>
-          <p:cNvSpPr/>
-          <p:nvPr/>
-        </p:nvSpPr>
-        <p:spPr>
-          <a:xfrm>
-            <a:off x="960120" y="3547872"/>
-            <a:ext cx="955548" cy="329184"/>
-          </a:xfrm>
-          <a:prstGeom prst="roundRect">
-            <a:avLst>
-              <a:gd name="adj" fmla="val 16667"/>
-            </a:avLst>
-          </a:prstGeom>
-          <a:solidFill>
-            <a:schemeClr val="bg1"/>
-          </a:solidFill>
-          <a:ln w="9525">
-            <a:solidFill>
-              <a:schemeClr val="accent3"/>
-            </a:solidFill>
-          </a:ln>
-        </p:spPr>
-        <p:txBody>
-          <a:bodyPr wrap="square" lIns="0" tIns="0" rIns="0" bIns="0" rtlCol="0" anchor="ctr"/>
-          <a:lstStyle/>
-          <a:p>
-            <a:pPr algn="ctr" indent="0" marL="0">
-              <a:buNone/>
-            </a:pPr>
-            <a:r>
-              <a:rPr lang="en-US" sz="1000" dirty="0">
-                <a:solidFill>
-                  <a:schemeClr val="tx1"/>
-                </a:solidFill>
-                <a:latin typeface="Malgun Gothic" pitchFamily="34" charset="0"/>
-                <a:ea typeface="Malgun Gothic" pitchFamily="34" charset="-122"/>
-                <a:cs typeface="Malgun Gothic" pitchFamily="34" charset="-120"/>
-              </a:rPr>
-              <a:t>택시</a:t>
-            </a:r>
-            <a:endParaRPr lang="en-US" sz="1000" dirty="0"/>
-          </a:p>
-        </p:txBody>
-      </p:sp>
-      <p:sp>
-        <p:nvSpPr>
-          <p:cNvPr id="19" name="Text 16"/>
-          <p:cNvSpPr/>
-          <p:nvPr/>
-        </p:nvSpPr>
-        <p:spPr>
-          <a:xfrm>
-            <a:off x="1970532" y="3547872"/>
-            <a:ext cx="955548" cy="329184"/>
-          </a:xfrm>
-          <a:prstGeom prst="roundRect">
-            <a:avLst>
-              <a:gd name="adj" fmla="val 16667"/>
-            </a:avLst>
-          </a:prstGeom>
-          <a:solidFill>
-            <a:schemeClr val="bg1"/>
-          </a:solidFill>
-          <a:ln w="9525">
-            <a:solidFill>
-              <a:schemeClr val="accent3"/>
-            </a:solidFill>
-          </a:ln>
-        </p:spPr>
-        <p:txBody>
-          <a:bodyPr wrap="square" lIns="0" tIns="0" rIns="0" bIns="0" rtlCol="0" anchor="ctr"/>
-          <a:lstStyle/>
-          <a:p>
-            <a:pPr algn="ctr" indent="0" marL="0">
-              <a:buNone/>
-            </a:pPr>
-            <a:r>
-              <a:rPr lang="en-US" sz="1000" dirty="0">
-                <a:solidFill>
-                  <a:schemeClr val="tx1"/>
-                </a:solidFill>
-                <a:latin typeface="Malgun Gothic" pitchFamily="34" charset="0"/>
-                <a:ea typeface="Malgun Gothic" pitchFamily="34" charset="-122"/>
-                <a:cs typeface="Malgun Gothic" pitchFamily="34" charset="-120"/>
-              </a:rPr>
-              <a:t>김치</a:t>
-            </a:r>
-            <a:endParaRPr lang="en-US" sz="1000" dirty="0"/>
-          </a:p>
-        </p:txBody>
-      </p:sp>
-      <p:sp>
-        <p:nvSpPr>
-          <p:cNvPr id="20" name="Shape 17"/>
-          <p:cNvSpPr/>
-          <p:nvPr/>
-        </p:nvSpPr>
-        <p:spPr>
-          <a:xfrm>
-            <a:off x="3227832" y="2651760"/>
+          <p:cNvPr id="35" name="Shape 32"/>
+          <p:cNvSpPr/>
+          <p:nvPr/>
+        </p:nvSpPr>
+        <p:spPr>
+          <a:xfrm>
+            <a:off x="5641848" y="2651760"/>
             <a:ext cx="274320" cy="274320"/>
           </a:xfrm>
           <a:prstGeom prst="rightArrow">
@@ -9302,13 +9731,13 @@
       </p:sp>
       <p:sp>
         <p:nvSpPr>
-          <p:cNvPr id="21" name="Shape 18"/>
-          <p:cNvSpPr/>
-          <p:nvPr/>
-        </p:nvSpPr>
-        <p:spPr>
-          <a:xfrm>
-            <a:off x="3657600" y="914400"/>
+          <p:cNvPr id="36" name="Shape 33"/>
+          <p:cNvSpPr/>
+          <p:nvPr/>
+        </p:nvSpPr>
+        <p:spPr>
+          <a:xfrm>
+            <a:off x="6126480" y="914400"/>
             <a:ext cx="2240280" cy="3886200"/>
           </a:xfrm>
           <a:prstGeom prst="roundRect">
@@ -9329,13 +9758,13 @@
       </p:sp>
       <p:sp>
         <p:nvSpPr>
-          <p:cNvPr id="22" name="Text 19"/>
+          <p:cNvPr id="37" name="Text 34"/>
           <p:cNvSpPr txBox="1"/>
           <p:nvPr/>
         </p:nvSpPr>
         <p:spPr>
           <a:xfrm>
-            <a:off x="3657600" y="4846320"/>
+            <a:off x="6126480" y="4846320"/>
             <a:ext cx="2240280" cy="228600"/>
           </a:xfrm>
           <a:prstGeom prst="rect">
@@ -9360,7 +9789,7 @@
                 <a:ea typeface="Malgun Gothic" pitchFamily="34" charset="-122"/>
                 <a:cs typeface="Malgun Gothic" pitchFamily="34" charset="-120"/>
               </a:rPr>
-              <a:t>고른 뒤</a:t>
+              <a:t>3 결과 · 사용자가 선택</a:t>
             </a:r>
             <a:endParaRPr lang="en-US" sz="1100" dirty="0"/>
           </a:p>
@@ -9368,13 +9797,13 @@
       </p:sp>
       <p:sp>
         <p:nvSpPr>
-          <p:cNvPr id="23" name="Shape 20"/>
-          <p:cNvSpPr/>
-          <p:nvPr/>
-        </p:nvSpPr>
-        <p:spPr>
-          <a:xfrm>
-            <a:off x="3657600" y="4389120"/>
+          <p:cNvPr id="38" name="Shape 35"/>
+          <p:cNvSpPr/>
+          <p:nvPr/>
+        </p:nvSpPr>
+        <p:spPr>
+          <a:xfrm>
+            <a:off x="6126480" y="4389120"/>
             <a:ext cx="2240280" cy="0"/>
           </a:xfrm>
           <a:prstGeom prst="line">
@@ -9391,13 +9820,13 @@
       </p:sp>
       <p:sp>
         <p:nvSpPr>
-          <p:cNvPr id="24" name="Text 21"/>
+          <p:cNvPr id="39" name="Text 36"/>
           <p:cNvSpPr txBox="1"/>
           <p:nvPr/>
         </p:nvSpPr>
         <p:spPr>
           <a:xfrm>
-            <a:off x="3703320" y="4462272"/>
+            <a:off x="6172200" y="4462272"/>
             <a:ext cx="716280" cy="228600"/>
           </a:xfrm>
           <a:prstGeom prst="rect">
@@ -9430,13 +9859,13 @@
       </p:sp>
       <p:sp>
         <p:nvSpPr>
-          <p:cNvPr id="25" name="Text 22"/>
+          <p:cNvPr id="40" name="Text 37"/>
           <p:cNvSpPr txBox="1"/>
           <p:nvPr/>
         </p:nvSpPr>
         <p:spPr>
           <a:xfrm>
-            <a:off x="4419600" y="4462272"/>
+            <a:off x="6888480" y="4462272"/>
             <a:ext cx="716280" cy="228600"/>
           </a:xfrm>
           <a:prstGeom prst="rect">
@@ -9453,6 +9882,45 @@
               <a:buNone/>
             </a:pPr>
             <a:r>
+              <a:rPr lang="en-US" sz="1000" dirty="0">
+                <a:solidFill>
+                  <a:schemeClr val="tx2"/>
+                </a:solidFill>
+                <a:latin typeface="Malgun Gothic" pitchFamily="34" charset="0"/>
+                <a:ea typeface="Malgun Gothic" pitchFamily="34" charset="-122"/>
+                <a:cs typeface="Malgun Gothic" pitchFamily="34" charset="-120"/>
+              </a:rPr>
+              <a:t>학습하기</a:t>
+            </a:r>
+            <a:endParaRPr lang="en-US" sz="1000" dirty="0"/>
+          </a:p>
+        </p:txBody>
+      </p:sp>
+      <p:sp>
+        <p:nvSpPr>
+          <p:cNvPr id="41" name="Text 38"/>
+          <p:cNvSpPr txBox="1"/>
+          <p:nvPr/>
+        </p:nvSpPr>
+        <p:spPr>
+          <a:xfrm>
+            <a:off x="7604760" y="4462272"/>
+            <a:ext cx="716280" cy="228600"/>
+          </a:xfrm>
+          <a:prstGeom prst="rect">
+            <a:avLst/>
+          </a:prstGeom>
+          <a:noFill/>
+          <a:ln/>
+        </p:spPr>
+        <p:txBody>
+          <a:bodyPr wrap="square" lIns="0" tIns="0" rIns="0" bIns="0" rtlCol="0" anchor="ctr"/>
+          <a:lstStyle/>
+          <a:p>
+            <a:pPr algn="ctr" indent="0" marL="0">
+              <a:buNone/>
+            </a:pPr>
+            <a:r>
               <a:rPr lang="en-US" sz="1000" b="1" dirty="0">
                 <a:solidFill>
                   <a:schemeClr val="accent1"/>
@@ -9461,7 +9929,7 @@
                 <a:ea typeface="Malgun Gothic" pitchFamily="34" charset="-122"/>
                 <a:cs typeface="Malgun Gothic" pitchFamily="34" charset="-120"/>
               </a:rPr>
-              <a:t>학습하기</a:t>
+              <a:t>직접 해보기</a:t>
             </a:r>
             <a:endParaRPr lang="en-US" sz="1000" dirty="0"/>
           </a:p>
@@ -9469,14 +9937,14 @@
       </p:sp>
       <p:sp>
         <p:nvSpPr>
-          <p:cNvPr id="26" name="Text 23"/>
+          <p:cNvPr id="42" name="Text 39"/>
           <p:cNvSpPr txBox="1"/>
           <p:nvPr/>
         </p:nvSpPr>
         <p:spPr>
           <a:xfrm>
-            <a:off x="5135880" y="4462272"/>
-            <a:ext cx="716280" cy="228600"/>
+            <a:off x="6263640" y="1078992"/>
+            <a:ext cx="1965960" cy="219456"/>
           </a:xfrm>
           <a:prstGeom prst="rect">
             <a:avLst/>
@@ -9488,19 +9956,66 @@
           <a:bodyPr wrap="square" lIns="0" tIns="0" rIns="0" bIns="0" rtlCol="0" anchor="ctr"/>
           <a:lstStyle/>
           <a:p>
+            <a:pPr indent="0" marL="0">
+              <a:buNone/>
+            </a:pPr>
+            <a:r>
+              <a:rPr lang="en-US" sz="1000" b="1" dirty="0">
+                <a:solidFill>
+                  <a:schemeClr val="tx1"/>
+                </a:solidFill>
+                <a:latin typeface="Malgun Gothic" pitchFamily="34" charset="0"/>
+                <a:ea typeface="Malgun Gothic" pitchFamily="34" charset="-122"/>
+                <a:cs typeface="Malgun Gothic" pitchFamily="34" charset="-120"/>
+              </a:rPr>
+              <a:t>비슷해 보이는 동작 (AI 추정)</a:t>
+            </a:r>
+            <a:endParaRPr lang="en-US" sz="1000" dirty="0"/>
+          </a:p>
+        </p:txBody>
+      </p:sp>
+      <p:sp>
+        <p:nvSpPr>
+          <p:cNvPr id="43" name="Text 40"/>
+          <p:cNvSpPr/>
+          <p:nvPr/>
+        </p:nvSpPr>
+        <p:spPr>
+          <a:xfrm>
+            <a:off x="6263640" y="1371600"/>
+            <a:ext cx="731520" cy="219456"/>
+          </a:xfrm>
+          <a:prstGeom prst="roundRect">
+            <a:avLst>
+              <a:gd name="adj" fmla="val 50000"/>
+            </a:avLst>
+          </a:prstGeom>
+          <a:solidFill>
+            <a:schemeClr val="accent1"/>
+          </a:solidFill>
+          <a:ln w="9525">
+            <a:solidFill>
+              <a:schemeClr val="accent1"/>
+            </a:solidFill>
+          </a:ln>
+        </p:spPr>
+        <p:txBody>
+          <a:bodyPr wrap="square" lIns="0" tIns="0" rIns="0" bIns="0" rtlCol="0" anchor="ctr"/>
+          <a:lstStyle/>
+          <a:p>
             <a:pPr algn="ctr" indent="0" marL="0">
               <a:buNone/>
             </a:pPr>
             <a:r>
               <a:rPr lang="en-US" sz="1000" dirty="0">
                 <a:solidFill>
-                  <a:schemeClr val="tx2"/>
-                </a:solidFill>
-                <a:latin typeface="Malgun Gothic" pitchFamily="34" charset="0"/>
-                <a:ea typeface="Malgun Gothic" pitchFamily="34" charset="-122"/>
-                <a:cs typeface="Malgun Gothic" pitchFamily="34" charset="-120"/>
-              </a:rPr>
-              <a:t>직접 해보기</a:t>
+                  <a:schemeClr val="bg1"/>
+                </a:solidFill>
+                <a:latin typeface="Malgun Gothic" pitchFamily="34" charset="0"/>
+                <a:ea typeface="Malgun Gothic" pitchFamily="34" charset="-122"/>
+                <a:cs typeface="Malgun Gothic" pitchFamily="34" charset="-120"/>
+              </a:rPr>
+              <a:t>① 택시</a:t>
             </a:r>
             <a:endParaRPr lang="en-US" sz="1000" dirty="0"/>
           </a:p>
@@ -9508,30 +10023,38 @@
       </p:sp>
       <p:sp>
         <p:nvSpPr>
-          <p:cNvPr id="27" name="Text 24"/>
-          <p:cNvSpPr txBox="1"/>
-          <p:nvPr/>
-        </p:nvSpPr>
-        <p:spPr>
-          <a:xfrm>
-            <a:off x="3794760" y="1078992"/>
-            <a:ext cx="1965960" cy="274320"/>
-          </a:xfrm>
-          <a:prstGeom prst="rect">
-            <a:avLst/>
-          </a:prstGeom>
-          <a:noFill/>
-          <a:ln/>
+          <p:cNvPr id="44" name="Text 41"/>
+          <p:cNvSpPr/>
+          <p:nvPr/>
+        </p:nvSpPr>
+        <p:spPr>
+          <a:xfrm>
+            <a:off x="7068312" y="1371600"/>
+            <a:ext cx="822960" cy="219456"/>
+          </a:xfrm>
+          <a:prstGeom prst="roundRect">
+            <a:avLst>
+              <a:gd name="adj" fmla="val 50000"/>
+            </a:avLst>
+          </a:prstGeom>
+          <a:solidFill>
+            <a:schemeClr val="bg1"/>
+          </a:solidFill>
+          <a:ln w="9525">
+            <a:solidFill>
+              <a:schemeClr val="accent3"/>
+            </a:solidFill>
+          </a:ln>
         </p:spPr>
         <p:txBody>
           <a:bodyPr wrap="square" lIns="0" tIns="0" rIns="0" bIns="0" rtlCol="0" anchor="ctr"/>
           <a:lstStyle/>
           <a:p>
-            <a:pPr indent="0" marL="0">
-              <a:buNone/>
-            </a:pPr>
-            <a:r>
-              <a:rPr lang="en-US" sz="1400" b="1" dirty="0">
+            <a:pPr algn="ctr" indent="0" marL="0">
+              <a:buNone/>
+            </a:pPr>
+            <a:r>
+              <a:rPr lang="en-US" sz="1000" dirty="0">
                 <a:solidFill>
                   <a:schemeClr val="tx1"/>
                 </a:solidFill>
@@ -9539,22 +10062,22 @@
                 <a:ea typeface="Malgun Gothic" pitchFamily="34" charset="-122"/>
                 <a:cs typeface="Malgun Gothic" pitchFamily="34" charset="-120"/>
               </a:rPr>
-              <a:t>영상 보고 뜻 맞히기</a:t>
-            </a:r>
-            <a:endParaRPr lang="en-US" sz="1400" dirty="0"/>
-          </a:p>
-        </p:txBody>
-      </p:sp>
-      <p:sp>
-        <p:nvSpPr>
-          <p:cNvPr id="28" name="Shape 25"/>
-          <p:cNvSpPr/>
-          <p:nvPr/>
-        </p:nvSpPr>
-        <p:spPr>
-          <a:xfrm>
-            <a:off x="3794760" y="1444752"/>
-            <a:ext cx="1965960" cy="914400"/>
+              <a:t>② 버스</a:t>
+            </a:r>
+            <a:endParaRPr lang="en-US" sz="1000" dirty="0"/>
+          </a:p>
+        </p:txBody>
+      </p:sp>
+      <p:sp>
+        <p:nvSpPr>
+          <p:cNvPr id="45" name="Shape 42"/>
+          <p:cNvSpPr/>
+          <p:nvPr/>
+        </p:nvSpPr>
+        <p:spPr>
+          <a:xfrm>
+            <a:off x="6263640" y="1719072"/>
+            <a:ext cx="946404" cy="1051560"/>
           </a:xfrm>
           <a:prstGeom prst="rect">
             <a:avLst/>
@@ -9572,14 +10095,14 @@
       </p:sp>
       <p:sp>
         <p:nvSpPr>
-          <p:cNvPr id="29" name="Shape 26"/>
-          <p:cNvSpPr/>
-          <p:nvPr/>
-        </p:nvSpPr>
-        <p:spPr>
-          <a:xfrm>
-            <a:off x="3794760" y="1444752"/>
-            <a:ext cx="1965960" cy="914400"/>
+          <p:cNvPr id="46" name="Shape 43"/>
+          <p:cNvSpPr/>
+          <p:nvPr/>
+        </p:nvSpPr>
+        <p:spPr>
+          <a:xfrm>
+            <a:off x="6263640" y="1719072"/>
+            <a:ext cx="946404" cy="1051560"/>
           </a:xfrm>
           <a:prstGeom prst="line">
             <a:avLst/>
@@ -9595,14 +10118,14 @@
       </p:sp>
       <p:sp>
         <p:nvSpPr>
-          <p:cNvPr id="30" name="Shape 27"/>
-          <p:cNvSpPr/>
-          <p:nvPr/>
-        </p:nvSpPr>
-        <p:spPr>
-          <a:xfrm>
-            <a:off x="3794760" y="2359152"/>
-            <a:ext cx="1965960" cy="-914400"/>
+          <p:cNvPr id="47" name="Shape 44"/>
+          <p:cNvSpPr/>
+          <p:nvPr/>
+        </p:nvSpPr>
+        <p:spPr>
+          <a:xfrm>
+            <a:off x="6263640" y="2770632"/>
+            <a:ext cx="946404" cy="-1051560"/>
           </a:xfrm>
           <a:prstGeom prst="line">
             <a:avLst/>
@@ -9618,14 +10141,14 @@
       </p:sp>
       <p:sp>
         <p:nvSpPr>
-          <p:cNvPr id="31" name="Text 28"/>
+          <p:cNvPr id="48" name="Text 45"/>
           <p:cNvSpPr txBox="1"/>
           <p:nvPr/>
         </p:nvSpPr>
         <p:spPr>
           <a:xfrm>
-            <a:off x="3794760" y="1783080"/>
-            <a:ext cx="1965960" cy="237744"/>
+            <a:off x="6263640" y="2125980"/>
+            <a:ext cx="946404" cy="237744"/>
           </a:xfrm>
           <a:prstGeom prst="rect">
             <a:avLst/>
@@ -9651,7 +10174,7 @@
                 <a:ea typeface="Malgun Gothic" pitchFamily="34" charset="-122"/>
                 <a:cs typeface="Malgun Gothic" pitchFamily="34" charset="-120"/>
               </a:rPr>
-              <a:t>수어 영상</a:t>
+              <a:t>내 동작</a:t>
             </a:r>
             <a:endParaRPr lang="en-US" sz="1000" dirty="0"/>
           </a:p>
@@ -9659,53 +10182,14 @@
       </p:sp>
       <p:sp>
         <p:nvSpPr>
-          <p:cNvPr id="32" name="Text 29"/>
-          <p:cNvSpPr txBox="1"/>
-          <p:nvPr/>
-        </p:nvSpPr>
-        <p:spPr>
-          <a:xfrm>
-            <a:off x="3794760" y="2450592"/>
-            <a:ext cx="1965960" cy="219456"/>
-          </a:xfrm>
-          <a:prstGeom prst="rect">
-            <a:avLst/>
-          </a:prstGeom>
-          <a:noFill/>
-          <a:ln/>
-        </p:spPr>
-        <p:txBody>
-          <a:bodyPr wrap="square" lIns="0" tIns="0" rIns="0" bIns="0" rtlCol="0" anchor="ctr"/>
-          <a:lstStyle/>
-          <a:p>
-            <a:pPr indent="0" marL="0">
-              <a:buNone/>
-            </a:pPr>
-            <a:r>
-              <a:rPr lang="en-US" sz="1000" b="1" dirty="0">
-                <a:solidFill>
-                  <a:schemeClr val="tx1"/>
-                </a:solidFill>
-                <a:latin typeface="Malgun Gothic" pitchFamily="34" charset="0"/>
-                <a:ea typeface="Malgun Gothic" pitchFamily="34" charset="-122"/>
-                <a:cs typeface="Malgun Gothic" pitchFamily="34" charset="-120"/>
-              </a:rPr>
-              <a:t>이 수어는 「라면」 (표준)</a:t>
-            </a:r>
-            <a:endParaRPr lang="en-US" sz="1000" dirty="0"/>
-          </a:p>
-        </p:txBody>
-      </p:sp>
-      <p:sp>
-        <p:nvSpPr>
-          <p:cNvPr id="33" name="Shape 30"/>
-          <p:cNvSpPr/>
-          <p:nvPr/>
-        </p:nvSpPr>
-        <p:spPr>
-          <a:xfrm>
-            <a:off x="3794760" y="2770632"/>
-            <a:ext cx="1965960" cy="640080"/>
+          <p:cNvPr id="49" name="Shape 46"/>
+          <p:cNvSpPr/>
+          <p:nvPr/>
+        </p:nvSpPr>
+        <p:spPr>
+          <a:xfrm>
+            <a:off x="7283196" y="1719072"/>
+            <a:ext cx="946404" cy="1051560"/>
           </a:xfrm>
           <a:prstGeom prst="rect">
             <a:avLst/>
@@ -9723,14 +10207,14 @@
       </p:sp>
       <p:sp>
         <p:nvSpPr>
-          <p:cNvPr id="34" name="Shape 31"/>
-          <p:cNvSpPr/>
-          <p:nvPr/>
-        </p:nvSpPr>
-        <p:spPr>
-          <a:xfrm>
-            <a:off x="3794760" y="2770632"/>
-            <a:ext cx="1965960" cy="640080"/>
+          <p:cNvPr id="50" name="Shape 47"/>
+          <p:cNvSpPr/>
+          <p:nvPr/>
+        </p:nvSpPr>
+        <p:spPr>
+          <a:xfrm>
+            <a:off x="7283196" y="1719072"/>
+            <a:ext cx="946404" cy="1051560"/>
           </a:xfrm>
           <a:prstGeom prst="line">
             <a:avLst/>
@@ -9746,14 +10230,14 @@
       </p:sp>
       <p:sp>
         <p:nvSpPr>
-          <p:cNvPr id="35" name="Shape 32"/>
-          <p:cNvSpPr/>
-          <p:nvPr/>
-        </p:nvSpPr>
-        <p:spPr>
-          <a:xfrm>
-            <a:off x="3794760" y="3410712"/>
-            <a:ext cx="1965960" cy="-640080"/>
+          <p:cNvPr id="51" name="Shape 48"/>
+          <p:cNvSpPr/>
+          <p:nvPr/>
+        </p:nvSpPr>
+        <p:spPr>
+          <a:xfrm>
+            <a:off x="7283196" y="2770632"/>
+            <a:ext cx="946404" cy="-1051560"/>
           </a:xfrm>
           <a:prstGeom prst="line">
             <a:avLst/>
@@ -9769,14 +10253,14 @@
       </p:sp>
       <p:sp>
         <p:nvSpPr>
-          <p:cNvPr id="36" name="Text 33"/>
+          <p:cNvPr id="52" name="Text 49"/>
           <p:cNvSpPr txBox="1"/>
           <p:nvPr/>
         </p:nvSpPr>
         <p:spPr>
           <a:xfrm>
-            <a:off x="3794760" y="2971800"/>
-            <a:ext cx="1965960" cy="237744"/>
+            <a:off x="7283196" y="2125980"/>
+            <a:ext cx="946404" cy="237744"/>
           </a:xfrm>
           <a:prstGeom prst="rect">
             <a:avLst/>
@@ -9802,7 +10286,7 @@
                 <a:ea typeface="Malgun Gothic" pitchFamily="34" charset="-122"/>
                 <a:cs typeface="Malgun Gothic" pitchFamily="34" charset="-120"/>
               </a:rPr>
-              <a:t>지역별 라면 비교 미리보기</a:t>
+              <a:t>사전 영상</a:t>
             </a:r>
             <a:endParaRPr lang="en-US" sz="1000" dirty="0"/>
           </a:p>
@@ -9810,13 +10294,13 @@
       </p:sp>
       <p:sp>
         <p:nvSpPr>
-          <p:cNvPr id="37" name="Text 34"/>
+          <p:cNvPr id="53" name="Text 50"/>
           <p:cNvSpPr txBox="1"/>
           <p:nvPr/>
         </p:nvSpPr>
         <p:spPr>
           <a:xfrm>
-            <a:off x="3794760" y="3456432"/>
+            <a:off x="6263640" y="2816352"/>
             <a:ext cx="1965960" cy="219456"/>
           </a:xfrm>
           <a:prstGeom prst="rect">
@@ -9841,7 +10325,7 @@
                 <a:ea typeface="Malgun Gothic" pitchFamily="34" charset="-122"/>
                 <a:cs typeface="Malgun Gothic" pitchFamily="34" charset="-120"/>
               </a:rPr>
-              <a:t>근거: 국립국어원 한국수어사전</a:t>
+              <a:t>출처: 국립국어원 한국수어사전</a:t>
             </a:r>
             <a:endParaRPr lang="en-US" sz="1000" dirty="0"/>
           </a:p>
@@ -9849,18 +10333,18 @@
       </p:sp>
       <p:sp>
         <p:nvSpPr>
-          <p:cNvPr id="38" name="Text 35"/>
-          <p:cNvSpPr/>
-          <p:nvPr/>
-        </p:nvSpPr>
-        <p:spPr>
-          <a:xfrm>
-            <a:off x="3794760" y="3749040"/>
-            <a:ext cx="955548" cy="329184"/>
+          <p:cNvPr id="54" name="Text 51"/>
+          <p:cNvSpPr/>
+          <p:nvPr/>
+        </p:nvSpPr>
+        <p:spPr>
+          <a:xfrm>
+            <a:off x="6263640" y="3108960"/>
+            <a:ext cx="1965960" cy="310896"/>
           </a:xfrm>
           <a:prstGeom prst="roundRect">
             <a:avLst>
-              <a:gd name="adj" fmla="val 16667"/>
+              <a:gd name="adj" fmla="val 17647"/>
             </a:avLst>
           </a:prstGeom>
           <a:solidFill>
@@ -9888,7 +10372,7 @@
                 <a:ea typeface="Malgun Gothic" pitchFamily="34" charset="-122"/>
                 <a:cs typeface="Malgun Gothic" pitchFamily="34" charset="-120"/>
               </a:rPr>
-              <a:t>다음 문제</a:t>
+              <a:t>비슷하게 한 것 같아요</a:t>
             </a:r>
             <a:endParaRPr lang="en-US" sz="1000" dirty="0"/>
           </a:p>
@@ -9896,18 +10380,18 @@
       </p:sp>
       <p:sp>
         <p:nvSpPr>
-          <p:cNvPr id="39" name="Text 36"/>
-          <p:cNvSpPr/>
-          <p:nvPr/>
-        </p:nvSpPr>
-        <p:spPr>
-          <a:xfrm>
-            <a:off x="4805172" y="3749040"/>
-            <a:ext cx="955548" cy="329184"/>
+          <p:cNvPr id="55" name="Text 52"/>
+          <p:cNvSpPr/>
+          <p:nvPr/>
+        </p:nvSpPr>
+        <p:spPr>
+          <a:xfrm>
+            <a:off x="6263640" y="3493008"/>
+            <a:ext cx="1965960" cy="310896"/>
           </a:xfrm>
           <a:prstGeom prst="roundRect">
             <a:avLst>
-              <a:gd name="adj" fmla="val 16667"/>
+              <a:gd name="adj" fmla="val 17647"/>
             </a:avLst>
           </a:prstGeom>
           <a:solidFill>
@@ -9935,7 +10419,7 @@
                 <a:ea typeface="Malgun Gothic" pitchFamily="34" charset="-122"/>
                 <a:cs typeface="Malgun Gothic" pitchFamily="34" charset="-120"/>
               </a:rPr>
-              <a:t>단어 비교하기</a:t>
+              <a:t>다시 해볼래요</a:t>
             </a:r>
             <a:endParaRPr lang="en-US" sz="1000" dirty="0"/>
           </a:p>
@@ -9943,18 +10427,18 @@
       </p:sp>
       <p:sp>
         <p:nvSpPr>
-          <p:cNvPr id="40" name="Shape 37"/>
-          <p:cNvSpPr/>
-          <p:nvPr/>
-        </p:nvSpPr>
-        <p:spPr>
-          <a:xfrm>
-            <a:off x="6446520" y="914400"/>
-            <a:ext cx="2240280" cy="3886200"/>
+          <p:cNvPr id="56" name="Text 53"/>
+          <p:cNvSpPr/>
+          <p:nvPr/>
+        </p:nvSpPr>
+        <p:spPr>
+          <a:xfrm>
+            <a:off x="6263640" y="3877056"/>
+            <a:ext cx="1965960" cy="310896"/>
           </a:xfrm>
           <a:prstGeom prst="roundRect">
             <a:avLst>
-              <a:gd name="adj" fmla="val 3265"/>
+              <a:gd name="adj" fmla="val 17647"/>
             </a:avLst>
           </a:prstGeom>
           <a:solidFill>
@@ -9964,79 +10448,17 @@
             <a:solidFill>
               <a:schemeClr val="accent3"/>
             </a:solidFill>
-            <a:prstDash val="solid"/>
           </a:ln>
         </p:spPr>
-      </p:sp>
-      <p:sp>
-        <p:nvSpPr>
-          <p:cNvPr id="41" name="Text 38"/>
-          <p:cNvSpPr txBox="1"/>
-          <p:nvPr/>
-        </p:nvSpPr>
-        <p:spPr>
-          <a:xfrm>
-            <a:off x="6629400" y="1097280"/>
-            <a:ext cx="1920240" cy="320040"/>
-          </a:xfrm>
-          <a:prstGeom prst="rect">
-            <a:avLst/>
-          </a:prstGeom>
-          <a:noFill/>
-          <a:ln/>
-        </p:spPr>
-        <p:txBody>
-          <a:bodyPr wrap="square" lIns="0" tIns="0" rIns="0" bIns="0" rtlCol="0" anchor="t"/>
-          <a:lstStyle/>
-          <a:p>
-            <a:pPr indent="0" marL="0">
-              <a:buNone/>
-            </a:pPr>
-            <a:r>
-              <a:rPr lang="en-US" sz="1400" b="1" dirty="0">
-                <a:solidFill>
-                  <a:schemeClr val="accent2"/>
-                </a:solidFill>
-                <a:latin typeface="Malgun Gothic" pitchFamily="34" charset="0"/>
-                <a:ea typeface="Malgun Gothic" pitchFamily="34" charset="-122"/>
-                <a:cs typeface="Malgun Gothic" pitchFamily="34" charset="-120"/>
-              </a:rPr>
-              <a:t>정할 것</a:t>
-            </a:r>
-            <a:endParaRPr lang="en-US" sz="1400" dirty="0"/>
-          </a:p>
-        </p:txBody>
-      </p:sp>
-      <p:sp>
-        <p:nvSpPr>
-          <p:cNvPr id="42" name="Text 39"/>
-          <p:cNvSpPr txBox="1"/>
-          <p:nvPr/>
-        </p:nvSpPr>
-        <p:spPr>
-          <a:xfrm>
-            <a:off x="6629400" y="1508760"/>
-            <a:ext cx="1920240" cy="3108960"/>
-          </a:xfrm>
-          <a:prstGeom prst="rect">
-            <a:avLst/>
-          </a:prstGeom>
-          <a:noFill/>
-          <a:ln/>
-        </p:spPr>
-        <p:txBody>
-          <a:bodyPr wrap="square" lIns="0" tIns="0" rIns="0" bIns="0" rtlCol="0" anchor="t"/>
-          <a:lstStyle/>
-          <a:p>
-            <a:pPr marL="342900" indent="-342900">
-              <a:spcAft>
-                <a:spcPts val="800"/>
-              </a:spcAft>
-              <a:buSzPct val="100000"/>
-              <a:buChar char="•"/>
-            </a:pPr>
-            <a:r>
-              <a:rPr lang="en-US" sz="1200" dirty="0">
+        <p:txBody>
+          <a:bodyPr wrap="square" lIns="0" tIns="0" rIns="0" bIns="0" rtlCol="0" anchor="ctr"/>
+          <a:lstStyle/>
+          <a:p>
+            <a:pPr algn="ctr" indent="0" marL="0">
+              <a:buNone/>
+            </a:pPr>
+            <a:r>
+              <a:rPr lang="en-US" sz="1000" dirty="0">
                 <a:solidFill>
                   <a:schemeClr val="tx1"/>
                 </a:solidFill>
@@ -10044,30 +10466,9 @@
                 <a:ea typeface="Malgun Gothic" pitchFamily="34" charset="-122"/>
                 <a:cs typeface="Malgun Gothic" pitchFamily="34" charset="-120"/>
               </a:rPr>
-              <a:t>점수 · 정답/오답 표시를 둘까?</a:t>
-            </a:r>
-            <a:endParaRPr lang="en-US" sz="1200" dirty="0"/>
-          </a:p>
-          <a:p>
-            <a:pPr marL="342900" indent="-342900">
-              <a:spcAft>
-                <a:spcPts val="800"/>
-              </a:spcAft>
-              <a:buSzPct val="100000"/>
-              <a:buChar char="•"/>
-            </a:pPr>
-            <a:r>
-              <a:rPr lang="en-US" sz="1200" dirty="0">
-                <a:solidFill>
-                  <a:schemeClr val="tx1"/>
-                </a:solidFill>
-                <a:latin typeface="Malgun Gothic" pitchFamily="34" charset="0"/>
-                <a:ea typeface="Malgun Gothic" pitchFamily="34" charset="-122"/>
-                <a:cs typeface="Malgun Gothic" pitchFamily="34" charset="-120"/>
-              </a:rPr>
-              <a:t>두지 않으면: 고른 뒤 뜻과 근거, 지역 비교로 연결 (왼쪽 화면)</a:t>
-            </a:r>
-            <a:endParaRPr lang="en-US" sz="1200" dirty="0"/>
+              <a:t>다른 동작 영상 보기</a:t>
+            </a:r>
+            <a:endParaRPr lang="en-US" sz="1000" dirty="0"/>
           </a:p>
         </p:txBody>
       </p:sp>
@@ -10176,7 +10577,7 @@
                 <a:ea typeface="Malgun Gothic" pitchFamily="34" charset="-122"/>
                 <a:cs typeface="Malgun Gothic" pitchFamily="34" charset="-120"/>
               </a:rPr>
-              <a:t>지금 어디까지 왔나요</a:t>
+              <a:t>앱 레이아웃 ③ 학습하기 · 뜻 맞히기</a:t>
             </a:r>
             <a:endParaRPr lang="en-US" sz="2600" dirty="0"/>
           </a:p>
@@ -10190,16 +10591,1266 @@
         </p:nvSpPr>
         <p:spPr>
           <a:xfrm>
-            <a:off x="457200" y="1097280"/>
-            <a:ext cx="2615184" cy="3474720"/>
+            <a:off x="822960" y="914400"/>
+            <a:ext cx="2240280" cy="3886200"/>
           </a:xfrm>
           <a:prstGeom prst="roundRect">
             <a:avLst>
-              <a:gd name="adj" fmla="val 2797"/>
+              <a:gd name="adj" fmla="val 8163"/>
             </a:avLst>
           </a:prstGeom>
           <a:solidFill>
-            <a:schemeClr val="bg2"/>
+            <a:schemeClr val="bg1"/>
+          </a:solidFill>
+          <a:ln w="19050">
+            <a:solidFill>
+              <a:schemeClr val="tx1"/>
+            </a:solidFill>
+            <a:prstDash val="solid"/>
+          </a:ln>
+        </p:spPr>
+      </p:sp>
+      <p:sp>
+        <p:nvSpPr>
+          <p:cNvPr id="5" name="Text 2"/>
+          <p:cNvSpPr txBox="1"/>
+          <p:nvPr/>
+        </p:nvSpPr>
+        <p:spPr>
+          <a:xfrm>
+            <a:off x="822960" y="4846320"/>
+            <a:ext cx="2240280" cy="228600"/>
+          </a:xfrm>
+          <a:prstGeom prst="rect">
+            <a:avLst/>
+          </a:prstGeom>
+          <a:noFill/>
+          <a:ln/>
+        </p:spPr>
+        <p:txBody>
+          <a:bodyPr wrap="square" lIns="0" tIns="0" rIns="0" bIns="0" rtlCol="0" anchor="t"/>
+          <a:lstStyle/>
+          <a:p>
+            <a:pPr algn="ctr" indent="0" marL="0">
+              <a:buNone/>
+            </a:pPr>
+            <a:r>
+              <a:rPr lang="en-US" sz="1100" b="1" dirty="0">
+                <a:solidFill>
+                  <a:schemeClr val="tx2"/>
+                </a:solidFill>
+                <a:latin typeface="Malgun Gothic" pitchFamily="34" charset="0"/>
+                <a:ea typeface="Malgun Gothic" pitchFamily="34" charset="-122"/>
+                <a:cs typeface="Malgun Gothic" pitchFamily="34" charset="-120"/>
+              </a:rPr>
+              <a:t>문제</a:t>
+            </a:r>
+            <a:endParaRPr lang="en-US" sz="1100" dirty="0"/>
+          </a:p>
+        </p:txBody>
+      </p:sp>
+      <p:sp>
+        <p:nvSpPr>
+          <p:cNvPr id="6" name="Shape 3"/>
+          <p:cNvSpPr/>
+          <p:nvPr/>
+        </p:nvSpPr>
+        <p:spPr>
+          <a:xfrm>
+            <a:off x="822960" y="4389120"/>
+            <a:ext cx="2240280" cy="0"/>
+          </a:xfrm>
+          <a:prstGeom prst="line">
+            <a:avLst/>
+          </a:prstGeom>
+          <a:noFill/>
+          <a:ln w="9525">
+            <a:solidFill>
+              <a:schemeClr val="accent3"/>
+            </a:solidFill>
+            <a:prstDash val="solid"/>
+          </a:ln>
+        </p:spPr>
+      </p:sp>
+      <p:sp>
+        <p:nvSpPr>
+          <p:cNvPr id="7" name="Text 4"/>
+          <p:cNvSpPr txBox="1"/>
+          <p:nvPr/>
+        </p:nvSpPr>
+        <p:spPr>
+          <a:xfrm>
+            <a:off x="868680" y="4462272"/>
+            <a:ext cx="716280" cy="228600"/>
+          </a:xfrm>
+          <a:prstGeom prst="rect">
+            <a:avLst/>
+          </a:prstGeom>
+          <a:noFill/>
+          <a:ln/>
+        </p:spPr>
+        <p:txBody>
+          <a:bodyPr wrap="square" lIns="0" tIns="0" rIns="0" bIns="0" rtlCol="0" anchor="ctr"/>
+          <a:lstStyle/>
+          <a:p>
+            <a:pPr algn="ctr" indent="0" marL="0">
+              <a:buNone/>
+            </a:pPr>
+            <a:r>
+              <a:rPr lang="en-US" sz="1000" dirty="0">
+                <a:solidFill>
+                  <a:schemeClr val="tx2"/>
+                </a:solidFill>
+                <a:latin typeface="Malgun Gothic" pitchFamily="34" charset="0"/>
+                <a:ea typeface="Malgun Gothic" pitchFamily="34" charset="-122"/>
+                <a:cs typeface="Malgun Gothic" pitchFamily="34" charset="-120"/>
+              </a:rPr>
+              <a:t>검색</a:t>
+            </a:r>
+            <a:endParaRPr lang="en-US" sz="1000" dirty="0"/>
+          </a:p>
+        </p:txBody>
+      </p:sp>
+      <p:sp>
+        <p:nvSpPr>
+          <p:cNvPr id="8" name="Text 5"/>
+          <p:cNvSpPr txBox="1"/>
+          <p:nvPr/>
+        </p:nvSpPr>
+        <p:spPr>
+          <a:xfrm>
+            <a:off x="1584960" y="4462272"/>
+            <a:ext cx="716280" cy="228600"/>
+          </a:xfrm>
+          <a:prstGeom prst="rect">
+            <a:avLst/>
+          </a:prstGeom>
+          <a:noFill/>
+          <a:ln/>
+        </p:spPr>
+        <p:txBody>
+          <a:bodyPr wrap="square" lIns="0" tIns="0" rIns="0" bIns="0" rtlCol="0" anchor="ctr"/>
+          <a:lstStyle/>
+          <a:p>
+            <a:pPr algn="ctr" indent="0" marL="0">
+              <a:buNone/>
+            </a:pPr>
+            <a:r>
+              <a:rPr lang="en-US" sz="1000" b="1" dirty="0">
+                <a:solidFill>
+                  <a:schemeClr val="accent1"/>
+                </a:solidFill>
+                <a:latin typeface="Malgun Gothic" pitchFamily="34" charset="0"/>
+                <a:ea typeface="Malgun Gothic" pitchFamily="34" charset="-122"/>
+                <a:cs typeface="Malgun Gothic" pitchFamily="34" charset="-120"/>
+              </a:rPr>
+              <a:t>학습하기</a:t>
+            </a:r>
+            <a:endParaRPr lang="en-US" sz="1000" dirty="0"/>
+          </a:p>
+        </p:txBody>
+      </p:sp>
+      <p:sp>
+        <p:nvSpPr>
+          <p:cNvPr id="9" name="Text 6"/>
+          <p:cNvSpPr txBox="1"/>
+          <p:nvPr/>
+        </p:nvSpPr>
+        <p:spPr>
+          <a:xfrm>
+            <a:off x="2301240" y="4462272"/>
+            <a:ext cx="716280" cy="228600"/>
+          </a:xfrm>
+          <a:prstGeom prst="rect">
+            <a:avLst/>
+          </a:prstGeom>
+          <a:noFill/>
+          <a:ln/>
+        </p:spPr>
+        <p:txBody>
+          <a:bodyPr wrap="square" lIns="0" tIns="0" rIns="0" bIns="0" rtlCol="0" anchor="ctr"/>
+          <a:lstStyle/>
+          <a:p>
+            <a:pPr algn="ctr" indent="0" marL="0">
+              <a:buNone/>
+            </a:pPr>
+            <a:r>
+              <a:rPr lang="en-US" sz="1000" dirty="0">
+                <a:solidFill>
+                  <a:schemeClr val="tx2"/>
+                </a:solidFill>
+                <a:latin typeface="Malgun Gothic" pitchFamily="34" charset="0"/>
+                <a:ea typeface="Malgun Gothic" pitchFamily="34" charset="-122"/>
+                <a:cs typeface="Malgun Gothic" pitchFamily="34" charset="-120"/>
+              </a:rPr>
+              <a:t>직접 해보기</a:t>
+            </a:r>
+            <a:endParaRPr lang="en-US" sz="1000" dirty="0"/>
+          </a:p>
+        </p:txBody>
+      </p:sp>
+      <p:sp>
+        <p:nvSpPr>
+          <p:cNvPr id="10" name="Text 7"/>
+          <p:cNvSpPr txBox="1"/>
+          <p:nvPr/>
+        </p:nvSpPr>
+        <p:spPr>
+          <a:xfrm>
+            <a:off x="960120" y="1078992"/>
+            <a:ext cx="1965960" cy="274320"/>
+          </a:xfrm>
+          <a:prstGeom prst="rect">
+            <a:avLst/>
+          </a:prstGeom>
+          <a:noFill/>
+          <a:ln/>
+        </p:spPr>
+        <p:txBody>
+          <a:bodyPr wrap="square" lIns="0" tIns="0" rIns="0" bIns="0" rtlCol="0" anchor="ctr"/>
+          <a:lstStyle/>
+          <a:p>
+            <a:pPr indent="0" marL="0">
+              <a:buNone/>
+            </a:pPr>
+            <a:r>
+              <a:rPr lang="en-US" sz="1400" b="1" dirty="0">
+                <a:solidFill>
+                  <a:schemeClr val="tx1"/>
+                </a:solidFill>
+                <a:latin typeface="Malgun Gothic" pitchFamily="34" charset="0"/>
+                <a:ea typeface="Malgun Gothic" pitchFamily="34" charset="-122"/>
+                <a:cs typeface="Malgun Gothic" pitchFamily="34" charset="-120"/>
+              </a:rPr>
+              <a:t>영상 보고 뜻 맞히기</a:t>
+            </a:r>
+            <a:endParaRPr lang="en-US" sz="1400" dirty="0"/>
+          </a:p>
+        </p:txBody>
+      </p:sp>
+      <p:sp>
+        <p:nvSpPr>
+          <p:cNvPr id="11" name="Shape 8"/>
+          <p:cNvSpPr/>
+          <p:nvPr/>
+        </p:nvSpPr>
+        <p:spPr>
+          <a:xfrm>
+            <a:off x="960120" y="1444752"/>
+            <a:ext cx="1965960" cy="1280160"/>
+          </a:xfrm>
+          <a:prstGeom prst="rect">
+            <a:avLst/>
+          </a:prstGeom>
+          <a:solidFill>
+            <a:schemeClr val="accent4"/>
+          </a:solidFill>
+          <a:ln w="9525">
+            <a:solidFill>
+              <a:schemeClr val="accent3"/>
+            </a:solidFill>
+            <a:prstDash val="dash"/>
+          </a:ln>
+        </p:spPr>
+      </p:sp>
+      <p:sp>
+        <p:nvSpPr>
+          <p:cNvPr id="12" name="Shape 9"/>
+          <p:cNvSpPr/>
+          <p:nvPr/>
+        </p:nvSpPr>
+        <p:spPr>
+          <a:xfrm>
+            <a:off x="960120" y="1444752"/>
+            <a:ext cx="1965960" cy="1280160"/>
+          </a:xfrm>
+          <a:prstGeom prst="line">
+            <a:avLst/>
+          </a:prstGeom>
+          <a:noFill/>
+          <a:ln w="6350">
+            <a:solidFill>
+              <a:schemeClr val="accent3"/>
+            </a:solidFill>
+            <a:prstDash val="solid"/>
+          </a:ln>
+        </p:spPr>
+      </p:sp>
+      <p:sp>
+        <p:nvSpPr>
+          <p:cNvPr id="13" name="Shape 10"/>
+          <p:cNvSpPr/>
+          <p:nvPr/>
+        </p:nvSpPr>
+        <p:spPr>
+          <a:xfrm>
+            <a:off x="960120" y="2724912"/>
+            <a:ext cx="1965960" cy="-1280160"/>
+          </a:xfrm>
+          <a:prstGeom prst="line">
+            <a:avLst/>
+          </a:prstGeom>
+          <a:noFill/>
+          <a:ln w="6350">
+            <a:solidFill>
+              <a:schemeClr val="accent3"/>
+            </a:solidFill>
+            <a:prstDash val="solid"/>
+          </a:ln>
+        </p:spPr>
+      </p:sp>
+      <p:sp>
+        <p:nvSpPr>
+          <p:cNvPr id="14" name="Text 11"/>
+          <p:cNvSpPr txBox="1"/>
+          <p:nvPr/>
+        </p:nvSpPr>
+        <p:spPr>
+          <a:xfrm>
+            <a:off x="960120" y="1965960"/>
+            <a:ext cx="1965960" cy="237744"/>
+          </a:xfrm>
+          <a:prstGeom prst="rect">
+            <a:avLst/>
+          </a:prstGeom>
+          <a:solidFill>
+            <a:schemeClr val="accent4"/>
+          </a:solidFill>
+          <a:ln/>
+        </p:spPr>
+        <p:txBody>
+          <a:bodyPr wrap="square" lIns="0" tIns="0" rIns="0" bIns="0" rtlCol="0" anchor="t"/>
+          <a:lstStyle/>
+          <a:p>
+            <a:pPr algn="ctr" indent="0" marL="0">
+              <a:buNone/>
+            </a:pPr>
+            <a:r>
+              <a:rPr lang="en-US" sz="1000" dirty="0">
+                <a:solidFill>
+                  <a:schemeClr val="tx2"/>
+                </a:solidFill>
+                <a:latin typeface="Malgun Gothic" pitchFamily="34" charset="0"/>
+                <a:ea typeface="Malgun Gothic" pitchFamily="34" charset="-122"/>
+                <a:cs typeface="Malgun Gothic" pitchFamily="34" charset="-120"/>
+              </a:rPr>
+              <a:t>수어 영상</a:t>
+            </a:r>
+            <a:endParaRPr lang="en-US" sz="1000" dirty="0"/>
+          </a:p>
+        </p:txBody>
+      </p:sp>
+      <p:sp>
+        <p:nvSpPr>
+          <p:cNvPr id="15" name="Text 12"/>
+          <p:cNvSpPr txBox="1"/>
+          <p:nvPr/>
+        </p:nvSpPr>
+        <p:spPr>
+          <a:xfrm>
+            <a:off x="960120" y="2816352"/>
+            <a:ext cx="1965960" cy="219456"/>
+          </a:xfrm>
+          <a:prstGeom prst="rect">
+            <a:avLst/>
+          </a:prstGeom>
+          <a:noFill/>
+          <a:ln/>
+        </p:spPr>
+        <p:txBody>
+          <a:bodyPr wrap="square" lIns="0" tIns="0" rIns="0" bIns="0" rtlCol="0" anchor="ctr"/>
+          <a:lstStyle/>
+          <a:p>
+            <a:pPr indent="0" marL="0">
+              <a:buNone/>
+            </a:pPr>
+            <a:r>
+              <a:rPr lang="en-US" sz="1000" b="1" dirty="0">
+                <a:solidFill>
+                  <a:schemeClr val="tx1"/>
+                </a:solidFill>
+                <a:latin typeface="Malgun Gothic" pitchFamily="34" charset="0"/>
+                <a:ea typeface="Malgun Gothic" pitchFamily="34" charset="-122"/>
+                <a:cs typeface="Malgun Gothic" pitchFamily="34" charset="-120"/>
+              </a:rPr>
+              <a:t>이 수어의 뜻은?</a:t>
+            </a:r>
+            <a:endParaRPr lang="en-US" sz="1000" dirty="0"/>
+          </a:p>
+        </p:txBody>
+      </p:sp>
+      <p:sp>
+        <p:nvSpPr>
+          <p:cNvPr id="16" name="Text 13"/>
+          <p:cNvSpPr/>
+          <p:nvPr/>
+        </p:nvSpPr>
+        <p:spPr>
+          <a:xfrm>
+            <a:off x="960120" y="3136392"/>
+            <a:ext cx="955548" cy="329184"/>
+          </a:xfrm>
+          <a:prstGeom prst="roundRect">
+            <a:avLst>
+              <a:gd name="adj" fmla="val 16667"/>
+            </a:avLst>
+          </a:prstGeom>
+          <a:solidFill>
+            <a:schemeClr val="bg1"/>
+          </a:solidFill>
+          <a:ln w="9525">
+            <a:solidFill>
+              <a:schemeClr val="accent3"/>
+            </a:solidFill>
+          </a:ln>
+        </p:spPr>
+        <p:txBody>
+          <a:bodyPr wrap="square" lIns="0" tIns="0" rIns="0" bIns="0" rtlCol="0" anchor="ctr"/>
+          <a:lstStyle/>
+          <a:p>
+            <a:pPr algn="ctr" indent="0" marL="0">
+              <a:buNone/>
+            </a:pPr>
+            <a:r>
+              <a:rPr lang="en-US" sz="1000" dirty="0">
+                <a:solidFill>
+                  <a:schemeClr val="tx1"/>
+                </a:solidFill>
+                <a:latin typeface="Malgun Gothic" pitchFamily="34" charset="0"/>
+                <a:ea typeface="Malgun Gothic" pitchFamily="34" charset="-122"/>
+                <a:cs typeface="Malgun Gothic" pitchFamily="34" charset="-120"/>
+              </a:rPr>
+              <a:t>택시</a:t>
+            </a:r>
+            <a:endParaRPr lang="en-US" sz="1000" dirty="0"/>
+          </a:p>
+        </p:txBody>
+      </p:sp>
+      <p:sp>
+        <p:nvSpPr>
+          <p:cNvPr id="17" name="Text 14"/>
+          <p:cNvSpPr/>
+          <p:nvPr/>
+        </p:nvSpPr>
+        <p:spPr>
+          <a:xfrm>
+            <a:off x="1970532" y="3136392"/>
+            <a:ext cx="955548" cy="329184"/>
+          </a:xfrm>
+          <a:prstGeom prst="roundRect">
+            <a:avLst>
+              <a:gd name="adj" fmla="val 16667"/>
+            </a:avLst>
+          </a:prstGeom>
+          <a:solidFill>
+            <a:schemeClr val="bg1"/>
+          </a:solidFill>
+          <a:ln w="9525">
+            <a:solidFill>
+              <a:schemeClr val="accent3"/>
+            </a:solidFill>
+          </a:ln>
+        </p:spPr>
+        <p:txBody>
+          <a:bodyPr wrap="square" lIns="0" tIns="0" rIns="0" bIns="0" rtlCol="0" anchor="ctr"/>
+          <a:lstStyle/>
+          <a:p>
+            <a:pPr algn="ctr" indent="0" marL="0">
+              <a:buNone/>
+            </a:pPr>
+            <a:r>
+              <a:rPr lang="en-US" sz="1000" dirty="0">
+                <a:solidFill>
+                  <a:schemeClr val="tx1"/>
+                </a:solidFill>
+                <a:latin typeface="Malgun Gothic" pitchFamily="34" charset="0"/>
+                <a:ea typeface="Malgun Gothic" pitchFamily="34" charset="-122"/>
+                <a:cs typeface="Malgun Gothic" pitchFamily="34" charset="-120"/>
+              </a:rPr>
+              <a:t>버스</a:t>
+            </a:r>
+            <a:endParaRPr lang="en-US" sz="1000" dirty="0"/>
+          </a:p>
+        </p:txBody>
+      </p:sp>
+      <p:sp>
+        <p:nvSpPr>
+          <p:cNvPr id="18" name="Text 15"/>
+          <p:cNvSpPr/>
+          <p:nvPr/>
+        </p:nvSpPr>
+        <p:spPr>
+          <a:xfrm>
+            <a:off x="960120" y="3547872"/>
+            <a:ext cx="955548" cy="329184"/>
+          </a:xfrm>
+          <a:prstGeom prst="roundRect">
+            <a:avLst>
+              <a:gd name="adj" fmla="val 16667"/>
+            </a:avLst>
+          </a:prstGeom>
+          <a:solidFill>
+            <a:schemeClr val="bg1"/>
+          </a:solidFill>
+          <a:ln w="9525">
+            <a:solidFill>
+              <a:schemeClr val="accent3"/>
+            </a:solidFill>
+          </a:ln>
+        </p:spPr>
+        <p:txBody>
+          <a:bodyPr wrap="square" lIns="0" tIns="0" rIns="0" bIns="0" rtlCol="0" anchor="ctr"/>
+          <a:lstStyle/>
+          <a:p>
+            <a:pPr algn="ctr" indent="0" marL="0">
+              <a:buNone/>
+            </a:pPr>
+            <a:r>
+              <a:rPr lang="en-US" sz="1000" dirty="0">
+                <a:solidFill>
+                  <a:schemeClr val="tx1"/>
+                </a:solidFill>
+                <a:latin typeface="Malgun Gothic" pitchFamily="34" charset="0"/>
+                <a:ea typeface="Malgun Gothic" pitchFamily="34" charset="-122"/>
+                <a:cs typeface="Malgun Gothic" pitchFamily="34" charset="-120"/>
+              </a:rPr>
+              <a:t>지하철</a:t>
+            </a:r>
+            <a:endParaRPr lang="en-US" sz="1000" dirty="0"/>
+          </a:p>
+        </p:txBody>
+      </p:sp>
+      <p:sp>
+        <p:nvSpPr>
+          <p:cNvPr id="19" name="Text 16"/>
+          <p:cNvSpPr/>
+          <p:nvPr/>
+        </p:nvSpPr>
+        <p:spPr>
+          <a:xfrm>
+            <a:off x="1970532" y="3547872"/>
+            <a:ext cx="955548" cy="329184"/>
+          </a:xfrm>
+          <a:prstGeom prst="roundRect">
+            <a:avLst>
+              <a:gd name="adj" fmla="val 16667"/>
+            </a:avLst>
+          </a:prstGeom>
+          <a:solidFill>
+            <a:schemeClr val="bg1"/>
+          </a:solidFill>
+          <a:ln w="9525">
+            <a:solidFill>
+              <a:schemeClr val="accent3"/>
+            </a:solidFill>
+          </a:ln>
+        </p:spPr>
+        <p:txBody>
+          <a:bodyPr wrap="square" lIns="0" tIns="0" rIns="0" bIns="0" rtlCol="0" anchor="ctr"/>
+          <a:lstStyle/>
+          <a:p>
+            <a:pPr algn="ctr" indent="0" marL="0">
+              <a:buNone/>
+            </a:pPr>
+            <a:r>
+              <a:rPr lang="en-US" sz="1000" dirty="0">
+                <a:solidFill>
+                  <a:schemeClr val="tx1"/>
+                </a:solidFill>
+                <a:latin typeface="Malgun Gothic" pitchFamily="34" charset="0"/>
+                <a:ea typeface="Malgun Gothic" pitchFamily="34" charset="-122"/>
+                <a:cs typeface="Malgun Gothic" pitchFamily="34" charset="-120"/>
+              </a:rPr>
+              <a:t>학교</a:t>
+            </a:r>
+            <a:endParaRPr lang="en-US" sz="1000" dirty="0"/>
+          </a:p>
+        </p:txBody>
+      </p:sp>
+      <p:sp>
+        <p:nvSpPr>
+          <p:cNvPr id="20" name="Shape 17"/>
+          <p:cNvSpPr/>
+          <p:nvPr/>
+        </p:nvSpPr>
+        <p:spPr>
+          <a:xfrm>
+            <a:off x="3227832" y="2651760"/>
+            <a:ext cx="274320" cy="274320"/>
+          </a:xfrm>
+          <a:prstGeom prst="rightArrow">
+            <a:avLst/>
+          </a:prstGeom>
+          <a:solidFill>
+            <a:schemeClr val="accent2"/>
+          </a:solidFill>
+          <a:ln w="12700">
+            <a:solidFill>
+              <a:schemeClr val="accent2"/>
+            </a:solidFill>
+            <a:prstDash val="solid"/>
+          </a:ln>
+        </p:spPr>
+      </p:sp>
+      <p:sp>
+        <p:nvSpPr>
+          <p:cNvPr id="21" name="Shape 18"/>
+          <p:cNvSpPr/>
+          <p:nvPr/>
+        </p:nvSpPr>
+        <p:spPr>
+          <a:xfrm>
+            <a:off x="3657600" y="914400"/>
+            <a:ext cx="2240280" cy="3886200"/>
+          </a:xfrm>
+          <a:prstGeom prst="roundRect">
+            <a:avLst>
+              <a:gd name="adj" fmla="val 8163"/>
+            </a:avLst>
+          </a:prstGeom>
+          <a:solidFill>
+            <a:schemeClr val="bg1"/>
+          </a:solidFill>
+          <a:ln w="19050">
+            <a:solidFill>
+              <a:schemeClr val="tx1"/>
+            </a:solidFill>
+            <a:prstDash val="solid"/>
+          </a:ln>
+        </p:spPr>
+      </p:sp>
+      <p:sp>
+        <p:nvSpPr>
+          <p:cNvPr id="22" name="Text 19"/>
+          <p:cNvSpPr txBox="1"/>
+          <p:nvPr/>
+        </p:nvSpPr>
+        <p:spPr>
+          <a:xfrm>
+            <a:off x="3657600" y="4846320"/>
+            <a:ext cx="2240280" cy="228600"/>
+          </a:xfrm>
+          <a:prstGeom prst="rect">
+            <a:avLst/>
+          </a:prstGeom>
+          <a:noFill/>
+          <a:ln/>
+        </p:spPr>
+        <p:txBody>
+          <a:bodyPr wrap="square" lIns="0" tIns="0" rIns="0" bIns="0" rtlCol="0" anchor="t"/>
+          <a:lstStyle/>
+          <a:p>
+            <a:pPr algn="ctr" indent="0" marL="0">
+              <a:buNone/>
+            </a:pPr>
+            <a:r>
+              <a:rPr lang="en-US" sz="1100" b="1" dirty="0">
+                <a:solidFill>
+                  <a:schemeClr val="tx2"/>
+                </a:solidFill>
+                <a:latin typeface="Malgun Gothic" pitchFamily="34" charset="0"/>
+                <a:ea typeface="Malgun Gothic" pitchFamily="34" charset="-122"/>
+                <a:cs typeface="Malgun Gothic" pitchFamily="34" charset="-120"/>
+              </a:rPr>
+              <a:t>고른 뒤</a:t>
+            </a:r>
+            <a:endParaRPr lang="en-US" sz="1100" dirty="0"/>
+          </a:p>
+        </p:txBody>
+      </p:sp>
+      <p:sp>
+        <p:nvSpPr>
+          <p:cNvPr id="23" name="Shape 20"/>
+          <p:cNvSpPr/>
+          <p:nvPr/>
+        </p:nvSpPr>
+        <p:spPr>
+          <a:xfrm>
+            <a:off x="3657600" y="4389120"/>
+            <a:ext cx="2240280" cy="0"/>
+          </a:xfrm>
+          <a:prstGeom prst="line">
+            <a:avLst/>
+          </a:prstGeom>
+          <a:noFill/>
+          <a:ln w="9525">
+            <a:solidFill>
+              <a:schemeClr val="accent3"/>
+            </a:solidFill>
+            <a:prstDash val="solid"/>
+          </a:ln>
+        </p:spPr>
+      </p:sp>
+      <p:sp>
+        <p:nvSpPr>
+          <p:cNvPr id="24" name="Text 21"/>
+          <p:cNvSpPr txBox="1"/>
+          <p:nvPr/>
+        </p:nvSpPr>
+        <p:spPr>
+          <a:xfrm>
+            <a:off x="3703320" y="4462272"/>
+            <a:ext cx="716280" cy="228600"/>
+          </a:xfrm>
+          <a:prstGeom prst="rect">
+            <a:avLst/>
+          </a:prstGeom>
+          <a:noFill/>
+          <a:ln/>
+        </p:spPr>
+        <p:txBody>
+          <a:bodyPr wrap="square" lIns="0" tIns="0" rIns="0" bIns="0" rtlCol="0" anchor="ctr"/>
+          <a:lstStyle/>
+          <a:p>
+            <a:pPr algn="ctr" indent="0" marL="0">
+              <a:buNone/>
+            </a:pPr>
+            <a:r>
+              <a:rPr lang="en-US" sz="1000" dirty="0">
+                <a:solidFill>
+                  <a:schemeClr val="tx2"/>
+                </a:solidFill>
+                <a:latin typeface="Malgun Gothic" pitchFamily="34" charset="0"/>
+                <a:ea typeface="Malgun Gothic" pitchFamily="34" charset="-122"/>
+                <a:cs typeface="Malgun Gothic" pitchFamily="34" charset="-120"/>
+              </a:rPr>
+              <a:t>검색</a:t>
+            </a:r>
+            <a:endParaRPr lang="en-US" sz="1000" dirty="0"/>
+          </a:p>
+        </p:txBody>
+      </p:sp>
+      <p:sp>
+        <p:nvSpPr>
+          <p:cNvPr id="25" name="Text 22"/>
+          <p:cNvSpPr txBox="1"/>
+          <p:nvPr/>
+        </p:nvSpPr>
+        <p:spPr>
+          <a:xfrm>
+            <a:off x="4419600" y="4462272"/>
+            <a:ext cx="716280" cy="228600"/>
+          </a:xfrm>
+          <a:prstGeom prst="rect">
+            <a:avLst/>
+          </a:prstGeom>
+          <a:noFill/>
+          <a:ln/>
+        </p:spPr>
+        <p:txBody>
+          <a:bodyPr wrap="square" lIns="0" tIns="0" rIns="0" bIns="0" rtlCol="0" anchor="ctr"/>
+          <a:lstStyle/>
+          <a:p>
+            <a:pPr algn="ctr" indent="0" marL="0">
+              <a:buNone/>
+            </a:pPr>
+            <a:r>
+              <a:rPr lang="en-US" sz="1000" b="1" dirty="0">
+                <a:solidFill>
+                  <a:schemeClr val="accent1"/>
+                </a:solidFill>
+                <a:latin typeface="Malgun Gothic" pitchFamily="34" charset="0"/>
+                <a:ea typeface="Malgun Gothic" pitchFamily="34" charset="-122"/>
+                <a:cs typeface="Malgun Gothic" pitchFamily="34" charset="-120"/>
+              </a:rPr>
+              <a:t>학습하기</a:t>
+            </a:r>
+            <a:endParaRPr lang="en-US" sz="1000" dirty="0"/>
+          </a:p>
+        </p:txBody>
+      </p:sp>
+      <p:sp>
+        <p:nvSpPr>
+          <p:cNvPr id="26" name="Text 23"/>
+          <p:cNvSpPr txBox="1"/>
+          <p:nvPr/>
+        </p:nvSpPr>
+        <p:spPr>
+          <a:xfrm>
+            <a:off x="5135880" y="4462272"/>
+            <a:ext cx="716280" cy="228600"/>
+          </a:xfrm>
+          <a:prstGeom prst="rect">
+            <a:avLst/>
+          </a:prstGeom>
+          <a:noFill/>
+          <a:ln/>
+        </p:spPr>
+        <p:txBody>
+          <a:bodyPr wrap="square" lIns="0" tIns="0" rIns="0" bIns="0" rtlCol="0" anchor="ctr"/>
+          <a:lstStyle/>
+          <a:p>
+            <a:pPr algn="ctr" indent="0" marL="0">
+              <a:buNone/>
+            </a:pPr>
+            <a:r>
+              <a:rPr lang="en-US" sz="1000" dirty="0">
+                <a:solidFill>
+                  <a:schemeClr val="tx2"/>
+                </a:solidFill>
+                <a:latin typeface="Malgun Gothic" pitchFamily="34" charset="0"/>
+                <a:ea typeface="Malgun Gothic" pitchFamily="34" charset="-122"/>
+                <a:cs typeface="Malgun Gothic" pitchFamily="34" charset="-120"/>
+              </a:rPr>
+              <a:t>직접 해보기</a:t>
+            </a:r>
+            <a:endParaRPr lang="en-US" sz="1000" dirty="0"/>
+          </a:p>
+        </p:txBody>
+      </p:sp>
+      <p:sp>
+        <p:nvSpPr>
+          <p:cNvPr id="27" name="Text 24"/>
+          <p:cNvSpPr txBox="1"/>
+          <p:nvPr/>
+        </p:nvSpPr>
+        <p:spPr>
+          <a:xfrm>
+            <a:off x="3794760" y="1078992"/>
+            <a:ext cx="1965960" cy="274320"/>
+          </a:xfrm>
+          <a:prstGeom prst="rect">
+            <a:avLst/>
+          </a:prstGeom>
+          <a:noFill/>
+          <a:ln/>
+        </p:spPr>
+        <p:txBody>
+          <a:bodyPr wrap="square" lIns="0" tIns="0" rIns="0" bIns="0" rtlCol="0" anchor="ctr"/>
+          <a:lstStyle/>
+          <a:p>
+            <a:pPr indent="0" marL="0">
+              <a:buNone/>
+            </a:pPr>
+            <a:r>
+              <a:rPr lang="en-US" sz="1400" b="1" dirty="0">
+                <a:solidFill>
+                  <a:schemeClr val="tx1"/>
+                </a:solidFill>
+                <a:latin typeface="Malgun Gothic" pitchFamily="34" charset="0"/>
+                <a:ea typeface="Malgun Gothic" pitchFamily="34" charset="-122"/>
+                <a:cs typeface="Malgun Gothic" pitchFamily="34" charset="-120"/>
+              </a:rPr>
+              <a:t>영상 보고 뜻 맞히기</a:t>
+            </a:r>
+            <a:endParaRPr lang="en-US" sz="1400" dirty="0"/>
+          </a:p>
+        </p:txBody>
+      </p:sp>
+      <p:sp>
+        <p:nvSpPr>
+          <p:cNvPr id="28" name="Shape 25"/>
+          <p:cNvSpPr/>
+          <p:nvPr/>
+        </p:nvSpPr>
+        <p:spPr>
+          <a:xfrm>
+            <a:off x="3794760" y="1444752"/>
+            <a:ext cx="1965960" cy="914400"/>
+          </a:xfrm>
+          <a:prstGeom prst="rect">
+            <a:avLst/>
+          </a:prstGeom>
+          <a:solidFill>
+            <a:schemeClr val="accent4"/>
+          </a:solidFill>
+          <a:ln w="9525">
+            <a:solidFill>
+              <a:schemeClr val="accent3"/>
+            </a:solidFill>
+            <a:prstDash val="dash"/>
+          </a:ln>
+        </p:spPr>
+      </p:sp>
+      <p:sp>
+        <p:nvSpPr>
+          <p:cNvPr id="29" name="Shape 26"/>
+          <p:cNvSpPr/>
+          <p:nvPr/>
+        </p:nvSpPr>
+        <p:spPr>
+          <a:xfrm>
+            <a:off x="3794760" y="1444752"/>
+            <a:ext cx="1965960" cy="914400"/>
+          </a:xfrm>
+          <a:prstGeom prst="line">
+            <a:avLst/>
+          </a:prstGeom>
+          <a:noFill/>
+          <a:ln w="6350">
+            <a:solidFill>
+              <a:schemeClr val="accent3"/>
+            </a:solidFill>
+            <a:prstDash val="solid"/>
+          </a:ln>
+        </p:spPr>
+      </p:sp>
+      <p:sp>
+        <p:nvSpPr>
+          <p:cNvPr id="30" name="Shape 27"/>
+          <p:cNvSpPr/>
+          <p:nvPr/>
+        </p:nvSpPr>
+        <p:spPr>
+          <a:xfrm>
+            <a:off x="3794760" y="2359152"/>
+            <a:ext cx="1965960" cy="-914400"/>
+          </a:xfrm>
+          <a:prstGeom prst="line">
+            <a:avLst/>
+          </a:prstGeom>
+          <a:noFill/>
+          <a:ln w="6350">
+            <a:solidFill>
+              <a:schemeClr val="accent3"/>
+            </a:solidFill>
+            <a:prstDash val="solid"/>
+          </a:ln>
+        </p:spPr>
+      </p:sp>
+      <p:sp>
+        <p:nvSpPr>
+          <p:cNvPr id="31" name="Text 28"/>
+          <p:cNvSpPr txBox="1"/>
+          <p:nvPr/>
+        </p:nvSpPr>
+        <p:spPr>
+          <a:xfrm>
+            <a:off x="3794760" y="1783080"/>
+            <a:ext cx="1965960" cy="237744"/>
+          </a:xfrm>
+          <a:prstGeom prst="rect">
+            <a:avLst/>
+          </a:prstGeom>
+          <a:solidFill>
+            <a:schemeClr val="accent4"/>
+          </a:solidFill>
+          <a:ln/>
+        </p:spPr>
+        <p:txBody>
+          <a:bodyPr wrap="square" lIns="0" tIns="0" rIns="0" bIns="0" rtlCol="0" anchor="t"/>
+          <a:lstStyle/>
+          <a:p>
+            <a:pPr algn="ctr" indent="0" marL="0">
+              <a:buNone/>
+            </a:pPr>
+            <a:r>
+              <a:rPr lang="en-US" sz="1000" dirty="0">
+                <a:solidFill>
+                  <a:schemeClr val="tx2"/>
+                </a:solidFill>
+                <a:latin typeface="Malgun Gothic" pitchFamily="34" charset="0"/>
+                <a:ea typeface="Malgun Gothic" pitchFamily="34" charset="-122"/>
+                <a:cs typeface="Malgun Gothic" pitchFamily="34" charset="-120"/>
+              </a:rPr>
+              <a:t>수어 영상</a:t>
+            </a:r>
+            <a:endParaRPr lang="en-US" sz="1000" dirty="0"/>
+          </a:p>
+        </p:txBody>
+      </p:sp>
+      <p:sp>
+        <p:nvSpPr>
+          <p:cNvPr id="32" name="Text 29"/>
+          <p:cNvSpPr txBox="1"/>
+          <p:nvPr/>
+        </p:nvSpPr>
+        <p:spPr>
+          <a:xfrm>
+            <a:off x="3794760" y="2450592"/>
+            <a:ext cx="1965960" cy="219456"/>
+          </a:xfrm>
+          <a:prstGeom prst="rect">
+            <a:avLst/>
+          </a:prstGeom>
+          <a:noFill/>
+          <a:ln/>
+        </p:spPr>
+        <p:txBody>
+          <a:bodyPr wrap="square" lIns="0" tIns="0" rIns="0" bIns="0" rtlCol="0" anchor="ctr"/>
+          <a:lstStyle/>
+          <a:p>
+            <a:pPr indent="0" marL="0">
+              <a:buNone/>
+            </a:pPr>
+            <a:r>
+              <a:rPr lang="en-US" sz="1000" b="1" dirty="0">
+                <a:solidFill>
+                  <a:schemeClr val="tx1"/>
+                </a:solidFill>
+                <a:latin typeface="Malgun Gothic" pitchFamily="34" charset="0"/>
+                <a:ea typeface="Malgun Gothic" pitchFamily="34" charset="-122"/>
+                <a:cs typeface="Malgun Gothic" pitchFamily="34" charset="-120"/>
+              </a:rPr>
+              <a:t>이 수어는 「택시」 (표준)</a:t>
+            </a:r>
+            <a:endParaRPr lang="en-US" sz="1000" dirty="0"/>
+          </a:p>
+        </p:txBody>
+      </p:sp>
+      <p:sp>
+        <p:nvSpPr>
+          <p:cNvPr id="33" name="Shape 30"/>
+          <p:cNvSpPr/>
+          <p:nvPr/>
+        </p:nvSpPr>
+        <p:spPr>
+          <a:xfrm>
+            <a:off x="3794760" y="2770632"/>
+            <a:ext cx="1965960" cy="640080"/>
+          </a:xfrm>
+          <a:prstGeom prst="rect">
+            <a:avLst/>
+          </a:prstGeom>
+          <a:solidFill>
+            <a:schemeClr val="accent4"/>
+          </a:solidFill>
+          <a:ln w="9525">
+            <a:solidFill>
+              <a:schemeClr val="accent3"/>
+            </a:solidFill>
+            <a:prstDash val="dash"/>
+          </a:ln>
+        </p:spPr>
+      </p:sp>
+      <p:sp>
+        <p:nvSpPr>
+          <p:cNvPr id="34" name="Shape 31"/>
+          <p:cNvSpPr/>
+          <p:nvPr/>
+        </p:nvSpPr>
+        <p:spPr>
+          <a:xfrm>
+            <a:off x="3794760" y="2770632"/>
+            <a:ext cx="1965960" cy="640080"/>
+          </a:xfrm>
+          <a:prstGeom prst="line">
+            <a:avLst/>
+          </a:prstGeom>
+          <a:noFill/>
+          <a:ln w="6350">
+            <a:solidFill>
+              <a:schemeClr val="accent3"/>
+            </a:solidFill>
+            <a:prstDash val="solid"/>
+          </a:ln>
+        </p:spPr>
+      </p:sp>
+      <p:sp>
+        <p:nvSpPr>
+          <p:cNvPr id="35" name="Shape 32"/>
+          <p:cNvSpPr/>
+          <p:nvPr/>
+        </p:nvSpPr>
+        <p:spPr>
+          <a:xfrm>
+            <a:off x="3794760" y="3410712"/>
+            <a:ext cx="1965960" cy="-640080"/>
+          </a:xfrm>
+          <a:prstGeom prst="line">
+            <a:avLst/>
+          </a:prstGeom>
+          <a:noFill/>
+          <a:ln w="6350">
+            <a:solidFill>
+              <a:schemeClr val="accent3"/>
+            </a:solidFill>
+            <a:prstDash val="solid"/>
+          </a:ln>
+        </p:spPr>
+      </p:sp>
+      <p:sp>
+        <p:nvSpPr>
+          <p:cNvPr id="36" name="Text 33"/>
+          <p:cNvSpPr txBox="1"/>
+          <p:nvPr/>
+        </p:nvSpPr>
+        <p:spPr>
+          <a:xfrm>
+            <a:off x="3794760" y="2971800"/>
+            <a:ext cx="1965960" cy="237744"/>
+          </a:xfrm>
+          <a:prstGeom prst="rect">
+            <a:avLst/>
+          </a:prstGeom>
+          <a:solidFill>
+            <a:schemeClr val="accent4"/>
+          </a:solidFill>
+          <a:ln/>
+        </p:spPr>
+        <p:txBody>
+          <a:bodyPr wrap="square" lIns="0" tIns="0" rIns="0" bIns="0" rtlCol="0" anchor="t"/>
+          <a:lstStyle/>
+          <a:p>
+            <a:pPr algn="ctr" indent="0" marL="0">
+              <a:buNone/>
+            </a:pPr>
+            <a:r>
+              <a:rPr lang="en-US" sz="1000" dirty="0">
+                <a:solidFill>
+                  <a:schemeClr val="tx2"/>
+                </a:solidFill>
+                <a:latin typeface="Malgun Gothic" pitchFamily="34" charset="0"/>
+                <a:ea typeface="Malgun Gothic" pitchFamily="34" charset="-122"/>
+                <a:cs typeface="Malgun Gothic" pitchFamily="34" charset="-120"/>
+              </a:rPr>
+              <a:t>지역별 택시 비교 미리보기</a:t>
+            </a:r>
+            <a:endParaRPr lang="en-US" sz="1000" dirty="0"/>
+          </a:p>
+        </p:txBody>
+      </p:sp>
+      <p:sp>
+        <p:nvSpPr>
+          <p:cNvPr id="37" name="Text 34"/>
+          <p:cNvSpPr txBox="1"/>
+          <p:nvPr/>
+        </p:nvSpPr>
+        <p:spPr>
+          <a:xfrm>
+            <a:off x="3794760" y="3456432"/>
+            <a:ext cx="1965960" cy="219456"/>
+          </a:xfrm>
+          <a:prstGeom prst="rect">
+            <a:avLst/>
+          </a:prstGeom>
+          <a:noFill/>
+          <a:ln/>
+        </p:spPr>
+        <p:txBody>
+          <a:bodyPr wrap="square" lIns="0" tIns="0" rIns="0" bIns="0" rtlCol="0" anchor="ctr"/>
+          <a:lstStyle/>
+          <a:p>
+            <a:pPr indent="0" marL="0">
+              <a:buNone/>
+            </a:pPr>
+            <a:r>
+              <a:rPr lang="en-US" sz="1000" dirty="0">
+                <a:solidFill>
+                  <a:schemeClr val="tx2"/>
+                </a:solidFill>
+                <a:latin typeface="Malgun Gothic" pitchFamily="34" charset="0"/>
+                <a:ea typeface="Malgun Gothic" pitchFamily="34" charset="-122"/>
+                <a:cs typeface="Malgun Gothic" pitchFamily="34" charset="-120"/>
+              </a:rPr>
+              <a:t>근거: 국립국어원 한국수어사전</a:t>
+            </a:r>
+            <a:endParaRPr lang="en-US" sz="1000" dirty="0"/>
+          </a:p>
+        </p:txBody>
+      </p:sp>
+      <p:sp>
+        <p:nvSpPr>
+          <p:cNvPr id="38" name="Text 35"/>
+          <p:cNvSpPr/>
+          <p:nvPr/>
+        </p:nvSpPr>
+        <p:spPr>
+          <a:xfrm>
+            <a:off x="3794760" y="3749040"/>
+            <a:ext cx="955548" cy="329184"/>
+          </a:xfrm>
+          <a:prstGeom prst="roundRect">
+            <a:avLst>
+              <a:gd name="adj" fmla="val 16667"/>
+            </a:avLst>
+          </a:prstGeom>
+          <a:solidFill>
+            <a:schemeClr val="accent1"/>
+          </a:solidFill>
+          <a:ln w="9525">
+            <a:solidFill>
+              <a:schemeClr val="accent1"/>
+            </a:solidFill>
+          </a:ln>
+        </p:spPr>
+        <p:txBody>
+          <a:bodyPr wrap="square" lIns="0" tIns="0" rIns="0" bIns="0" rtlCol="0" anchor="ctr"/>
+          <a:lstStyle/>
+          <a:p>
+            <a:pPr algn="ctr" indent="0" marL="0">
+              <a:buNone/>
+            </a:pPr>
+            <a:r>
+              <a:rPr lang="en-US" sz="1000" b="1" dirty="0">
+                <a:solidFill>
+                  <a:schemeClr val="bg1"/>
+                </a:solidFill>
+                <a:latin typeface="Malgun Gothic" pitchFamily="34" charset="0"/>
+                <a:ea typeface="Malgun Gothic" pitchFamily="34" charset="-122"/>
+                <a:cs typeface="Malgun Gothic" pitchFamily="34" charset="-120"/>
+              </a:rPr>
+              <a:t>다음 문제</a:t>
+            </a:r>
+            <a:endParaRPr lang="en-US" sz="1000" dirty="0"/>
+          </a:p>
+        </p:txBody>
+      </p:sp>
+      <p:sp>
+        <p:nvSpPr>
+          <p:cNvPr id="39" name="Text 36"/>
+          <p:cNvSpPr/>
+          <p:nvPr/>
+        </p:nvSpPr>
+        <p:spPr>
+          <a:xfrm>
+            <a:off x="4805172" y="3749040"/>
+            <a:ext cx="955548" cy="329184"/>
+          </a:xfrm>
+          <a:prstGeom prst="roundRect">
+            <a:avLst>
+              <a:gd name="adj" fmla="val 16667"/>
+            </a:avLst>
+          </a:prstGeom>
+          <a:solidFill>
+            <a:schemeClr val="bg1"/>
+          </a:solidFill>
+          <a:ln w="9525">
+            <a:solidFill>
+              <a:schemeClr val="accent3"/>
+            </a:solidFill>
+          </a:ln>
+        </p:spPr>
+        <p:txBody>
+          <a:bodyPr wrap="square" lIns="0" tIns="0" rIns="0" bIns="0" rtlCol="0" anchor="ctr"/>
+          <a:lstStyle/>
+          <a:p>
+            <a:pPr algn="ctr" indent="0" marL="0">
+              <a:buNone/>
+            </a:pPr>
+            <a:r>
+              <a:rPr lang="en-US" sz="1000" dirty="0">
+                <a:solidFill>
+                  <a:schemeClr val="tx1"/>
+                </a:solidFill>
+                <a:latin typeface="Malgun Gothic" pitchFamily="34" charset="0"/>
+                <a:ea typeface="Malgun Gothic" pitchFamily="34" charset="-122"/>
+                <a:cs typeface="Malgun Gothic" pitchFamily="34" charset="-120"/>
+              </a:rPr>
+              <a:t>단어 비교하기</a:t>
+            </a:r>
+            <a:endParaRPr lang="en-US" sz="1000" dirty="0"/>
+          </a:p>
+        </p:txBody>
+      </p:sp>
+      <p:sp>
+        <p:nvSpPr>
+          <p:cNvPr id="40" name="Shape 37"/>
+          <p:cNvSpPr/>
+          <p:nvPr/>
+        </p:nvSpPr>
+        <p:spPr>
+          <a:xfrm>
+            <a:off x="6446520" y="914400"/>
+            <a:ext cx="2240280" cy="3886200"/>
+          </a:xfrm>
+          <a:prstGeom prst="roundRect">
+            <a:avLst>
+              <a:gd name="adj" fmla="val 3265"/>
+            </a:avLst>
+          </a:prstGeom>
+          <a:solidFill>
+            <a:schemeClr val="bg1"/>
           </a:solidFill>
           <a:ln w="9525">
             <a:solidFill>
@@ -10211,14 +11862,14 @@
       </p:sp>
       <p:sp>
         <p:nvSpPr>
-          <p:cNvPr id="5" name="Text 2"/>
+          <p:cNvPr id="41" name="Text 38"/>
           <p:cNvSpPr txBox="1"/>
           <p:nvPr/>
         </p:nvSpPr>
         <p:spPr>
           <a:xfrm>
-            <a:off x="685800" y="1280160"/>
-            <a:ext cx="2194560" cy="365760"/>
+            <a:off x="6629400" y="1097280"/>
+            <a:ext cx="1920240" cy="320040"/>
           </a:xfrm>
           <a:prstGeom prst="rect">
             <a:avLst/>
@@ -10234,30 +11885,30 @@
               <a:buNone/>
             </a:pPr>
             <a:r>
-              <a:rPr lang="en-US" sz="1800" b="1" dirty="0">
-                <a:solidFill>
-                  <a:schemeClr val="tx1"/>
-                </a:solidFill>
-                <a:latin typeface="Malgun Gothic" pitchFamily="34" charset="0"/>
-                <a:ea typeface="Malgun Gothic" pitchFamily="34" charset="-122"/>
-                <a:cs typeface="Malgun Gothic" pitchFamily="34" charset="-120"/>
-              </a:rPr>
-              <a:t>완료</a:t>
-            </a:r>
-            <a:endParaRPr lang="en-US" sz="1800" dirty="0"/>
-          </a:p>
-        </p:txBody>
-      </p:sp>
-      <p:sp>
-        <p:nvSpPr>
-          <p:cNvPr id="6" name="Text 3"/>
+              <a:rPr lang="en-US" sz="1400" b="1" dirty="0">
+                <a:solidFill>
+                  <a:schemeClr val="accent2"/>
+                </a:solidFill>
+                <a:latin typeface="Malgun Gothic" pitchFamily="34" charset="0"/>
+                <a:ea typeface="Malgun Gothic" pitchFamily="34" charset="-122"/>
+                <a:cs typeface="Malgun Gothic" pitchFamily="34" charset="-120"/>
+              </a:rPr>
+              <a:t>정할 것</a:t>
+            </a:r>
+            <a:endParaRPr lang="en-US" sz="1400" dirty="0"/>
+          </a:p>
+        </p:txBody>
+      </p:sp>
+      <p:sp>
+        <p:nvSpPr>
+          <p:cNvPr id="42" name="Text 39"/>
           <p:cNvSpPr txBox="1"/>
           <p:nvPr/>
         </p:nvSpPr>
         <p:spPr>
           <a:xfrm>
-            <a:off x="685800" y="1783080"/>
-            <a:ext cx="2194560" cy="2651760"/>
+            <a:off x="6629400" y="1508760"/>
+            <a:ext cx="1920240" cy="3108960"/>
           </a:xfrm>
           <a:prstGeom prst="rect">
             <a:avLst/>
@@ -10277,7 +11928,7 @@
               <a:buChar char="•"/>
             </a:pPr>
             <a:r>
-              <a:rPr lang="en-US" sz="1400" dirty="0">
+              <a:rPr lang="en-US" sz="1200" dirty="0">
                 <a:solidFill>
                   <a:schemeClr val="tx1"/>
                 </a:solidFill>
@@ -10285,9 +11936,9 @@
                 <a:ea typeface="Malgun Gothic" pitchFamily="34" charset="-122"/>
                 <a:cs typeface="Malgun Gothic" pitchFamily="34" charset="-120"/>
               </a:rPr>
-              <a:t>42개 단어 확정 (지역 차이 근거 순)</a:t>
-            </a:r>
-            <a:endParaRPr lang="en-US" sz="1400" dirty="0"/>
+              <a:t>점수 · 정답/오답 표시를 둘까?</a:t>
+            </a:r>
+            <a:endParaRPr lang="en-US" sz="1200" dirty="0"/>
           </a:p>
           <a:p>
             <a:pPr marL="342900" indent="-342900">
@@ -10298,7 +11949,7 @@
               <a:buChar char="•"/>
             </a:pPr>
             <a:r>
-              <a:rPr lang="en-US" sz="1400" dirty="0">
+              <a:rPr lang="en-US" sz="1200" dirty="0">
                 <a:solidFill>
                   <a:schemeClr val="tx1"/>
                 </a:solidFill>
@@ -10306,353 +11957,9 @@
                 <a:ea typeface="Malgun Gothic" pitchFamily="34" charset="-122"/>
                 <a:cs typeface="Malgun Gothic" pitchFamily="34" charset="-120"/>
               </a:rPr>
-              <a:t>표준 수어 사전 원문 정리</a:t>
-            </a:r>
-            <a:endParaRPr lang="en-US" sz="1400" dirty="0"/>
-          </a:p>
-          <a:p>
-            <a:pPr marL="342900" indent="-342900">
-              <a:spcAft>
-                <a:spcPts val="800"/>
-              </a:spcAft>
-              <a:buSzPct val="100000"/>
-              <a:buChar char="•"/>
-            </a:pPr>
-            <a:r>
-              <a:rPr lang="en-US" sz="1400" dirty="0">
-                <a:solidFill>
-                  <a:schemeClr val="tx1"/>
-                </a:solidFill>
-                <a:latin typeface="Malgun Gothic" pitchFamily="34" charset="0"/>
-                <a:ea typeface="Malgun Gothic" pitchFamily="34" charset="-122"/>
-                <a:cs typeface="Malgun Gothic" pitchFamily="34" charset="-120"/>
-              </a:rPr>
-              <a:t>시트 개요 탭 · 열 정리</a:t>
-            </a:r>
-            <a:endParaRPr lang="en-US" sz="1400" dirty="0"/>
-          </a:p>
-          <a:p>
-            <a:pPr marL="342900" indent="-342900">
-              <a:spcAft>
-                <a:spcPts val="800"/>
-              </a:spcAft>
-              <a:buSzPct val="100000"/>
-              <a:buChar char="•"/>
-            </a:pPr>
-            <a:r>
-              <a:rPr lang="en-US" sz="1400" dirty="0">
-                <a:solidFill>
-                  <a:schemeClr val="tx1"/>
-                </a:solidFill>
-                <a:latin typeface="Malgun Gothic" pitchFamily="34" charset="0"/>
-                <a:ea typeface="Malgun Gothic" pitchFamily="34" charset="-122"/>
-                <a:cs typeface="Malgun Gothic" pitchFamily="34" charset="-120"/>
-              </a:rPr>
-              <a:t>직접 해보기 시제품 (카메라 · 손 좌표)</a:t>
-            </a:r>
-            <a:endParaRPr lang="en-US" sz="1400" dirty="0"/>
-          </a:p>
-        </p:txBody>
-      </p:sp>
-      <p:sp>
-        <p:nvSpPr>
-          <p:cNvPr id="7" name="Shape 4"/>
-          <p:cNvSpPr/>
-          <p:nvPr/>
-        </p:nvSpPr>
-        <p:spPr>
-          <a:xfrm>
-            <a:off x="3273552" y="1097280"/>
-            <a:ext cx="2615184" cy="3474720"/>
-          </a:xfrm>
-          <a:prstGeom prst="roundRect">
-            <a:avLst>
-              <a:gd name="adj" fmla="val 2797"/>
-            </a:avLst>
-          </a:prstGeom>
-          <a:solidFill>
-            <a:schemeClr val="accent4"/>
-          </a:solidFill>
-          <a:ln w="9525">
-            <a:solidFill>
-              <a:schemeClr val="accent3"/>
-            </a:solidFill>
-            <a:prstDash val="solid"/>
-          </a:ln>
-        </p:spPr>
-      </p:sp>
-      <p:sp>
-        <p:nvSpPr>
-          <p:cNvPr id="8" name="Text 5"/>
-          <p:cNvSpPr txBox="1"/>
-          <p:nvPr/>
-        </p:nvSpPr>
-        <p:spPr>
-          <a:xfrm>
-            <a:off x="3502152" y="1280160"/>
-            <a:ext cx="2194560" cy="365760"/>
-          </a:xfrm>
-          <a:prstGeom prst="rect">
-            <a:avLst/>
-          </a:prstGeom>
-          <a:noFill/>
-          <a:ln/>
-        </p:spPr>
-        <p:txBody>
-          <a:bodyPr wrap="square" lIns="0" tIns="0" rIns="0" bIns="0" rtlCol="0" anchor="t"/>
-          <a:lstStyle/>
-          <a:p>
-            <a:pPr indent="0" marL="0">
-              <a:buNone/>
-            </a:pPr>
-            <a:r>
-              <a:rPr lang="en-US" sz="1800" b="1" dirty="0">
-                <a:solidFill>
-                  <a:schemeClr val="accent1"/>
-                </a:solidFill>
-                <a:latin typeface="Malgun Gothic" pitchFamily="34" charset="0"/>
-                <a:ea typeface="Malgun Gothic" pitchFamily="34" charset="-122"/>
-                <a:cs typeface="Malgun Gothic" pitchFamily="34" charset="-120"/>
-              </a:rPr>
-              <a:t>진행 중</a:t>
-            </a:r>
-            <a:endParaRPr lang="en-US" sz="1800" dirty="0"/>
-          </a:p>
-        </p:txBody>
-      </p:sp>
-      <p:sp>
-        <p:nvSpPr>
-          <p:cNvPr id="9" name="Text 6"/>
-          <p:cNvSpPr txBox="1"/>
-          <p:nvPr/>
-        </p:nvSpPr>
-        <p:spPr>
-          <a:xfrm>
-            <a:off x="3502152" y="1783080"/>
-            <a:ext cx="2194560" cy="2651760"/>
-          </a:xfrm>
-          <a:prstGeom prst="rect">
-            <a:avLst/>
-          </a:prstGeom>
-          <a:noFill/>
-          <a:ln/>
-        </p:spPr>
-        <p:txBody>
-          <a:bodyPr wrap="square" lIns="0" tIns="0" rIns="0" bIns="0" rtlCol="0" anchor="t"/>
-          <a:lstStyle/>
-          <a:p>
-            <a:pPr marL="342900" indent="-342900">
-              <a:spcAft>
-                <a:spcPts val="800"/>
-              </a:spcAft>
-              <a:buSzPct val="100000"/>
-              <a:buChar char="•"/>
-            </a:pPr>
-            <a:r>
-              <a:rPr lang="en-US" sz="1400" dirty="0">
-                <a:solidFill>
-                  <a:schemeClr val="tx1"/>
-                </a:solidFill>
-                <a:latin typeface="Malgun Gothic" pitchFamily="34" charset="0"/>
-                <a:ea typeface="Malgun Gothic" pitchFamily="34" charset="-122"/>
-                <a:cs typeface="Malgun Gothic" pitchFamily="34" charset="-120"/>
-              </a:rPr>
-              <a:t>지역 수어 영상 촬영 · 협회 문의</a:t>
-            </a:r>
-            <a:endParaRPr lang="en-US" sz="1400" dirty="0"/>
-          </a:p>
-          <a:p>
-            <a:pPr marL="342900" indent="-342900">
-              <a:spcAft>
-                <a:spcPts val="800"/>
-              </a:spcAft>
-              <a:buSzPct val="100000"/>
-              <a:buChar char="•"/>
-            </a:pPr>
-            <a:r>
-              <a:rPr lang="en-US" sz="1400" dirty="0">
-                <a:solidFill>
-                  <a:schemeClr val="tx1"/>
-                </a:solidFill>
-                <a:latin typeface="Malgun Gothic" pitchFamily="34" charset="0"/>
-                <a:ea typeface="Malgun Gothic" pitchFamily="34" charset="-122"/>
-                <a:cs typeface="Malgun Gothic" pitchFamily="34" charset="-120"/>
-              </a:rPr>
-              <a:t>AI-Hub 가입 · 이용 신청</a:t>
-            </a:r>
-            <a:endParaRPr lang="en-US" sz="1400" dirty="0"/>
-          </a:p>
-          <a:p>
-            <a:pPr marL="342900" indent="-342900">
-              <a:spcAft>
-                <a:spcPts val="800"/>
-              </a:spcAft>
-              <a:buSzPct val="100000"/>
-              <a:buChar char="•"/>
-            </a:pPr>
-            <a:r>
-              <a:rPr lang="en-US" sz="1400" dirty="0">
-                <a:solidFill>
-                  <a:schemeClr val="tx1"/>
-                </a:solidFill>
-                <a:latin typeface="Malgun Gothic" pitchFamily="34" charset="0"/>
-                <a:ea typeface="Malgun Gothic" pitchFamily="34" charset="-122"/>
-                <a:cs typeface="Malgun Gothic" pitchFamily="34" charset="-120"/>
-              </a:rPr>
-              <a:t>42개 중 AI-Hub 포함 단어 확인</a:t>
-            </a:r>
-            <a:endParaRPr lang="en-US" sz="1400" dirty="0"/>
-          </a:p>
-        </p:txBody>
-      </p:sp>
-      <p:sp>
-        <p:nvSpPr>
-          <p:cNvPr id="10" name="Shape 7"/>
-          <p:cNvSpPr/>
-          <p:nvPr/>
-        </p:nvSpPr>
-        <p:spPr>
-          <a:xfrm>
-            <a:off x="6089904" y="1097280"/>
-            <a:ext cx="2615184" cy="3474720"/>
-          </a:xfrm>
-          <a:prstGeom prst="roundRect">
-            <a:avLst>
-              <a:gd name="adj" fmla="val 2797"/>
-            </a:avLst>
-          </a:prstGeom>
-          <a:solidFill>
-            <a:schemeClr val="bg2"/>
-          </a:solidFill>
-          <a:ln w="9525">
-            <a:solidFill>
-              <a:schemeClr val="accent3"/>
-            </a:solidFill>
-            <a:prstDash val="solid"/>
-          </a:ln>
-        </p:spPr>
-      </p:sp>
-      <p:sp>
-        <p:nvSpPr>
-          <p:cNvPr id="11" name="Text 8"/>
-          <p:cNvSpPr txBox="1"/>
-          <p:nvPr/>
-        </p:nvSpPr>
-        <p:spPr>
-          <a:xfrm>
-            <a:off x="6318504" y="1280160"/>
-            <a:ext cx="2194560" cy="365760"/>
-          </a:xfrm>
-          <a:prstGeom prst="rect">
-            <a:avLst/>
-          </a:prstGeom>
-          <a:noFill/>
-          <a:ln/>
-        </p:spPr>
-        <p:txBody>
-          <a:bodyPr wrap="square" lIns="0" tIns="0" rIns="0" bIns="0" rtlCol="0" anchor="t"/>
-          <a:lstStyle/>
-          <a:p>
-            <a:pPr indent="0" marL="0">
-              <a:buNone/>
-            </a:pPr>
-            <a:r>
-              <a:rPr lang="en-US" sz="1800" b="1" dirty="0">
-                <a:solidFill>
-                  <a:schemeClr val="accent2"/>
-                </a:solidFill>
-                <a:latin typeface="Malgun Gothic" pitchFamily="34" charset="0"/>
-                <a:ea typeface="Malgun Gothic" pitchFamily="34" charset="-122"/>
-                <a:cs typeface="Malgun Gothic" pitchFamily="34" charset="-120"/>
-              </a:rPr>
-              <a:t>결선 12.13</a:t>
-            </a:r>
-            <a:endParaRPr lang="en-US" sz="1800" dirty="0"/>
-          </a:p>
-        </p:txBody>
-      </p:sp>
-      <p:sp>
-        <p:nvSpPr>
-          <p:cNvPr id="12" name="Text 9"/>
-          <p:cNvSpPr txBox="1"/>
-          <p:nvPr/>
-        </p:nvSpPr>
-        <p:spPr>
-          <a:xfrm>
-            <a:off x="6318504" y="1783080"/>
-            <a:ext cx="2194560" cy="2651760"/>
-          </a:xfrm>
-          <a:prstGeom prst="rect">
-            <a:avLst/>
-          </a:prstGeom>
-          <a:noFill/>
-          <a:ln/>
-        </p:spPr>
-        <p:txBody>
-          <a:bodyPr wrap="square" lIns="0" tIns="0" rIns="0" bIns="0" rtlCol="0" anchor="t"/>
-          <a:lstStyle/>
-          <a:p>
-            <a:pPr marL="342900" indent="-342900">
-              <a:spcAft>
-                <a:spcPts val="800"/>
-              </a:spcAft>
-              <a:buSzPct val="100000"/>
-              <a:buChar char="•"/>
-            </a:pPr>
-            <a:r>
-              <a:rPr lang="en-US" sz="1400" dirty="0">
-                <a:solidFill>
-                  <a:schemeClr val="tx1"/>
-                </a:solidFill>
-                <a:latin typeface="Malgun Gothic" pitchFamily="34" charset="0"/>
-                <a:ea typeface="Malgun Gothic" pitchFamily="34" charset="-122"/>
-                <a:cs typeface="Malgun Gothic" pitchFamily="34" charset="-120"/>
-              </a:rPr>
-              <a:t>실제 작동하는 웹앱으로 시연</a:t>
-            </a:r>
-            <a:endParaRPr lang="en-US" sz="1400" dirty="0"/>
-          </a:p>
-          <a:p>
-            <a:pPr marL="342900" indent="-342900">
-              <a:spcAft>
-                <a:spcPts val="800"/>
-              </a:spcAft>
-              <a:buSzPct val="100000"/>
-              <a:buChar char="•"/>
-            </a:pPr>
-            <a:r>
-              <a:rPr lang="en-US" sz="1400" dirty="0">
-                <a:solidFill>
-                  <a:schemeClr val="tx1"/>
-                </a:solidFill>
-                <a:latin typeface="Malgun Gothic" pitchFamily="34" charset="0"/>
-                <a:ea typeface="Malgun Gothic" pitchFamily="34" charset="-122"/>
-                <a:cs typeface="Malgun Gothic" pitchFamily="34" charset="-120"/>
-              </a:rPr>
-              <a:t>준비한 예시 2~3건</a:t>
-            </a:r>
-            <a:endParaRPr lang="en-US" sz="1400" dirty="0"/>
-          </a:p>
-          <a:p>
-            <a:pPr marL="342900" indent="-342900">
-              <a:spcAft>
-                <a:spcPts val="800"/>
-              </a:spcAft>
-              <a:buSzPct val="100000"/>
-              <a:buChar char="•"/>
-            </a:pPr>
-            <a:r>
-              <a:rPr lang="en-US" sz="1400" dirty="0">
-                <a:solidFill>
-                  <a:schemeClr val="tx1"/>
-                </a:solidFill>
-                <a:latin typeface="Malgun Gothic" pitchFamily="34" charset="0"/>
-                <a:ea typeface="Malgun Gothic" pitchFamily="34" charset="-122"/>
-                <a:cs typeface="Malgun Gothic" pitchFamily="34" charset="-120"/>
-              </a:rPr>
-              <a:t>백업 영상 3분 사전 제출</a:t>
-            </a:r>
-            <a:endParaRPr lang="en-US" sz="1400" dirty="0"/>
+              <a:t>두지 않으면: 고른 뒤 뜻과 근거, 지역 비교로 연결 (왼쪽 화면)</a:t>
+            </a:r>
+            <a:endParaRPr lang="en-US" sz="1200" dirty="0"/>
           </a:p>
         </p:txBody>
       </p:sp>
